--- a/docs/competition/银发导航智能体：基于多Agent协同的老年人安心出行伴侣_作品介绍PPT.pptx
+++ b/docs/competition/银发导航智能体：基于多Agent协同的老年人安心出行伴侣_作品介绍PPT.pptx
@@ -15,6 +15,7 @@
     <p:sldId id="263" r:id="rId14"/>
     <p:sldId id="264" r:id="rId15"/>
     <p:sldId id="265" r:id="rId16"/>
+    <p:sldId id="266" r:id="rId17"/>
   </p:sldIdLst>
   <p:sldSz cx="12191695" cy="6858000" type="screen4x3"/>
   <p:notesSz cx="6858000" cy="9144000"/>
@@ -3112,7 +3113,7 @@
             <a:avLst/>
           </a:prstGeom>
           <a:solidFill>
-            <a:srgbClr val="0F2043"/>
+            <a:srgbClr val="0B192C"/>
           </a:solidFill>
           <a:ln>
             <a:noFill/>
@@ -3142,7 +3143,50 @@
       </p:sp>
       <p:sp>
         <p:nvSpPr>
-          <p:cNvPr id="3" name="TextBox 2"/>
+          <p:cNvPr id="3" name="Rectangle 2"/>
+          <p:cNvSpPr/>
+          <p:nvPr/>
+        </p:nvSpPr>
+        <p:spPr>
+          <a:xfrm>
+            <a:off x="731520" y="1097280"/>
+            <a:ext cx="109728" cy="4389120"/>
+          </a:xfrm>
+          <a:prstGeom prst="rect">
+            <a:avLst/>
+          </a:prstGeom>
+          <a:solidFill>
+            <a:srgbClr val="008DDA"/>
+          </a:solidFill>
+          <a:ln>
+            <a:noFill/>
+          </a:ln>
+        </p:spPr>
+        <p:style>
+          <a:lnRef idx="1">
+            <a:schemeClr val="accent1"/>
+          </a:lnRef>
+          <a:fillRef idx="3">
+            <a:schemeClr val="accent1"/>
+          </a:fillRef>
+          <a:effectRef idx="2">
+            <a:schemeClr val="accent1"/>
+          </a:effectRef>
+          <a:fontRef idx="minor">
+            <a:schemeClr val="lt1"/>
+          </a:fontRef>
+        </p:style>
+        <p:txBody>
+          <a:bodyPr rtlCol="0" anchor="ctr"/>
+          <a:lstStyle/>
+          <a:p>
+            <a:pPr algn="ctr"/>
+          </a:p>
+        </p:txBody>
+      </p:sp>
+      <p:sp>
+        <p:nvSpPr>
+          <p:cNvPr id="4" name="TextBox 3"/>
           <p:cNvSpPr txBox="1"/>
           <p:nvPr/>
         </p:nvSpPr>
@@ -3163,27 +3207,27 @@
           <a:lstStyle/>
           <a:p>
             <a:pPr>
-              <a:defRPr sz="1400" b="1">
-                <a:solidFill>
-                  <a:srgbClr val="00A8CC"/>
-                </a:solidFill>
-                <a:latin typeface="SimHei"/>
-              </a:defRPr>
-            </a:pPr>
-            <a:r>
-              <a:t>第八届湖南省大学生智能导航科技创新大赛 · 科技创意类作品</a:t>
+              <a:defRPr sz="1300" b="1">
+                <a:solidFill>
+                  <a:srgbClr val="008DDA"/>
+                </a:solidFill>
+                <a:latin typeface="Microsoft YaHei"/>
+              </a:defRPr>
+            </a:pPr>
+            <a:r>
+              <a:t>智慧助老 · 北斗高精时空 · 多Agent协同网络</a:t>
             </a:r>
           </a:p>
           <a:p>
             <a:pPr>
               <a:spcBef>
-                <a:spcPts val="1600"/>
+                <a:spcPts val="1200"/>
               </a:spcBef>
-              <a:defRPr sz="4000" b="1">
+              <a:defRPr sz="4200" b="1">
                 <a:solidFill>
                   <a:srgbClr val="FFFFFF"/>
                 </a:solidFill>
-                <a:latin typeface="SimHei"/>
+                <a:latin typeface="Microsoft YaHei"/>
               </a:defRPr>
             </a:pPr>
             <a:r>
@@ -3199,7 +3243,7 @@
                 <a:solidFill>
                   <a:srgbClr val="E0E7FF"/>
                 </a:solidFill>
-                <a:latin typeface="SimHei"/>
+                <a:latin typeface="Microsoft YaHei"/>
               </a:defRPr>
             </a:pPr>
             <a:r>
@@ -3209,9 +3253,9 @@
           <a:p>
             <a:pPr>
               <a:spcBef>
-                <a:spcPts val="2400"/>
+                <a:spcPts val="2800"/>
               </a:spcBef>
-              <a:defRPr sz="1300">
+              <a:defRPr sz="1250">
                 <a:solidFill>
                   <a:srgbClr val="94A3B8"/>
                 </a:solidFill>
@@ -3219,13 +3263,13 @@
               </a:defRPr>
             </a:pPr>
             <a:r>
-              <a:t>深度融合北斗卫星高精时空感知 · 适老化微地形代价路由 · 亲情双向守护闭环</a:t>
+              <a:t>北斗亚米级时空基准 · 适老微地形代价路由 · 亲情双向守护闭环 · 突发急救秒级重划</a:t>
             </a:r>
           </a:p>
           <a:p>
             <a:pPr>
               <a:spcBef>
-                <a:spcPts val="4000"/>
+                <a:spcPts val="4500"/>
               </a:spcBef>
               <a:defRPr sz="1100">
                 <a:solidFill>
@@ -3235,7 +3279,7 @@
               </a:defRPr>
             </a:pPr>
             <a:r>
-              <a:t>主办单位：湖南省教育厅  |  承办单位：国防科技大学、测控与导航技术联合工程研究中心、湘南学院</a:t>
+              <a:t>项目方案汇报 · 2026年9月</a:t>
             </a:r>
           </a:p>
         </p:txBody>
@@ -3273,7 +3317,7 @@
             <a:avLst/>
           </a:prstGeom>
           <a:solidFill>
-            <a:srgbClr val="0F2043"/>
+            <a:srgbClr val="F8FAFC"/>
           </a:solidFill>
           <a:ln>
             <a:noFill/>
@@ -3309,8 +3353,624 @@
         </p:nvSpPr>
         <p:spPr>
           <a:xfrm>
+            <a:off x="731520" y="365760"/>
+            <a:ext cx="10728655" cy="1005840"/>
+          </a:xfrm>
+          <a:prstGeom prst="rect">
+            <a:avLst/>
+          </a:prstGeom>
+          <a:noFill/>
+        </p:spPr>
+        <p:txBody>
+          <a:bodyPr wrap="square" lIns="0" tIns="0" rIns="0" bIns="0">
+            <a:spAutoFit/>
+          </a:bodyPr>
+          <a:lstStyle/>
+          <a:p>
+            <a:pPr>
+              <a:defRPr sz="1050" b="1">
+                <a:solidFill>
+                  <a:srgbClr val="008DDA"/>
+                </a:solidFill>
+                <a:latin typeface="Microsoft YaHei"/>
+              </a:defRPr>
+            </a:pPr>
+            <a:r>
+              <a:t>银发导航智能体 · 系统技术方案</a:t>
+            </a:r>
+          </a:p>
+          <a:p>
+            <a:pPr>
+              <a:spcBef>
+                <a:spcPts val="300"/>
+              </a:spcBef>
+              <a:defRPr sz="2200" b="1">
+                <a:solidFill>
+                  <a:srgbClr val="0B192C"/>
+                </a:solidFill>
+                <a:latin typeface="Microsoft YaHei"/>
+              </a:defRPr>
+            </a:pPr>
+            <a:r>
+              <a:t>九、 商业落地闭环与产业化战略价值</a:t>
+            </a:r>
+          </a:p>
+        </p:txBody>
+      </p:sp>
+      <p:sp>
+        <p:nvSpPr>
+          <p:cNvPr id="4" name="Rounded Rectangle 3"/>
+          <p:cNvSpPr/>
+          <p:nvPr/>
+        </p:nvSpPr>
+        <p:spPr>
+          <a:xfrm>
+            <a:off x="731520" y="1463040"/>
+            <a:ext cx="5212080" cy="2148840"/>
+          </a:xfrm>
+          <a:prstGeom prst="roundRect">
+            <a:avLst/>
+          </a:prstGeom>
+          <a:solidFill>
+            <a:srgbClr val="FFFFFF"/>
+          </a:solidFill>
+          <a:ln w="12700">
+            <a:solidFill>
+              <a:srgbClr val="E2E8F0"/>
+            </a:solidFill>
+          </a:ln>
+        </p:spPr>
+        <p:style>
+          <a:lnRef idx="1">
+            <a:schemeClr val="accent1"/>
+          </a:lnRef>
+          <a:fillRef idx="3">
+            <a:schemeClr val="accent1"/>
+          </a:fillRef>
+          <a:effectRef idx="2">
+            <a:schemeClr val="accent1"/>
+          </a:effectRef>
+          <a:fontRef idx="minor">
+            <a:schemeClr val="lt1"/>
+          </a:fontRef>
+        </p:style>
+        <p:txBody>
+          <a:bodyPr rtlCol="0" anchor="ctr"/>
+          <a:lstStyle/>
+          <a:p>
+            <a:pPr algn="ctr"/>
+          </a:p>
+        </p:txBody>
+      </p:sp>
+      <p:sp>
+        <p:nvSpPr>
+          <p:cNvPr id="5" name="TextBox 4"/>
+          <p:cNvSpPr txBox="1"/>
+          <p:nvPr/>
+        </p:nvSpPr>
+        <p:spPr>
+          <a:xfrm>
+            <a:off x="914400" y="1627632"/>
+            <a:ext cx="4846320" cy="1828800"/>
+          </a:xfrm>
+          <a:prstGeom prst="rect">
+            <a:avLst/>
+          </a:prstGeom>
+          <a:noFill/>
+        </p:spPr>
+        <p:txBody>
+          <a:bodyPr wrap="square" lIns="0" tIns="0">
+            <a:spAutoFit/>
+          </a:bodyPr>
+          <a:lstStyle/>
+          <a:p>
+            <a:pPr>
+              <a:defRPr sz="1350" b="1">
+                <a:solidFill>
+                  <a:srgbClr val="0B192C"/>
+                </a:solidFill>
+                <a:latin typeface="Microsoft YaHei"/>
+              </a:defRPr>
+            </a:pPr>
+            <a:r>
+              <a:t>💎 B2C 孝心经济订阅模式</a:t>
+            </a:r>
+          </a:p>
+          <a:p>
+            <a:pPr>
+              <a:lnSpc>
+                <a:spcPct val="130000"/>
+              </a:lnSpc>
+              <a:spcBef>
+                <a:spcPts val="600"/>
+              </a:spcBef>
+              <a:defRPr sz="1000">
+                <a:solidFill>
+                  <a:srgbClr val="334155"/>
+                </a:solidFill>
+                <a:latin typeface="SimSun"/>
+              </a:defRPr>
+            </a:pPr>
+            <a:r>
+              <a:t>基础无障碍导航永久免费；北斗高精走廊与急救绿通收取家庭年费（199元/年），打造高粘性孝心生态。</a:t>
+            </a:r>
+          </a:p>
+          <a:p>
+            <a:pPr>
+              <a:spcBef>
+                <a:spcPts val="800"/>
+              </a:spcBef>
+              <a:defRPr sz="850" i="1">
+                <a:solidFill>
+                  <a:srgbClr val="64748B"/>
+                </a:solidFill>
+              </a:defRPr>
+            </a:pPr>
+            <a:r>
+              <a:t>【此处可粘贴商业闭环图谱或硬件合作渲染图】</a:t>
+            </a:r>
+          </a:p>
+        </p:txBody>
+      </p:sp>
+      <p:sp>
+        <p:nvSpPr>
+          <p:cNvPr id="6" name="Rounded Rectangle 5"/>
+          <p:cNvSpPr/>
+          <p:nvPr/>
+        </p:nvSpPr>
+        <p:spPr>
+          <a:xfrm>
+            <a:off x="6172200" y="1463040"/>
+            <a:ext cx="5212080" cy="2148840"/>
+          </a:xfrm>
+          <a:prstGeom prst="roundRect">
+            <a:avLst/>
+          </a:prstGeom>
+          <a:solidFill>
+            <a:srgbClr val="FFFFFF"/>
+          </a:solidFill>
+          <a:ln w="12700">
+            <a:solidFill>
+              <a:srgbClr val="E2E8F0"/>
+            </a:solidFill>
+          </a:ln>
+        </p:spPr>
+        <p:style>
+          <a:lnRef idx="1">
+            <a:schemeClr val="accent1"/>
+          </a:lnRef>
+          <a:fillRef idx="3">
+            <a:schemeClr val="accent1"/>
+          </a:fillRef>
+          <a:effectRef idx="2">
+            <a:schemeClr val="accent1"/>
+          </a:effectRef>
+          <a:fontRef idx="minor">
+            <a:schemeClr val="lt1"/>
+          </a:fontRef>
+        </p:style>
+        <p:txBody>
+          <a:bodyPr rtlCol="0" anchor="ctr"/>
+          <a:lstStyle/>
+          <a:p>
+            <a:pPr algn="ctr"/>
+          </a:p>
+        </p:txBody>
+      </p:sp>
+      <p:sp>
+        <p:nvSpPr>
+          <p:cNvPr id="7" name="TextBox 6"/>
+          <p:cNvSpPr txBox="1"/>
+          <p:nvPr/>
+        </p:nvSpPr>
+        <p:spPr>
+          <a:xfrm>
+            <a:off x="6355080" y="1627632"/>
+            <a:ext cx="4846320" cy="1828800"/>
+          </a:xfrm>
+          <a:prstGeom prst="rect">
+            <a:avLst/>
+          </a:prstGeom>
+          <a:noFill/>
+        </p:spPr>
+        <p:txBody>
+          <a:bodyPr wrap="square" lIns="0" tIns="0">
+            <a:spAutoFit/>
+          </a:bodyPr>
+          <a:lstStyle/>
+          <a:p>
+            <a:pPr>
+              <a:defRPr sz="1350" b="1">
+                <a:solidFill>
+                  <a:srgbClr val="0B192C"/>
+                </a:solidFill>
+                <a:latin typeface="Microsoft YaHei"/>
+              </a:defRPr>
+            </a:pPr>
+            <a:r>
+              <a:t>💎 B2B 智能康养硬件赋能</a:t>
+            </a:r>
+          </a:p>
+          <a:p>
+            <a:pPr>
+              <a:lnSpc>
+                <a:spcPct val="130000"/>
+              </a:lnSpc>
+              <a:spcBef>
+                <a:spcPts val="600"/>
+              </a:spcBef>
+              <a:defRPr sz="1000">
+                <a:solidFill>
+                  <a:srgbClr val="334155"/>
+                </a:solidFill>
+                <a:latin typeface="SimSun"/>
+              </a:defRPr>
+            </a:pPr>
+            <a:r>
+              <a:t>联合智能拐杖、老人定位手表、银发助行器厂商，提供北斗适老微地形导航 SDK 与守护后台，软硬一体交付。</a:t>
+            </a:r>
+          </a:p>
+          <a:p>
+            <a:pPr>
+              <a:spcBef>
+                <a:spcPts val="800"/>
+              </a:spcBef>
+              <a:defRPr sz="850" i="1">
+                <a:solidFill>
+                  <a:srgbClr val="64748B"/>
+                </a:solidFill>
+              </a:defRPr>
+            </a:pPr>
+            <a:r>
+              <a:t>【此处可粘贴商业闭环图谱或硬件合作渲染图】</a:t>
+            </a:r>
+          </a:p>
+        </p:txBody>
+      </p:sp>
+      <p:sp>
+        <p:nvSpPr>
+          <p:cNvPr id="8" name="Rounded Rectangle 7"/>
+          <p:cNvSpPr/>
+          <p:nvPr/>
+        </p:nvSpPr>
+        <p:spPr>
+          <a:xfrm>
+            <a:off x="731520" y="3794760"/>
+            <a:ext cx="5212080" cy="2148840"/>
+          </a:xfrm>
+          <a:prstGeom prst="roundRect">
+            <a:avLst/>
+          </a:prstGeom>
+          <a:solidFill>
+            <a:srgbClr val="FFFFFF"/>
+          </a:solidFill>
+          <a:ln w="12700">
+            <a:solidFill>
+              <a:srgbClr val="E2E8F0"/>
+            </a:solidFill>
+          </a:ln>
+        </p:spPr>
+        <p:style>
+          <a:lnRef idx="1">
+            <a:schemeClr val="accent1"/>
+          </a:lnRef>
+          <a:fillRef idx="3">
+            <a:schemeClr val="accent1"/>
+          </a:fillRef>
+          <a:effectRef idx="2">
+            <a:schemeClr val="accent1"/>
+          </a:effectRef>
+          <a:fontRef idx="minor">
+            <a:schemeClr val="lt1"/>
+          </a:fontRef>
+        </p:style>
+        <p:txBody>
+          <a:bodyPr rtlCol="0" anchor="ctr"/>
+          <a:lstStyle/>
+          <a:p>
+            <a:pPr algn="ctr"/>
+          </a:p>
+        </p:txBody>
+      </p:sp>
+      <p:sp>
+        <p:nvSpPr>
+          <p:cNvPr id="9" name="TextBox 8"/>
+          <p:cNvSpPr txBox="1"/>
+          <p:nvPr/>
+        </p:nvSpPr>
+        <p:spPr>
+          <a:xfrm>
+            <a:off x="914400" y="3959352"/>
+            <a:ext cx="4846320" cy="1828800"/>
+          </a:xfrm>
+          <a:prstGeom prst="rect">
+            <a:avLst/>
+          </a:prstGeom>
+          <a:noFill/>
+        </p:spPr>
+        <p:txBody>
+          <a:bodyPr wrap="square" lIns="0" tIns="0">
+            <a:spAutoFit/>
+          </a:bodyPr>
+          <a:lstStyle/>
+          <a:p>
+            <a:pPr>
+              <a:defRPr sz="1350" b="1">
+                <a:solidFill>
+                  <a:srgbClr val="0B192C"/>
+                </a:solidFill>
+                <a:latin typeface="Microsoft YaHei"/>
+              </a:defRPr>
+            </a:pPr>
+            <a:r>
+              <a:t>💎 B2G 智慧民政网格采购</a:t>
+            </a:r>
+          </a:p>
+          <a:p>
+            <a:pPr>
+              <a:lnSpc>
+                <a:spcPct val="130000"/>
+              </a:lnSpc>
+              <a:spcBef>
+                <a:spcPts val="600"/>
+              </a:spcBef>
+              <a:defRPr sz="1000">
+                <a:solidFill>
+                  <a:srgbClr val="334155"/>
+                </a:solidFill>
+                <a:latin typeface="SimSun"/>
+              </a:defRPr>
+            </a:pPr>
+            <a:r>
+              <a:t>对接民政老龄委'智慧助老工程'，作为社区网格养老、独居孤寡老人走失防范的标准数字化公共基建。</a:t>
+            </a:r>
+          </a:p>
+          <a:p>
+            <a:pPr>
+              <a:spcBef>
+                <a:spcPts val="800"/>
+              </a:spcBef>
+              <a:defRPr sz="850" i="1">
+                <a:solidFill>
+                  <a:srgbClr val="64748B"/>
+                </a:solidFill>
+              </a:defRPr>
+            </a:pPr>
+            <a:r>
+              <a:t>【此处可粘贴商业闭环图谱或硬件合作渲染图】</a:t>
+            </a:r>
+          </a:p>
+        </p:txBody>
+      </p:sp>
+      <p:sp>
+        <p:nvSpPr>
+          <p:cNvPr id="10" name="Rounded Rectangle 9"/>
+          <p:cNvSpPr/>
+          <p:nvPr/>
+        </p:nvSpPr>
+        <p:spPr>
+          <a:xfrm>
+            <a:off x="6172200" y="3794760"/>
+            <a:ext cx="5212080" cy="2148840"/>
+          </a:xfrm>
+          <a:prstGeom prst="roundRect">
+            <a:avLst/>
+          </a:prstGeom>
+          <a:solidFill>
+            <a:srgbClr val="FFFFFF"/>
+          </a:solidFill>
+          <a:ln w="12700">
+            <a:solidFill>
+              <a:srgbClr val="E2E8F0"/>
+            </a:solidFill>
+          </a:ln>
+        </p:spPr>
+        <p:style>
+          <a:lnRef idx="1">
+            <a:schemeClr val="accent1"/>
+          </a:lnRef>
+          <a:fillRef idx="3">
+            <a:schemeClr val="accent1"/>
+          </a:fillRef>
+          <a:effectRef idx="2">
+            <a:schemeClr val="accent1"/>
+          </a:effectRef>
+          <a:fontRef idx="minor">
+            <a:schemeClr val="lt1"/>
+          </a:fontRef>
+        </p:style>
+        <p:txBody>
+          <a:bodyPr rtlCol="0" anchor="ctr"/>
+          <a:lstStyle/>
+          <a:p>
+            <a:pPr algn="ctr"/>
+          </a:p>
+        </p:txBody>
+      </p:sp>
+      <p:sp>
+        <p:nvSpPr>
+          <p:cNvPr id="11" name="TextBox 10"/>
+          <p:cNvSpPr txBox="1"/>
+          <p:nvPr/>
+        </p:nvSpPr>
+        <p:spPr>
+          <a:xfrm>
+            <a:off x="6355080" y="3959352"/>
+            <a:ext cx="4846320" cy="1828800"/>
+          </a:xfrm>
+          <a:prstGeom prst="rect">
+            <a:avLst/>
+          </a:prstGeom>
+          <a:noFill/>
+        </p:spPr>
+        <p:txBody>
+          <a:bodyPr wrap="square" lIns="0" tIns="0">
+            <a:spAutoFit/>
+          </a:bodyPr>
+          <a:lstStyle/>
+          <a:p>
+            <a:pPr>
+              <a:defRPr sz="1350" b="1">
+                <a:solidFill>
+                  <a:srgbClr val="0B192C"/>
+                </a:solidFill>
+                <a:latin typeface="Microsoft YaHei"/>
+              </a:defRPr>
+            </a:pPr>
+            <a:r>
+              <a:t>💎 战略价值：北斗规模化民生赋能</a:t>
+            </a:r>
+          </a:p>
+          <a:p>
+            <a:pPr>
+              <a:lnSpc>
+                <a:spcPct val="130000"/>
+              </a:lnSpc>
+              <a:spcBef>
+                <a:spcPts val="600"/>
+              </a:spcBef>
+              <a:defRPr sz="1000">
+                <a:solidFill>
+                  <a:srgbClr val="334155"/>
+                </a:solidFill>
+                <a:latin typeface="SimSun"/>
+              </a:defRPr>
+            </a:pPr>
+            <a:r>
+              <a:t>践行国家应对人口老龄化战略，赋能北斗卫星导航系统大众民生消费级应用，助力产业规模化提质跃升。</a:t>
+            </a:r>
+          </a:p>
+          <a:p>
+            <a:pPr>
+              <a:spcBef>
+                <a:spcPts val="800"/>
+              </a:spcBef>
+              <a:defRPr sz="850" i="1">
+                <a:solidFill>
+                  <a:srgbClr val="64748B"/>
+                </a:solidFill>
+              </a:defRPr>
+            </a:pPr>
+            <a:r>
+              <a:t>【此处可粘贴商业闭环图谱或硬件合作渲染图】</a:t>
+            </a:r>
+          </a:p>
+        </p:txBody>
+      </p:sp>
+    </p:spTree>
+  </p:cSld>
+  <p:clrMapOvr>
+    <a:masterClrMapping/>
+  </p:clrMapOvr>
+</p:sld>
+</file>
+
+<file path=ppt/slides/slide11.xml><?xml version="1.0" encoding="utf-8"?>
+<p:sld xmlns:a="http://schemas.openxmlformats.org/drawingml/2006/main" xmlns:p="http://schemas.openxmlformats.org/presentationml/2006/main" xmlns:r="http://schemas.openxmlformats.org/officeDocument/2006/relationships">
+  <p:cSld>
+    <p:spTree>
+      <p:nvGrpSpPr>
+        <p:cNvPr id="1" name=""/>
+        <p:cNvGrpSpPr/>
+        <p:nvPr/>
+      </p:nvGrpSpPr>
+      <p:grpSpPr/>
+      <p:sp>
+        <p:nvSpPr>
+          <p:cNvPr id="2" name="Rectangle 1"/>
+          <p:cNvSpPr/>
+          <p:nvPr/>
+        </p:nvSpPr>
+        <p:spPr>
+          <a:xfrm>
+            <a:off x="0" y="0"/>
+            <a:ext cx="12191695" cy="6858000"/>
+          </a:xfrm>
+          <a:prstGeom prst="rect">
+            <a:avLst/>
+          </a:prstGeom>
+          <a:solidFill>
+            <a:srgbClr val="0B192C"/>
+          </a:solidFill>
+          <a:ln>
+            <a:noFill/>
+          </a:ln>
+        </p:spPr>
+        <p:style>
+          <a:lnRef idx="1">
+            <a:schemeClr val="accent1"/>
+          </a:lnRef>
+          <a:fillRef idx="3">
+            <a:schemeClr val="accent1"/>
+          </a:fillRef>
+          <a:effectRef idx="2">
+            <a:schemeClr val="accent1"/>
+          </a:effectRef>
+          <a:fontRef idx="minor">
+            <a:schemeClr val="lt1"/>
+          </a:fontRef>
+        </p:style>
+        <p:txBody>
+          <a:bodyPr rtlCol="0" anchor="ctr"/>
+          <a:lstStyle/>
+          <a:p>
+            <a:pPr algn="ctr"/>
+          </a:p>
+        </p:txBody>
+      </p:sp>
+      <p:sp>
+        <p:nvSpPr>
+          <p:cNvPr id="3" name="Rectangle 2"/>
+          <p:cNvSpPr/>
+          <p:nvPr/>
+        </p:nvSpPr>
+        <p:spPr>
+          <a:xfrm>
+            <a:off x="731520" y="1645920"/>
+            <a:ext cx="109728" cy="3291840"/>
+          </a:xfrm>
+          <a:prstGeom prst="rect">
+            <a:avLst/>
+          </a:prstGeom>
+          <a:solidFill>
+            <a:srgbClr val="008DDA"/>
+          </a:solidFill>
+          <a:ln>
+            <a:noFill/>
+          </a:ln>
+        </p:spPr>
+        <p:style>
+          <a:lnRef idx="1">
+            <a:schemeClr val="accent1"/>
+          </a:lnRef>
+          <a:fillRef idx="3">
+            <a:schemeClr val="accent1"/>
+          </a:fillRef>
+          <a:effectRef idx="2">
+            <a:schemeClr val="accent1"/>
+          </a:effectRef>
+          <a:fontRef idx="minor">
+            <a:schemeClr val="lt1"/>
+          </a:fontRef>
+        </p:style>
+        <p:txBody>
+          <a:bodyPr rtlCol="0" anchor="ctr"/>
+          <a:lstStyle/>
+          <a:p>
+            <a:pPr algn="ctr"/>
+          </a:p>
+        </p:txBody>
+      </p:sp>
+      <p:sp>
+        <p:nvSpPr>
+          <p:cNvPr id="4" name="TextBox 3"/>
+          <p:cNvSpPr txBox="1"/>
+          <p:nvPr/>
+        </p:nvSpPr>
+        <p:spPr>
+          <a:xfrm>
             <a:off x="1097280" y="1645920"/>
-            <a:ext cx="10058400" cy="4114800"/>
+            <a:ext cx="10058400" cy="3291840"/>
           </a:xfrm>
           <a:prstGeom prst="rect">
             <a:avLst/>
@@ -3328,7 +3988,7 @@
                 <a:solidFill>
                   <a:srgbClr val="FFFFFF"/>
                 </a:solidFill>
-                <a:latin typeface="SimHei"/>
+                <a:latin typeface="Microsoft YaHei"/>
               </a:defRPr>
             </a:pPr>
             <a:r>
@@ -3338,17 +3998,17 @@
           <a:p>
             <a:pPr>
               <a:spcBef>
-                <a:spcPts val="1800"/>
+                <a:spcPts val="1600"/>
               </a:spcBef>
               <a:defRPr sz="1800" b="1">
                 <a:solidFill>
-                  <a:srgbClr val="00A8CC"/>
-                </a:solidFill>
-                <a:latin typeface="SimHei"/>
-              </a:defRPr>
-            </a:pPr>
-            <a:r>
-              <a:t>北斗高精时空 · 多Agent协同闭环 · 适老化科技向善</a:t>
+                  <a:srgbClr val="008DDA"/>
+                </a:solidFill>
+                <a:latin typeface="Microsoft YaHei"/>
+              </a:defRPr>
+            </a:pPr>
+            <a:r>
+              <a:t>以硬核科技承托人间温度 · 用智能导航跨越银发数字鸿沟</a:t>
             </a:r>
           </a:p>
           <a:p>
@@ -3364,7 +4024,7 @@
               </a:defRPr>
             </a:pPr>
             <a:r>
-              <a:t>第八届湖南省大学生智能导航科技创新大赛 · 科技创意类参赛作品汇报</a:t>
+              <a:t>银发导航智能体：基于多Agent协同的老年人安心出行伴侣</a:t>
             </a:r>
           </a:p>
         </p:txBody>
@@ -3389,77 +4049,23 @@
       <p:grpSpPr/>
       <p:sp>
         <p:nvSpPr>
-          <p:cNvPr id="2" name="TextBox 1"/>
-          <p:cNvSpPr txBox="1"/>
-          <p:nvPr/>
-        </p:nvSpPr>
-        <p:spPr>
-          <a:xfrm>
-            <a:off x="731520" y="365760"/>
-            <a:ext cx="10698480" cy="1005840"/>
+          <p:cNvPr id="2" name="Rectangle 1"/>
+          <p:cNvSpPr/>
+          <p:nvPr/>
+        </p:nvSpPr>
+        <p:spPr>
+          <a:xfrm>
+            <a:off x="0" y="0"/>
+            <a:ext cx="12191695" cy="6858000"/>
           </a:xfrm>
           <a:prstGeom prst="rect">
             <a:avLst/>
           </a:prstGeom>
-          <a:noFill/>
-        </p:spPr>
-        <p:txBody>
-          <a:bodyPr wrap="square" lIns="0" tIns="0" rIns="0" bIns="0">
-            <a:spAutoFit/>
-          </a:bodyPr>
-          <a:lstStyle/>
-          <a:p>
-            <a:pPr>
-              <a:defRPr sz="1100" b="1">
-                <a:solidFill>
-                  <a:srgbClr val="00A8CC"/>
-                </a:solidFill>
-                <a:latin typeface="SimHei"/>
-              </a:defRPr>
-            </a:pPr>
-            <a:r>
-              <a:t>第八届湖南省大学生智能导航科技创新大赛 · 科技创意类</a:t>
-            </a:r>
-          </a:p>
-          <a:p>
-            <a:pPr>
-              <a:spcBef>
-                <a:spcPts val="400"/>
-              </a:spcBef>
-              <a:defRPr sz="2200" b="1">
-                <a:solidFill>
-                  <a:srgbClr val="0F2043"/>
-                </a:solidFill>
-                <a:latin typeface="SimHei"/>
-              </a:defRPr>
-            </a:pPr>
-            <a:r>
-              <a:t>一、 立项背景与银发群体出行三大核心痛点</a:t>
-            </a:r>
-          </a:p>
-        </p:txBody>
-      </p:sp>
-      <p:sp>
-        <p:nvSpPr>
-          <p:cNvPr id="3" name="Rounded Rectangle 2"/>
-          <p:cNvSpPr/>
-          <p:nvPr/>
-        </p:nvSpPr>
-        <p:spPr>
-          <a:xfrm>
-            <a:off x="731520" y="1645920"/>
-            <a:ext cx="3429000" cy="4389120"/>
-          </a:xfrm>
-          <a:prstGeom prst="roundRect">
-            <a:avLst/>
-          </a:prstGeom>
           <a:solidFill>
-            <a:srgbClr val="FFFFFF"/>
+            <a:srgbClr val="F8FAFC"/>
           </a:solidFill>
-          <a:ln w="19050">
-            <a:solidFill>
-              <a:srgbClr val="E2E8F0"/>
-            </a:solidFill>
+          <a:ln>
+            <a:noFill/>
           </a:ln>
         </p:spPr>
         <p:style>
@@ -3486,14 +4092,14 @@
       </p:sp>
       <p:sp>
         <p:nvSpPr>
-          <p:cNvPr id="4" name="TextBox 3"/>
+          <p:cNvPr id="3" name="TextBox 2"/>
           <p:cNvSpPr txBox="1"/>
           <p:nvPr/>
         </p:nvSpPr>
         <p:spPr>
           <a:xfrm>
-            <a:off x="960120" y="1828800"/>
-            <a:ext cx="2971800" cy="3931920"/>
+            <a:off x="731520" y="365760"/>
+            <a:ext cx="10728655" cy="1005840"/>
           </a:xfrm>
           <a:prstGeom prst="rect">
             <a:avLst/>
@@ -3501,70 +4107,51 @@
           <a:noFill/>
         </p:spPr>
         <p:txBody>
-          <a:bodyPr wrap="square">
+          <a:bodyPr wrap="square" lIns="0" tIns="0" rIns="0" bIns="0">
             <a:spAutoFit/>
           </a:bodyPr>
           <a:lstStyle/>
           <a:p>
             <a:pPr>
-              <a:defRPr sz="2400" b="1">
-                <a:solidFill>
-                  <a:srgbClr val="00A8CC"/>
-                </a:solidFill>
-                <a:latin typeface="Arial"/>
-              </a:defRPr>
-            </a:pPr>
-            <a:r>
-              <a:t>01</a:t>
+              <a:defRPr sz="1050" b="1">
+                <a:solidFill>
+                  <a:srgbClr val="008DDA"/>
+                </a:solidFill>
+                <a:latin typeface="Microsoft YaHei"/>
+              </a:defRPr>
+            </a:pPr>
+            <a:r>
+              <a:t>银发导航智能体 · 系统技术方案</a:t>
             </a:r>
           </a:p>
           <a:p>
             <a:pPr>
               <a:spcBef>
-                <a:spcPts val="800"/>
+                <a:spcPts val="300"/>
               </a:spcBef>
-              <a:defRPr sz="1500" b="1">
-                <a:solidFill>
-                  <a:srgbClr val="0F2043"/>
-                </a:solidFill>
-                <a:latin typeface="SimHei"/>
-              </a:defRPr>
-            </a:pPr>
-            <a:r>
-              <a:t>痛点 1：传统导航算法不适老</a:t>
-            </a:r>
-          </a:p>
-          <a:p>
-            <a:pPr>
-              <a:lnSpc>
-                <a:spcPct val="130000"/>
-              </a:lnSpc>
-              <a:spcBef>
-                <a:spcPts val="1400"/>
-              </a:spcBef>
-              <a:defRPr sz="1100">
-                <a:solidFill>
-                  <a:srgbClr val="64748B"/>
-                </a:solidFill>
-                <a:latin typeface="SimSun"/>
-              </a:defRPr>
-            </a:pPr>
-            <a:r>
-              <a:t>主流地图追求'距离最短/时间最短'，常推荐陡坡、长台阶、无盲道及复杂过街天桥，导致行动不便的老人寸步难行或面临跌倒风险。</a:t>
-            </a:r>
-          </a:p>
-        </p:txBody>
-      </p:sp>
-      <p:sp>
-        <p:nvSpPr>
-          <p:cNvPr id="5" name="Rounded Rectangle 4"/>
+              <a:defRPr sz="2200" b="1">
+                <a:solidFill>
+                  <a:srgbClr val="0B192C"/>
+                </a:solidFill>
+                <a:latin typeface="Microsoft YaHei"/>
+              </a:defRPr>
+            </a:pPr>
+            <a:r>
+              <a:t>一、 银发群体出行痛点：传统导航产品对老龄群体的系统性忽视</a:t>
+            </a:r>
+          </a:p>
+        </p:txBody>
+      </p:sp>
+      <p:sp>
+        <p:nvSpPr>
+          <p:cNvPr id="4" name="Rounded Rectangle 3"/>
           <p:cNvSpPr/>
           <p:nvPr/>
         </p:nvSpPr>
         <p:spPr>
           <a:xfrm>
-            <a:off x="4343400" y="1645920"/>
-            <a:ext cx="3429000" cy="4389120"/>
+            <a:off x="731520" y="1463040"/>
+            <a:ext cx="1965960" cy="1005840"/>
           </a:xfrm>
           <a:prstGeom prst="roundRect">
             <a:avLst/>
@@ -3572,7 +4159,7 @@
           <a:solidFill>
             <a:srgbClr val="FFFFFF"/>
           </a:solidFill>
-          <a:ln w="19050">
+          <a:ln w="12700">
             <a:solidFill>
               <a:srgbClr val="E2E8F0"/>
             </a:solidFill>
@@ -3602,14 +4189,14 @@
       </p:sp>
       <p:sp>
         <p:nvSpPr>
-          <p:cNvPr id="6" name="TextBox 5"/>
+          <p:cNvPr id="5" name="TextBox 4"/>
           <p:cNvSpPr txBox="1"/>
           <p:nvPr/>
         </p:nvSpPr>
         <p:spPr>
           <a:xfrm>
-            <a:off x="4572000" y="1828800"/>
-            <a:ext cx="2971800" cy="3931920"/>
+            <a:off x="822960" y="1508760"/>
+            <a:ext cx="1783080" cy="914400"/>
           </a:xfrm>
           <a:prstGeom prst="rect">
             <a:avLst/>
@@ -3617,48 +4204,26 @@
           <a:noFill/>
         </p:spPr>
         <p:txBody>
-          <a:bodyPr wrap="square">
+          <a:bodyPr wrap="square" lIns="0" tIns="0">
             <a:spAutoFit/>
           </a:bodyPr>
           <a:lstStyle/>
           <a:p>
             <a:pPr>
-              <a:defRPr sz="2400" b="1">
-                <a:solidFill>
-                  <a:srgbClr val="00A8CC"/>
+              <a:defRPr sz="2000" b="1">
+                <a:solidFill>
+                  <a:srgbClr val="0B192C"/>
                 </a:solidFill>
                 <a:latin typeface="Arial"/>
               </a:defRPr>
             </a:pPr>
             <a:r>
-              <a:t>02</a:t>
-            </a:r>
-          </a:p>
-          <a:p>
-            <a:pPr>
-              <a:spcBef>
-                <a:spcPts val="800"/>
-              </a:spcBef>
-              <a:defRPr sz="1500" b="1">
-                <a:solidFill>
-                  <a:srgbClr val="0F2043"/>
-                </a:solidFill>
-                <a:latin typeface="SimHei"/>
-              </a:defRPr>
-            </a:pPr>
-            <a:r>
-              <a:t>痛点 2：数字交互门槛高与弱智反问</a:t>
-            </a:r>
-          </a:p>
-          <a:p>
-            <a:pPr>
-              <a:lnSpc>
-                <a:spcPct val="130000"/>
-              </a:lnSpc>
-              <a:spcBef>
-                <a:spcPts val="1400"/>
-              </a:spcBef>
-              <a:defRPr sz="1100">
+              <a:t>3.1 亿+</a:t>
+            </a:r>
+          </a:p>
+          <a:p>
+            <a:pPr>
+              <a:defRPr sz="900">
                 <a:solidFill>
                   <a:srgbClr val="64748B"/>
                 </a:solidFill>
@@ -3666,21 +4231,21 @@
               </a:defRPr>
             </a:pPr>
             <a:r>
-              <a:t>多层级菜单、小字号密集信息及多轮询问让老人望而却步；语音识别缺乏方言鲁棒性与语义宽容度，无法自主形成行动闭环。</a:t>
-            </a:r>
-          </a:p>
-        </p:txBody>
-      </p:sp>
-      <p:sp>
-        <p:nvSpPr>
-          <p:cNvPr id="7" name="Rounded Rectangle 6"/>
+              <a:t>我国60岁及以上老龄人口</a:t>
+            </a:r>
+          </a:p>
+        </p:txBody>
+      </p:sp>
+      <p:sp>
+        <p:nvSpPr>
+          <p:cNvPr id="6" name="Rounded Rectangle 5"/>
           <p:cNvSpPr/>
           <p:nvPr/>
         </p:nvSpPr>
         <p:spPr>
           <a:xfrm>
-            <a:off x="7955280" y="1645920"/>
-            <a:ext cx="3429000" cy="4389120"/>
+            <a:off x="2834639" y="1463040"/>
+            <a:ext cx="1965960" cy="1005840"/>
           </a:xfrm>
           <a:prstGeom prst="roundRect">
             <a:avLst/>
@@ -3688,7 +4253,7 @@
           <a:solidFill>
             <a:srgbClr val="FFFFFF"/>
           </a:solidFill>
-          <a:ln w="19050">
+          <a:ln w="12700">
             <a:solidFill>
               <a:srgbClr val="E2E8F0"/>
             </a:solidFill>
@@ -3718,14 +4283,14 @@
       </p:sp>
       <p:sp>
         <p:nvSpPr>
-          <p:cNvPr id="8" name="TextBox 7"/>
+          <p:cNvPr id="7" name="TextBox 6"/>
           <p:cNvSpPr txBox="1"/>
           <p:nvPr/>
         </p:nvSpPr>
         <p:spPr>
           <a:xfrm>
-            <a:off x="8183880" y="1828800"/>
-            <a:ext cx="2971800" cy="3931920"/>
+            <a:off x="2926079" y="1508760"/>
+            <a:ext cx="1783080" cy="914400"/>
           </a:xfrm>
           <a:prstGeom prst="rect">
             <a:avLst/>
@@ -3733,56 +4298,535 @@
           <a:noFill/>
         </p:spPr>
         <p:txBody>
-          <a:bodyPr wrap="square">
+          <a:bodyPr wrap="square" lIns="0" tIns="0">
             <a:spAutoFit/>
           </a:bodyPr>
           <a:lstStyle/>
           <a:p>
             <a:pPr>
-              <a:defRPr sz="2400" b="1">
-                <a:solidFill>
-                  <a:srgbClr val="00A8CC"/>
+              <a:defRPr sz="2000" b="1">
+                <a:solidFill>
+                  <a:srgbClr val="F59E0B"/>
                 </a:solidFill>
                 <a:latin typeface="Arial"/>
               </a:defRPr>
             </a:pPr>
             <a:r>
-              <a:t>03</a:t>
-            </a:r>
-          </a:p>
-          <a:p>
-            <a:pPr>
+              <a:t>68.4 %</a:t>
+            </a:r>
+          </a:p>
+          <a:p>
+            <a:pPr>
+              <a:defRPr sz="900">
+                <a:solidFill>
+                  <a:srgbClr val="64748B"/>
+                </a:solidFill>
+                <a:latin typeface="SimSun"/>
+              </a:defRPr>
+            </a:pPr>
+            <a:r>
+              <a:t>因台阶/陡坡/迷路产生出行畏难</a:t>
+            </a:r>
+          </a:p>
+        </p:txBody>
+      </p:sp>
+      <p:sp>
+        <p:nvSpPr>
+          <p:cNvPr id="8" name="Rounded Rectangle 7"/>
+          <p:cNvSpPr/>
+          <p:nvPr/>
+        </p:nvSpPr>
+        <p:spPr>
+          <a:xfrm>
+            <a:off x="4937759" y="1463040"/>
+            <a:ext cx="1965960" cy="1005840"/>
+          </a:xfrm>
+          <a:prstGeom prst="roundRect">
+            <a:avLst/>
+          </a:prstGeom>
+          <a:solidFill>
+            <a:srgbClr val="FFFFFF"/>
+          </a:solidFill>
+          <a:ln w="12700">
+            <a:solidFill>
+              <a:srgbClr val="E2E8F0"/>
+            </a:solidFill>
+          </a:ln>
+        </p:spPr>
+        <p:style>
+          <a:lnRef idx="1">
+            <a:schemeClr val="accent1"/>
+          </a:lnRef>
+          <a:fillRef idx="3">
+            <a:schemeClr val="accent1"/>
+          </a:fillRef>
+          <a:effectRef idx="2">
+            <a:schemeClr val="accent1"/>
+          </a:effectRef>
+          <a:fontRef idx="minor">
+            <a:schemeClr val="lt1"/>
+          </a:fontRef>
+        </p:style>
+        <p:txBody>
+          <a:bodyPr rtlCol="0" anchor="ctr"/>
+          <a:lstStyle/>
+          <a:p>
+            <a:pPr algn="ctr"/>
+          </a:p>
+        </p:txBody>
+      </p:sp>
+      <p:sp>
+        <p:nvSpPr>
+          <p:cNvPr id="9" name="TextBox 8"/>
+          <p:cNvSpPr txBox="1"/>
+          <p:nvPr/>
+        </p:nvSpPr>
+        <p:spPr>
+          <a:xfrm>
+            <a:off x="5029199" y="1508760"/>
+            <a:ext cx="1783080" cy="914400"/>
+          </a:xfrm>
+          <a:prstGeom prst="rect">
+            <a:avLst/>
+          </a:prstGeom>
+          <a:noFill/>
+        </p:spPr>
+        <p:txBody>
+          <a:bodyPr wrap="square" lIns="0" tIns="0">
+            <a:spAutoFit/>
+          </a:bodyPr>
+          <a:lstStyle/>
+          <a:p>
+            <a:pPr>
+              <a:defRPr sz="2000" b="1">
+                <a:solidFill>
+                  <a:srgbClr val="10B981"/>
+                </a:solidFill>
+                <a:latin typeface="Arial"/>
+              </a:defRPr>
+            </a:pPr>
+            <a:r>
+              <a:t>0 适老考量</a:t>
+            </a:r>
+          </a:p>
+          <a:p>
+            <a:pPr>
+              <a:defRPr sz="900">
+                <a:solidFill>
+                  <a:srgbClr val="64748B"/>
+                </a:solidFill>
+                <a:latin typeface="SimSun"/>
+              </a:defRPr>
+            </a:pPr>
+            <a:r>
+              <a:t>主流地图唯追求'距离/时间最短'</a:t>
+            </a:r>
+          </a:p>
+        </p:txBody>
+      </p:sp>
+      <p:sp>
+        <p:nvSpPr>
+          <p:cNvPr id="10" name="Rounded Rectangle 9"/>
+          <p:cNvSpPr/>
+          <p:nvPr/>
+        </p:nvSpPr>
+        <p:spPr>
+          <a:xfrm>
+            <a:off x="731520" y="2651760"/>
+            <a:ext cx="6126480" cy="1097280"/>
+          </a:xfrm>
+          <a:prstGeom prst="roundRect">
+            <a:avLst/>
+          </a:prstGeom>
+          <a:solidFill>
+            <a:srgbClr val="FFFFFF"/>
+          </a:solidFill>
+          <a:ln w="12700">
+            <a:solidFill>
+              <a:srgbClr val="E2E8F0"/>
+            </a:solidFill>
+          </a:ln>
+        </p:spPr>
+        <p:style>
+          <a:lnRef idx="1">
+            <a:schemeClr val="accent1"/>
+          </a:lnRef>
+          <a:fillRef idx="3">
+            <a:schemeClr val="accent1"/>
+          </a:fillRef>
+          <a:effectRef idx="2">
+            <a:schemeClr val="accent1"/>
+          </a:effectRef>
+          <a:fontRef idx="minor">
+            <a:schemeClr val="lt1"/>
+          </a:fontRef>
+        </p:style>
+        <p:txBody>
+          <a:bodyPr rtlCol="0" anchor="ctr"/>
+          <a:lstStyle/>
+          <a:p>
+            <a:pPr algn="ctr"/>
+          </a:p>
+        </p:txBody>
+      </p:sp>
+      <p:sp>
+        <p:nvSpPr>
+          <p:cNvPr id="11" name="TextBox 10"/>
+          <p:cNvSpPr txBox="1"/>
+          <p:nvPr/>
+        </p:nvSpPr>
+        <p:spPr>
+          <a:xfrm>
+            <a:off x="914400" y="2761488"/>
+            <a:ext cx="5760720" cy="868680"/>
+          </a:xfrm>
+          <a:prstGeom prst="rect">
+            <a:avLst/>
+          </a:prstGeom>
+          <a:noFill/>
+        </p:spPr>
+        <p:txBody>
+          <a:bodyPr wrap="square" lIns="0" tIns="0">
+            <a:spAutoFit/>
+          </a:bodyPr>
+          <a:lstStyle/>
+          <a:p>
+            <a:pPr>
+              <a:defRPr sz="1300" b="1">
+                <a:solidFill>
+                  <a:srgbClr val="0B192C"/>
+                </a:solidFill>
+                <a:latin typeface="Microsoft YaHei"/>
+              </a:defRPr>
+            </a:pPr>
+            <a:r>
+              <a:t>🚨 地形盲区：阶梯天桥寸步难行</a:t>
+            </a:r>
+          </a:p>
+          <a:p>
+            <a:pPr>
+              <a:spcBef>
+                <a:spcPts val="300"/>
+              </a:spcBef>
+              <a:defRPr sz="1000">
+                <a:solidFill>
+                  <a:srgbClr val="334155"/>
+                </a:solidFill>
+                <a:latin typeface="SimSun"/>
+              </a:defRPr>
+            </a:pPr>
+            <a:r>
+              <a:t>传统算法对台阶/陡坡零感知，常将关节炎、慢病老人导向险坡天桥，跌倒致残风险激增。</a:t>
+            </a:r>
+          </a:p>
+        </p:txBody>
+      </p:sp>
+      <p:sp>
+        <p:nvSpPr>
+          <p:cNvPr id="12" name="Rounded Rectangle 11"/>
+          <p:cNvSpPr/>
+          <p:nvPr/>
+        </p:nvSpPr>
+        <p:spPr>
+          <a:xfrm>
+            <a:off x="731520" y="3886200"/>
+            <a:ext cx="6126480" cy="1097280"/>
+          </a:xfrm>
+          <a:prstGeom prst="roundRect">
+            <a:avLst/>
+          </a:prstGeom>
+          <a:solidFill>
+            <a:srgbClr val="FFFFFF"/>
+          </a:solidFill>
+          <a:ln w="12700">
+            <a:solidFill>
+              <a:srgbClr val="E2E8F0"/>
+            </a:solidFill>
+          </a:ln>
+        </p:spPr>
+        <p:style>
+          <a:lnRef idx="1">
+            <a:schemeClr val="accent1"/>
+          </a:lnRef>
+          <a:fillRef idx="3">
+            <a:schemeClr val="accent1"/>
+          </a:fillRef>
+          <a:effectRef idx="2">
+            <a:schemeClr val="accent1"/>
+          </a:effectRef>
+          <a:fontRef idx="minor">
+            <a:schemeClr val="lt1"/>
+          </a:fontRef>
+        </p:style>
+        <p:txBody>
+          <a:bodyPr rtlCol="0" anchor="ctr"/>
+          <a:lstStyle/>
+          <a:p>
+            <a:pPr algn="ctr"/>
+          </a:p>
+        </p:txBody>
+      </p:sp>
+      <p:sp>
+        <p:nvSpPr>
+          <p:cNvPr id="13" name="TextBox 12"/>
+          <p:cNvSpPr txBox="1"/>
+          <p:nvPr/>
+        </p:nvSpPr>
+        <p:spPr>
+          <a:xfrm>
+            <a:off x="914400" y="3995928"/>
+            <a:ext cx="5760720" cy="868680"/>
+          </a:xfrm>
+          <a:prstGeom prst="rect">
+            <a:avLst/>
+          </a:prstGeom>
+          <a:noFill/>
+        </p:spPr>
+        <p:txBody>
+          <a:bodyPr wrap="square" lIns="0" tIns="0">
+            <a:spAutoFit/>
+          </a:bodyPr>
+          <a:lstStyle/>
+          <a:p>
+            <a:pPr>
+              <a:defRPr sz="1300" b="1">
+                <a:solidFill>
+                  <a:srgbClr val="0B192C"/>
+                </a:solidFill>
+                <a:latin typeface="Microsoft YaHei"/>
+              </a:defRPr>
+            </a:pPr>
+            <a:r>
+              <a:t>🚨 交互鸿沟：界面繁杂与弱智反问</a:t>
+            </a:r>
+          </a:p>
+          <a:p>
+            <a:pPr>
+              <a:spcBef>
+                <a:spcPts val="300"/>
+              </a:spcBef>
+              <a:defRPr sz="1000">
+                <a:solidFill>
+                  <a:srgbClr val="334155"/>
+                </a:solidFill>
+                <a:latin typeface="SimSun"/>
+              </a:defRPr>
+            </a:pPr>
+            <a:r>
+              <a:t>多层级菜单与生硬术语让长辈望而生畏；传统语音缺乏方言容错，陷入多轮重复质问。</a:t>
+            </a:r>
+          </a:p>
+        </p:txBody>
+      </p:sp>
+      <p:sp>
+        <p:nvSpPr>
+          <p:cNvPr id="14" name="Rounded Rectangle 13"/>
+          <p:cNvSpPr/>
+          <p:nvPr/>
+        </p:nvSpPr>
+        <p:spPr>
+          <a:xfrm>
+            <a:off x="731520" y="5120640"/>
+            <a:ext cx="6126480" cy="1097280"/>
+          </a:xfrm>
+          <a:prstGeom prst="roundRect">
+            <a:avLst/>
+          </a:prstGeom>
+          <a:solidFill>
+            <a:srgbClr val="FFFFFF"/>
+          </a:solidFill>
+          <a:ln w="12700">
+            <a:solidFill>
+              <a:srgbClr val="E2E8F0"/>
+            </a:solidFill>
+          </a:ln>
+        </p:spPr>
+        <p:style>
+          <a:lnRef idx="1">
+            <a:schemeClr val="accent1"/>
+          </a:lnRef>
+          <a:fillRef idx="3">
+            <a:schemeClr val="accent1"/>
+          </a:fillRef>
+          <a:effectRef idx="2">
+            <a:schemeClr val="accent1"/>
+          </a:effectRef>
+          <a:fontRef idx="minor">
+            <a:schemeClr val="lt1"/>
+          </a:fontRef>
+        </p:style>
+        <p:txBody>
+          <a:bodyPr rtlCol="0" anchor="ctr"/>
+          <a:lstStyle/>
+          <a:p>
+            <a:pPr algn="ctr"/>
+          </a:p>
+        </p:txBody>
+      </p:sp>
+      <p:sp>
+        <p:nvSpPr>
+          <p:cNvPr id="15" name="TextBox 14"/>
+          <p:cNvSpPr txBox="1"/>
+          <p:nvPr/>
+        </p:nvSpPr>
+        <p:spPr>
+          <a:xfrm>
+            <a:off x="914400" y="5230368"/>
+            <a:ext cx="5760720" cy="868680"/>
+          </a:xfrm>
+          <a:prstGeom prst="rect">
+            <a:avLst/>
+          </a:prstGeom>
+          <a:noFill/>
+        </p:spPr>
+        <p:txBody>
+          <a:bodyPr wrap="square" lIns="0" tIns="0">
+            <a:spAutoFit/>
+          </a:bodyPr>
+          <a:lstStyle/>
+          <a:p>
+            <a:pPr>
+              <a:defRPr sz="1300" b="1">
+                <a:solidFill>
+                  <a:srgbClr val="0B192C"/>
+                </a:solidFill>
+                <a:latin typeface="Microsoft YaHei"/>
+              </a:defRPr>
+            </a:pPr>
+            <a:r>
+              <a:t>🚨 守护悬空：意外迷路与子女脱节</a:t>
+            </a:r>
+          </a:p>
+          <a:p>
+            <a:pPr>
+              <a:spcBef>
+                <a:spcPts val="300"/>
+              </a:spcBef>
+              <a:defRPr sz="1000">
+                <a:solidFill>
+                  <a:srgbClr val="334155"/>
+                </a:solidFill>
+                <a:latin typeface="SimSun"/>
+              </a:defRPr>
+            </a:pPr>
+            <a:r>
+              <a:t>异地子女无法感知父母真实轨迹；缺乏高精度电子围栏与异常滞留主动预警机制。</a:t>
+            </a:r>
+          </a:p>
+        </p:txBody>
+      </p:sp>
+      <p:sp>
+        <p:nvSpPr>
+          <p:cNvPr id="16" name="Rounded Rectangle 15"/>
+          <p:cNvSpPr/>
+          <p:nvPr/>
+        </p:nvSpPr>
+        <p:spPr>
+          <a:xfrm>
+            <a:off x="7040880" y="1463040"/>
+            <a:ext cx="4389120" cy="4663440"/>
+          </a:xfrm>
+          <a:prstGeom prst="roundRect">
+            <a:avLst/>
+          </a:prstGeom>
+          <a:solidFill>
+            <a:srgbClr val="F1F5F9"/>
+          </a:solidFill>
+          <a:ln w="19050">
+            <a:solidFill>
+              <a:srgbClr val="CBD5E1"/>
+            </a:solidFill>
+          </a:ln>
+        </p:spPr>
+        <p:style>
+          <a:lnRef idx="1">
+            <a:schemeClr val="accent1"/>
+          </a:lnRef>
+          <a:fillRef idx="3">
+            <a:schemeClr val="accent1"/>
+          </a:fillRef>
+          <a:effectRef idx="2">
+            <a:schemeClr val="accent1"/>
+          </a:effectRef>
+          <a:fontRef idx="minor">
+            <a:schemeClr val="lt1"/>
+          </a:fontRef>
+        </p:style>
+        <p:txBody>
+          <a:bodyPr rtlCol="0" anchor="ctr"/>
+          <a:lstStyle/>
+          <a:p>
+            <a:pPr algn="ctr"/>
+          </a:p>
+        </p:txBody>
+      </p:sp>
+      <p:sp>
+        <p:nvSpPr>
+          <p:cNvPr id="17" name="TextBox 16"/>
+          <p:cNvSpPr txBox="1"/>
+          <p:nvPr/>
+        </p:nvSpPr>
+        <p:spPr>
+          <a:xfrm>
+            <a:off x="7223760" y="1737360"/>
+            <a:ext cx="4023360" cy="4114800"/>
+          </a:xfrm>
+          <a:prstGeom prst="rect">
+            <a:avLst/>
+          </a:prstGeom>
+          <a:noFill/>
+        </p:spPr>
+        <p:txBody>
+          <a:bodyPr wrap="square" lIns="0" tIns="0" rIns="0" bIns="0">
+            <a:spAutoFit/>
+          </a:bodyPr>
+          <a:lstStyle/>
+          <a:p>
+            <a:pPr algn="ctr">
+              <a:defRPr sz="1300" b="1">
+                <a:solidFill>
+                  <a:srgbClr val="1A4D8C"/>
+                </a:solidFill>
+                <a:latin typeface="Microsoft YaHei"/>
+              </a:defRPr>
+            </a:pPr>
+            <a:r>
+              <a:t>🖼️ 老龄出行现状与传统导航痛点示意图</a:t>
+            </a:r>
+          </a:p>
+          <a:p>
+            <a:pPr algn="ctr">
+              <a:lnSpc>
+                <a:spcPct val="125000"/>
+              </a:lnSpc>
               <a:spcBef>
                 <a:spcPts val="800"/>
               </a:spcBef>
-              <a:defRPr sz="1500" b="1">
-                <a:solidFill>
-                  <a:srgbClr val="0F2043"/>
-                </a:solidFill>
-                <a:latin typeface="SimHei"/>
-              </a:defRPr>
-            </a:pPr>
-            <a:r>
-              <a:t>痛点 3：出行意外频发与子女监护悬空</a:t>
-            </a:r>
-          </a:p>
-          <a:p>
-            <a:pPr>
-              <a:lnSpc>
-                <a:spcPct val="130000"/>
-              </a:lnSpc>
+              <a:defRPr sz="1000">
+                <a:solidFill>
+                  <a:srgbClr val="64748B"/>
+                </a:solidFill>
+                <a:latin typeface="SimSun"/>
+              </a:defRPr>
+            </a:pPr>
+            <a:r>
+              <a:t>建议放入：传统地图推荐含陡坡台阶路线 vs 老人实际通行受阻的照片或痛点对比图解</a:t>
+            </a:r>
+          </a:p>
+          <a:p>
+            <a:pPr algn="ctr">
               <a:spcBef>
-                <a:spcPts val="1400"/>
+                <a:spcPts val="1200"/>
               </a:spcBef>
-              <a:defRPr sz="1100">
-                <a:solidFill>
-                  <a:srgbClr val="64748B"/>
-                </a:solidFill>
-                <a:latin typeface="SimSun"/>
-              </a:defRPr>
-            </a:pPr>
-            <a:r>
-              <a:t>老人走失、偏航迷路、遭遇涉诈出行推销频发；子女远在异地无法感知实时轨迹，缺乏可靠的'北斗高精电子围栏'与双向安心响应机制。</a:t>
+              <a:defRPr sz="950" i="1">
+                <a:solidFill>
+                  <a:srgbClr val="F59E0B"/>
+                </a:solidFill>
+                <a:latin typeface="Microsoft YaHei"/>
+              </a:defRPr>
+            </a:pPr>
+            <a:r>
+              <a:t>（在此处粘贴/插入实际项目截图或架构图）</a:t>
             </a:r>
           </a:p>
         </p:txBody>
@@ -3807,77 +4851,23 @@
       <p:grpSpPr/>
       <p:sp>
         <p:nvSpPr>
-          <p:cNvPr id="2" name="TextBox 1"/>
-          <p:cNvSpPr txBox="1"/>
-          <p:nvPr/>
-        </p:nvSpPr>
-        <p:spPr>
-          <a:xfrm>
-            <a:off x="731520" y="365760"/>
-            <a:ext cx="10698480" cy="1005840"/>
+          <p:cNvPr id="2" name="Rectangle 1"/>
+          <p:cNvSpPr/>
+          <p:nvPr/>
+        </p:nvSpPr>
+        <p:spPr>
+          <a:xfrm>
+            <a:off x="0" y="0"/>
+            <a:ext cx="12191695" cy="6858000"/>
           </a:xfrm>
           <a:prstGeom prst="rect">
             <a:avLst/>
           </a:prstGeom>
-          <a:noFill/>
-        </p:spPr>
-        <p:txBody>
-          <a:bodyPr wrap="square" lIns="0" tIns="0" rIns="0" bIns="0">
-            <a:spAutoFit/>
-          </a:bodyPr>
-          <a:lstStyle/>
-          <a:p>
-            <a:pPr>
-              <a:defRPr sz="1100" b="1">
-                <a:solidFill>
-                  <a:srgbClr val="00A8CC"/>
-                </a:solidFill>
-                <a:latin typeface="SimHei"/>
-              </a:defRPr>
-            </a:pPr>
-            <a:r>
-              <a:t>第八届湖南省大学生智能导航科技创新大赛 · 科技创意类</a:t>
-            </a:r>
-          </a:p>
-          <a:p>
-            <a:pPr>
-              <a:spcBef>
-                <a:spcPts val="400"/>
-              </a:spcBef>
-              <a:defRPr sz="2200" b="1">
-                <a:solidFill>
-                  <a:srgbClr val="0F2043"/>
-                </a:solidFill>
-                <a:latin typeface="SimHei"/>
-              </a:defRPr>
-            </a:pPr>
-            <a:r>
-              <a:t>二、 整体架构设计：北斗时空赋能的多Agent协同网络</a:t>
-            </a:r>
-          </a:p>
-        </p:txBody>
-      </p:sp>
-      <p:sp>
-        <p:nvSpPr>
-          <p:cNvPr id="3" name="Rounded Rectangle 2"/>
-          <p:cNvSpPr/>
-          <p:nvPr/>
-        </p:nvSpPr>
-        <p:spPr>
-          <a:xfrm>
-            <a:off x="731520" y="1554480"/>
-            <a:ext cx="5212080" cy="4572000"/>
-          </a:xfrm>
-          <a:prstGeom prst="roundRect">
-            <a:avLst/>
-          </a:prstGeom>
           <a:solidFill>
-            <a:srgbClr val="FFFFFF"/>
+            <a:srgbClr val="F8FAFC"/>
           </a:solidFill>
-          <a:ln w="19050">
-            <a:solidFill>
-              <a:srgbClr val="E2E8F0"/>
-            </a:solidFill>
+          <a:ln>
+            <a:noFill/>
           </a:ln>
         </p:spPr>
         <p:style>
@@ -3904,14 +4894,14 @@
       </p:sp>
       <p:sp>
         <p:nvSpPr>
-          <p:cNvPr id="4" name="TextBox 3"/>
+          <p:cNvPr id="3" name="TextBox 2"/>
           <p:cNvSpPr txBox="1"/>
           <p:nvPr/>
         </p:nvSpPr>
         <p:spPr>
           <a:xfrm>
-            <a:off x="960120" y="1737360"/>
-            <a:ext cx="4754880" cy="4206240"/>
+            <a:off x="731520" y="365760"/>
+            <a:ext cx="10728655" cy="1005840"/>
           </a:xfrm>
           <a:prstGeom prst="rect">
             <a:avLst/>
@@ -3919,180 +4909,51 @@
           <a:noFill/>
         </p:spPr>
         <p:txBody>
-          <a:bodyPr wrap="square">
+          <a:bodyPr wrap="square" lIns="0" tIns="0" rIns="0" bIns="0">
             <a:spAutoFit/>
           </a:bodyPr>
           <a:lstStyle/>
           <a:p>
             <a:pPr>
-              <a:defRPr sz="1600" b="1">
-                <a:solidFill>
-                  <a:srgbClr val="0F2043"/>
-                </a:solidFill>
-                <a:latin typeface="SimHei"/>
-              </a:defRPr>
-            </a:pPr>
-            <a:r>
-              <a:t>5 大协同智能体家族分工</a:t>
+              <a:defRPr sz="1050" b="1">
+                <a:solidFill>
+                  <a:srgbClr val="008DDA"/>
+                </a:solidFill>
+                <a:latin typeface="Microsoft YaHei"/>
+              </a:defRPr>
+            </a:pPr>
+            <a:r>
+              <a:t>银发导航智能体 · 系统技术方案</a:t>
             </a:r>
           </a:p>
           <a:p>
             <a:pPr>
               <a:spcBef>
-                <a:spcPts val="800"/>
+                <a:spcPts val="300"/>
               </a:spcBef>
-              <a:defRPr sz="1100" b="1">
-                <a:solidFill>
-                  <a:srgbClr val="1F4E79"/>
-                </a:solidFill>
-                <a:latin typeface="SimHei"/>
-              </a:defRPr>
-            </a:pPr>
-            <a:r>
-              <a:t>• 总调度智能体 (Main Agent)</a:t>
-            </a:r>
-          </a:p>
-          <a:p>
-            <a:pPr>
-              <a:defRPr sz="950">
-                <a:solidFill>
-                  <a:srgbClr val="64748B"/>
-                </a:solidFill>
-                <a:latin typeface="SimSun"/>
-              </a:defRPr>
-            </a:pPr>
-            <a:r>
-              <a:t>   负责全域上下文感知、意图解析、任务并行分发与闭环决策。</a:t>
-            </a:r>
-          </a:p>
-          <a:p>
-            <a:pPr>
-              <a:spcBef>
-                <a:spcPts val="800"/>
-              </a:spcBef>
-              <a:defRPr sz="1100" b="1">
-                <a:solidFill>
-                  <a:srgbClr val="1F4E79"/>
-                </a:solidFill>
-                <a:latin typeface="SimHei"/>
-              </a:defRPr>
-            </a:pPr>
-            <a:r>
-              <a:t>• 健康体能智能体 (Health Agent)</a:t>
-            </a:r>
-          </a:p>
-          <a:p>
-            <a:pPr>
-              <a:defRPr sz="950">
-                <a:solidFill>
-                  <a:srgbClr val="64748B"/>
-                </a:solidFill>
-                <a:latin typeface="SimSun"/>
-              </a:defRPr>
-            </a:pPr>
-            <a:r>
-              <a:t>   读取慢病病史、关节炎/体能档案，输出最大步速与地形约束。</a:t>
-            </a:r>
-          </a:p>
-          <a:p>
-            <a:pPr>
-              <a:spcBef>
-                <a:spcPts val="800"/>
-              </a:spcBef>
-              <a:defRPr sz="1100" b="1">
-                <a:solidFill>
-                  <a:srgbClr val="1F4E79"/>
-                </a:solidFill>
-                <a:latin typeface="SimHei"/>
-              </a:defRPr>
-            </a:pPr>
-            <a:r>
-              <a:t>• 北斗导航智能体 (BDS Nav Agent)</a:t>
-            </a:r>
-          </a:p>
-          <a:p>
-            <a:pPr>
-              <a:defRPr sz="950">
-                <a:solidFill>
-                  <a:srgbClr val="64748B"/>
-                </a:solidFill>
-                <a:latin typeface="SimSun"/>
-              </a:defRPr>
-            </a:pPr>
-            <a:r>
-              <a:t>   对接北斗时空服务，计算微地形代价路由与高精走廊。</a:t>
-            </a:r>
-          </a:p>
-          <a:p>
-            <a:pPr>
-              <a:spcBef>
-                <a:spcPts val="800"/>
-              </a:spcBef>
-              <a:defRPr sz="1100" b="1">
-                <a:solidFill>
-                  <a:srgbClr val="1F4E79"/>
-                </a:solidFill>
-                <a:latin typeface="SimHei"/>
-              </a:defRPr>
-            </a:pPr>
-            <a:r>
-              <a:t>• 气象感知智能体 (Weather Agent)</a:t>
-            </a:r>
-          </a:p>
-          <a:p>
-            <a:pPr>
-              <a:defRPr sz="950">
-                <a:solidFill>
-                  <a:srgbClr val="64748B"/>
-                </a:solidFill>
-                <a:latin typeface="SimSun"/>
-              </a:defRPr>
-            </a:pPr>
-            <a:r>
-              <a:t>   监测高温暴雨结冰突变，动态触发路线修正或打车接驳。</a:t>
-            </a:r>
-          </a:p>
-          <a:p>
-            <a:pPr>
-              <a:spcBef>
-                <a:spcPts val="800"/>
-              </a:spcBef>
-              <a:defRPr sz="1100" b="1">
-                <a:solidFill>
-                  <a:srgbClr val="1F4E79"/>
-                </a:solidFill>
-                <a:latin typeface="SimHei"/>
-              </a:defRPr>
-            </a:pPr>
-            <a:r>
-              <a:t>• 安全守护智能体 (Guardian Agent)</a:t>
-            </a:r>
-          </a:p>
-          <a:p>
-            <a:pPr>
-              <a:defRPr sz="950">
-                <a:solidFill>
-                  <a:srgbClr val="64748B"/>
-                </a:solidFill>
-                <a:latin typeface="SimSun"/>
-              </a:defRPr>
-            </a:pPr>
-            <a:r>
-              <a:t>   负责电子围栏实时越界计算、异常滞留告警与反诈拦截。</a:t>
-            </a:r>
-          </a:p>
-        </p:txBody>
-      </p:sp>
-      <p:sp>
-        <p:nvSpPr>
-          <p:cNvPr id="5" name="Rounded Rectangle 4"/>
+              <a:defRPr sz="2200" b="1">
+                <a:solidFill>
+                  <a:srgbClr val="0B192C"/>
+                </a:solidFill>
+                <a:latin typeface="Microsoft YaHei"/>
+              </a:defRPr>
+            </a:pPr>
+            <a:r>
+              <a:t>二、 系统架构设计：微内核全序总线与 5 大领域智能体协同矩阵</a:t>
+            </a:r>
+          </a:p>
+        </p:txBody>
+      </p:sp>
+      <p:sp>
+        <p:nvSpPr>
+          <p:cNvPr id="4" name="Rounded Rectangle 3"/>
           <p:cNvSpPr/>
           <p:nvPr/>
         </p:nvSpPr>
         <p:spPr>
           <a:xfrm>
-            <a:off x="6217920" y="1554480"/>
-            <a:ext cx="5212080" cy="4572000"/>
+            <a:off x="731520" y="1463040"/>
+            <a:ext cx="6126480" cy="4663440"/>
           </a:xfrm>
           <a:prstGeom prst="roundRect">
             <a:avLst/>
@@ -4100,7 +4961,7 @@
           <a:solidFill>
             <a:srgbClr val="FFFFFF"/>
           </a:solidFill>
-          <a:ln w="19050">
+          <a:ln w="12700">
             <a:solidFill>
               <a:srgbClr val="E2E8F0"/>
             </a:solidFill>
@@ -4130,14 +4991,14 @@
       </p:sp>
       <p:sp>
         <p:nvSpPr>
-          <p:cNvPr id="6" name="TextBox 5"/>
+          <p:cNvPr id="5" name="TextBox 4"/>
           <p:cNvSpPr txBox="1"/>
           <p:nvPr/>
         </p:nvSpPr>
         <p:spPr>
           <a:xfrm>
-            <a:off x="6446520" y="1737360"/>
-            <a:ext cx="4754880" cy="4206240"/>
+            <a:off x="914400" y="1600200"/>
+            <a:ext cx="5760720" cy="4389120"/>
           </a:xfrm>
           <a:prstGeom prst="rect">
             <a:avLst/>
@@ -4145,137 +5006,282 @@
           <a:noFill/>
         </p:spPr>
         <p:txBody>
-          <a:bodyPr wrap="square">
+          <a:bodyPr wrap="square" lIns="0" tIns="0">
             <a:spAutoFit/>
           </a:bodyPr>
           <a:lstStyle/>
           <a:p>
             <a:pPr>
-              <a:defRPr sz="1600" b="1">
-                <a:solidFill>
-                  <a:srgbClr val="0F2043"/>
-                </a:solidFill>
-                <a:latin typeface="SimHei"/>
-              </a:defRPr>
-            </a:pPr>
-            <a:r>
-              <a:t>端-边-云与事件总线底座</a:t>
+              <a:defRPr sz="1500" b="1">
+                <a:solidFill>
+                  <a:srgbClr val="0B192C"/>
+                </a:solidFill>
+                <a:latin typeface="Microsoft YaHei"/>
+              </a:defRPr>
+            </a:pPr>
+            <a:r>
+              <a:t>🧠 五大领域协同智能体分工矩阵</a:t>
             </a:r>
           </a:p>
           <a:p>
             <a:pPr>
               <a:spcBef>
-                <a:spcPts val="1000"/>
+                <a:spcPts val="600"/>
               </a:spcBef>
               <a:defRPr sz="1100" b="1">
                 <a:solidFill>
-                  <a:srgbClr val="00A8CC"/>
-                </a:solidFill>
-                <a:latin typeface="SimHei"/>
-              </a:defRPr>
-            </a:pPr>
-            <a:r>
-              <a:t>✓ 微内核全序事件总线</a:t>
+                  <a:srgbClr val="1A4D8C"/>
+                </a:solidFill>
+                <a:latin typeface="Microsoft YaHei"/>
+              </a:defRPr>
+            </a:pPr>
+            <a:r>
+              <a:t>• 总调度智能体 (Main Agent)</a:t>
             </a:r>
           </a:p>
           <a:p>
             <a:pPr>
               <a:defRPr sz="950">
                 <a:solidFill>
-                  <a:srgbClr val="64748B"/>
+                  <a:srgbClr val="334155"/>
                 </a:solidFill>
                 <a:latin typeface="SimSun"/>
               </a:defRPr>
             </a:pPr>
             <a:r>
-              <a:t>   基于 Durable Event 架构，所有交互与决策落库可溯源、零死锁。</a:t>
+              <a:t>   全域意图理解、并行任务派发、单轮自主闭环决策，拒绝推诿。</a:t>
             </a:r>
           </a:p>
           <a:p>
             <a:pPr>
               <a:spcBef>
-                <a:spcPts val="1000"/>
+                <a:spcPts val="600"/>
               </a:spcBef>
               <a:defRPr sz="1100" b="1">
                 <a:solidFill>
-                  <a:srgbClr val="00A8CC"/>
-                </a:solidFill>
-                <a:latin typeface="SimHei"/>
-              </a:defRPr>
-            </a:pPr>
-            <a:r>
-              <a:t>✓ 单轮自主闭环机制</a:t>
+                  <a:srgbClr val="1A4D8C"/>
+                </a:solidFill>
+                <a:latin typeface="Microsoft YaHei"/>
+              </a:defRPr>
+            </a:pPr>
+            <a:r>
+              <a:t>• 健康体能智能体 (Health Agent)</a:t>
             </a:r>
           </a:p>
           <a:p>
             <a:pPr>
               <a:defRPr sz="950">
                 <a:solidFill>
-                  <a:srgbClr val="64748B"/>
+                  <a:srgbClr val="334155"/>
                 </a:solidFill>
                 <a:latin typeface="SimSun"/>
               </a:defRPr>
             </a:pPr>
             <a:r>
-              <a:t>   长辈一句话发起，系统各 Agent 自动化协商交付，拒绝反问推诿。</a:t>
+              <a:t>   读取慢病史与关节体力，输出步速极限、最大步行距离与避梯约束。</a:t>
             </a:r>
           </a:p>
           <a:p>
             <a:pPr>
               <a:spcBef>
-                <a:spcPts val="1000"/>
+                <a:spcPts val="600"/>
               </a:spcBef>
               <a:defRPr sz="1100" b="1">
                 <a:solidFill>
-                  <a:srgbClr val="00A8CC"/>
-                </a:solidFill>
-                <a:latin typeface="SimHei"/>
-              </a:defRPr>
-            </a:pPr>
-            <a:r>
-              <a:t>✓ CGCS2000 国家大地坐标系解算</a:t>
+                  <a:srgbClr val="1A4D8C"/>
+                </a:solidFill>
+                <a:latin typeface="Microsoft YaHei"/>
+              </a:defRPr>
+            </a:pPr>
+            <a:r>
+              <a:t>• 北斗导航智能体 (BDS Nav Agent)</a:t>
             </a:r>
           </a:p>
           <a:p>
             <a:pPr>
               <a:defRPr sz="950">
                 <a:solidFill>
-                  <a:srgbClr val="64748B"/>
+                  <a:srgbClr val="334155"/>
                 </a:solidFill>
                 <a:latin typeface="SimSun"/>
               </a:defRPr>
             </a:pPr>
             <a:r>
-              <a:t>   严谨执行大地几何椭球投影与 NMEA-0183 卫星报文校验。</a:t>
+              <a:t>   调用北斗时空服务，计算 CGCS2000 坐标与适老微地形代价路由。</a:t>
             </a:r>
           </a:p>
           <a:p>
             <a:pPr>
               <a:spcBef>
-                <a:spcPts val="1000"/>
+                <a:spcPts val="600"/>
               </a:spcBef>
               <a:defRPr sz="1100" b="1">
                 <a:solidFill>
-                  <a:srgbClr val="00A8CC"/>
-                </a:solidFill>
-                <a:latin typeface="SimHei"/>
-              </a:defRPr>
-            </a:pPr>
-            <a:r>
-              <a:t>✓ 双端透明协同机制</a:t>
+                  <a:srgbClr val="1A4D8C"/>
+                </a:solidFill>
+                <a:latin typeface="Microsoft YaHei"/>
+              </a:defRPr>
+            </a:pPr>
+            <a:r>
+              <a:t>• 气象感知智能体 (Weather Agent)</a:t>
             </a:r>
           </a:p>
           <a:p>
             <a:pPr>
               <a:defRPr sz="950">
                 <a:solidFill>
+                  <a:srgbClr val="334155"/>
+                </a:solidFill>
+                <a:latin typeface="SimSun"/>
+              </a:defRPr>
+            </a:pPr>
+            <a:r>
+              <a:t>   监测阵雨/高温/路面结冰突变，动态修正路线或触发打车接驳。</a:t>
+            </a:r>
+          </a:p>
+          <a:p>
+            <a:pPr>
+              <a:spcBef>
+                <a:spcPts val="600"/>
+              </a:spcBef>
+              <a:defRPr sz="1100" b="1">
+                <a:solidFill>
+                  <a:srgbClr val="1A4D8C"/>
+                </a:solidFill>
+                <a:latin typeface="Microsoft YaHei"/>
+              </a:defRPr>
+            </a:pPr>
+            <a:r>
+              <a:t>• 安全守护智能体 (Guardian Agent)</a:t>
+            </a:r>
+          </a:p>
+          <a:p>
+            <a:pPr>
+              <a:defRPr sz="950">
+                <a:solidFill>
+                  <a:srgbClr val="334155"/>
+                </a:solidFill>
+                <a:latin typeface="SimSun"/>
+              </a:defRPr>
+            </a:pPr>
+            <a:r>
+              <a:t>   实时计算北斗电子围栏出入、异常静止滞留监测与涉诈前置拦截。</a:t>
+            </a:r>
+          </a:p>
+        </p:txBody>
+      </p:sp>
+      <p:sp>
+        <p:nvSpPr>
+          <p:cNvPr id="6" name="Rounded Rectangle 5"/>
+          <p:cNvSpPr/>
+          <p:nvPr/>
+        </p:nvSpPr>
+        <p:spPr>
+          <a:xfrm>
+            <a:off x="7040880" y="1463040"/>
+            <a:ext cx="4389120" cy="4663440"/>
+          </a:xfrm>
+          <a:prstGeom prst="roundRect">
+            <a:avLst/>
+          </a:prstGeom>
+          <a:solidFill>
+            <a:srgbClr val="F1F5F9"/>
+          </a:solidFill>
+          <a:ln w="19050">
+            <a:solidFill>
+              <a:srgbClr val="CBD5E1"/>
+            </a:solidFill>
+          </a:ln>
+        </p:spPr>
+        <p:style>
+          <a:lnRef idx="1">
+            <a:schemeClr val="accent1"/>
+          </a:lnRef>
+          <a:fillRef idx="3">
+            <a:schemeClr val="accent1"/>
+          </a:fillRef>
+          <a:effectRef idx="2">
+            <a:schemeClr val="accent1"/>
+          </a:effectRef>
+          <a:fontRef idx="minor">
+            <a:schemeClr val="lt1"/>
+          </a:fontRef>
+        </p:style>
+        <p:txBody>
+          <a:bodyPr rtlCol="0" anchor="ctr"/>
+          <a:lstStyle/>
+          <a:p>
+            <a:pPr algn="ctr"/>
+          </a:p>
+        </p:txBody>
+      </p:sp>
+      <p:sp>
+        <p:nvSpPr>
+          <p:cNvPr id="7" name="TextBox 6"/>
+          <p:cNvSpPr txBox="1"/>
+          <p:nvPr/>
+        </p:nvSpPr>
+        <p:spPr>
+          <a:xfrm>
+            <a:off x="7223760" y="1737360"/>
+            <a:ext cx="4023360" cy="4114800"/>
+          </a:xfrm>
+          <a:prstGeom prst="rect">
+            <a:avLst/>
+          </a:prstGeom>
+          <a:noFill/>
+        </p:spPr>
+        <p:txBody>
+          <a:bodyPr wrap="square" lIns="0" tIns="0" rIns="0" bIns="0">
+            <a:spAutoFit/>
+          </a:bodyPr>
+          <a:lstStyle/>
+          <a:p>
+            <a:pPr algn="ctr">
+              <a:defRPr sz="1300" b="1">
+                <a:solidFill>
+                  <a:srgbClr val="1A4D8C"/>
+                </a:solidFill>
+                <a:latin typeface="Microsoft YaHei"/>
+              </a:defRPr>
+            </a:pPr>
+            <a:r>
+              <a:t>🖼️ 多Agent协同调度与微内核事件总线架构图</a:t>
+            </a:r>
+          </a:p>
+          <a:p>
+            <a:pPr algn="ctr">
+              <a:lnSpc>
+                <a:spcPct val="125000"/>
+              </a:lnSpc>
+              <a:spcBef>
+                <a:spcPts val="800"/>
+              </a:spcBef>
+              <a:defRPr sz="1000">
+                <a:solidFill>
                   <a:srgbClr val="64748B"/>
                 </a:solidFill>
                 <a:latin typeface="SimSun"/>
               </a:defRPr>
             </a:pPr>
             <a:r>
-              <a:t>   长辈端极简操作 + 子女端全维数字孪生大屏，形成家庭守护纽带。</a:t>
+              <a:t>建议放入：系统技术架构图（包含接入层、Event Bus、5大Agent交互拓扑与底层北斗时空数据流）</a:t>
+            </a:r>
+          </a:p>
+          <a:p>
+            <a:pPr algn="ctr">
+              <a:spcBef>
+                <a:spcPts val="1200"/>
+              </a:spcBef>
+              <a:defRPr sz="950" i="1">
+                <a:solidFill>
+                  <a:srgbClr val="F59E0B"/>
+                </a:solidFill>
+                <a:latin typeface="Microsoft YaHei"/>
+              </a:defRPr>
+            </a:pPr>
+            <a:r>
+              <a:t>（在此处粘贴/插入实际项目截图或架构图）</a:t>
             </a:r>
           </a:p>
         </p:txBody>
@@ -4300,77 +5306,23 @@
       <p:grpSpPr/>
       <p:sp>
         <p:nvSpPr>
-          <p:cNvPr id="2" name="TextBox 1"/>
-          <p:cNvSpPr txBox="1"/>
-          <p:nvPr/>
-        </p:nvSpPr>
-        <p:spPr>
-          <a:xfrm>
-            <a:off x="731520" y="365760"/>
-            <a:ext cx="10698480" cy="1005840"/>
+          <p:cNvPr id="2" name="Rectangle 1"/>
+          <p:cNvSpPr/>
+          <p:nvPr/>
+        </p:nvSpPr>
+        <p:spPr>
+          <a:xfrm>
+            <a:off x="0" y="0"/>
+            <a:ext cx="12191695" cy="6858000"/>
           </a:xfrm>
           <a:prstGeom prst="rect">
             <a:avLst/>
           </a:prstGeom>
-          <a:noFill/>
-        </p:spPr>
-        <p:txBody>
-          <a:bodyPr wrap="square" lIns="0" tIns="0" rIns="0" bIns="0">
-            <a:spAutoFit/>
-          </a:bodyPr>
-          <a:lstStyle/>
-          <a:p>
-            <a:pPr>
-              <a:defRPr sz="1100" b="1">
-                <a:solidFill>
-                  <a:srgbClr val="00A8CC"/>
-                </a:solidFill>
-                <a:latin typeface="SimHei"/>
-              </a:defRPr>
-            </a:pPr>
-            <a:r>
-              <a:t>第八届湖南省大学生智能导航科技创新大赛 · 科技创意类</a:t>
-            </a:r>
-          </a:p>
-          <a:p>
-            <a:pPr>
-              <a:spcBef>
-                <a:spcPts val="400"/>
-              </a:spcBef>
-              <a:defRPr sz="2200" b="1">
-                <a:solidFill>
-                  <a:srgbClr val="0F2043"/>
-                </a:solidFill>
-                <a:latin typeface="SimHei"/>
-              </a:defRPr>
-            </a:pPr>
-            <a:r>
-              <a:t>三、 北斗深度融合：高精时空基准与适老微地形代价模型</a:t>
-            </a:r>
-          </a:p>
-        </p:txBody>
-      </p:sp>
-      <p:sp>
-        <p:nvSpPr>
-          <p:cNvPr id="3" name="Rounded Rectangle 2"/>
-          <p:cNvSpPr/>
-          <p:nvPr/>
-        </p:nvSpPr>
-        <p:spPr>
-          <a:xfrm>
-            <a:off x="731520" y="1645920"/>
-            <a:ext cx="5212080" cy="2148840"/>
-          </a:xfrm>
-          <a:prstGeom prst="roundRect">
-            <a:avLst/>
-          </a:prstGeom>
           <a:solidFill>
-            <a:srgbClr val="FFFFFF"/>
+            <a:srgbClr val="F8FAFC"/>
           </a:solidFill>
-          <a:ln w="19050">
-            <a:solidFill>
-              <a:srgbClr val="E2E8F0"/>
-            </a:solidFill>
+          <a:ln>
+            <a:noFill/>
           </a:ln>
         </p:spPr>
         <p:style>
@@ -4397,14 +5349,14 @@
       </p:sp>
       <p:sp>
         <p:nvSpPr>
-          <p:cNvPr id="4" name="TextBox 3"/>
+          <p:cNvPr id="3" name="TextBox 2"/>
           <p:cNvSpPr txBox="1"/>
           <p:nvPr/>
         </p:nvSpPr>
         <p:spPr>
           <a:xfrm>
-            <a:off x="960120" y="1828800"/>
-            <a:ext cx="4754880" cy="1783080"/>
+            <a:off x="731520" y="365760"/>
+            <a:ext cx="10728655" cy="1005840"/>
           </a:xfrm>
           <a:prstGeom prst="rect">
             <a:avLst/>
@@ -4412,27 +5364,701 @@
           <a:noFill/>
         </p:spPr>
         <p:txBody>
-          <a:bodyPr wrap="square">
+          <a:bodyPr wrap="square" lIns="0" tIns="0" rIns="0" bIns="0">
             <a:spAutoFit/>
           </a:bodyPr>
           <a:lstStyle/>
           <a:p>
             <a:pPr>
-              <a:defRPr sz="1400" b="1">
-                <a:solidFill>
-                  <a:srgbClr val="0F2043"/>
-                </a:solidFill>
-                <a:latin typeface="SimHei"/>
-              </a:defRPr>
-            </a:pPr>
-            <a:r>
-              <a:t>亚米级高精时空接入</a:t>
-            </a:r>
-          </a:p>
-          <a:p>
-            <a:pPr>
+              <a:defRPr sz="1050" b="1">
+                <a:solidFill>
+                  <a:srgbClr val="008DDA"/>
+                </a:solidFill>
+                <a:latin typeface="Microsoft YaHei"/>
+              </a:defRPr>
+            </a:pPr>
+            <a:r>
+              <a:t>银发导航智能体 · 系统技术方案</a:t>
+            </a:r>
+          </a:p>
+          <a:p>
+            <a:pPr>
+              <a:spcBef>
+                <a:spcPts val="300"/>
+              </a:spcBef>
+              <a:defRPr sz="2200" b="1">
+                <a:solidFill>
+                  <a:srgbClr val="0B192C"/>
+                </a:solidFill>
+                <a:latin typeface="Microsoft YaHei"/>
+              </a:defRPr>
+            </a:pPr>
+            <a:r>
+              <a:t>三、 北斗时空深度融合：适老微地形代价路由与安全走廊</a:t>
+            </a:r>
+          </a:p>
+        </p:txBody>
+      </p:sp>
+      <p:sp>
+        <p:nvSpPr>
+          <p:cNvPr id="4" name="Rounded Rectangle 3"/>
+          <p:cNvSpPr/>
+          <p:nvPr/>
+        </p:nvSpPr>
+        <p:spPr>
+          <a:xfrm>
+            <a:off x="731520" y="1463040"/>
+            <a:ext cx="1965960" cy="1005840"/>
+          </a:xfrm>
+          <a:prstGeom prst="roundRect">
+            <a:avLst/>
+          </a:prstGeom>
+          <a:solidFill>
+            <a:srgbClr val="FFFFFF"/>
+          </a:solidFill>
+          <a:ln w="12700">
+            <a:solidFill>
+              <a:srgbClr val="E2E8F0"/>
+            </a:solidFill>
+          </a:ln>
+        </p:spPr>
+        <p:style>
+          <a:lnRef idx="1">
+            <a:schemeClr val="accent1"/>
+          </a:lnRef>
+          <a:fillRef idx="3">
+            <a:schemeClr val="accent1"/>
+          </a:fillRef>
+          <a:effectRef idx="2">
+            <a:schemeClr val="accent1"/>
+          </a:effectRef>
+          <a:fontRef idx="minor">
+            <a:schemeClr val="lt1"/>
+          </a:fontRef>
+        </p:style>
+        <p:txBody>
+          <a:bodyPr rtlCol="0" anchor="ctr"/>
+          <a:lstStyle/>
+          <a:p>
+            <a:pPr algn="ctr"/>
+          </a:p>
+        </p:txBody>
+      </p:sp>
+      <p:sp>
+        <p:nvSpPr>
+          <p:cNvPr id="5" name="TextBox 4"/>
+          <p:cNvSpPr txBox="1"/>
+          <p:nvPr/>
+        </p:nvSpPr>
+        <p:spPr>
+          <a:xfrm>
+            <a:off x="822960" y="1508760"/>
+            <a:ext cx="1783080" cy="914400"/>
+          </a:xfrm>
+          <a:prstGeom prst="rect">
+            <a:avLst/>
+          </a:prstGeom>
+          <a:noFill/>
+        </p:spPr>
+        <p:txBody>
+          <a:bodyPr wrap="square" lIns="0" tIns="0">
+            <a:spAutoFit/>
+          </a:bodyPr>
+          <a:lstStyle/>
+          <a:p>
+            <a:pPr>
+              <a:defRPr sz="2000" b="1">
+                <a:solidFill>
+                  <a:srgbClr val="008DDA"/>
+                </a:solidFill>
+                <a:latin typeface="Arial"/>
+              </a:defRPr>
+            </a:pPr>
+            <a:r>
+              <a:t>亚米级</a:t>
+            </a:r>
+          </a:p>
+          <a:p>
+            <a:pPr>
+              <a:defRPr sz="900">
+                <a:solidFill>
+                  <a:srgbClr val="64748B"/>
+                </a:solidFill>
+                <a:latin typeface="SimSun"/>
+              </a:defRPr>
+            </a:pPr>
+            <a:r>
+              <a:t>北斗地基增强高精定位</a:t>
+            </a:r>
+          </a:p>
+        </p:txBody>
+      </p:sp>
+      <p:sp>
+        <p:nvSpPr>
+          <p:cNvPr id="6" name="Rounded Rectangle 5"/>
+          <p:cNvSpPr/>
+          <p:nvPr/>
+        </p:nvSpPr>
+        <p:spPr>
+          <a:xfrm>
+            <a:off x="2834639" y="1463040"/>
+            <a:ext cx="1965960" cy="1005840"/>
+          </a:xfrm>
+          <a:prstGeom prst="roundRect">
+            <a:avLst/>
+          </a:prstGeom>
+          <a:solidFill>
+            <a:srgbClr val="FFFFFF"/>
+          </a:solidFill>
+          <a:ln w="12700">
+            <a:solidFill>
+              <a:srgbClr val="E2E8F0"/>
+            </a:solidFill>
+          </a:ln>
+        </p:spPr>
+        <p:style>
+          <a:lnRef idx="1">
+            <a:schemeClr val="accent1"/>
+          </a:lnRef>
+          <a:fillRef idx="3">
+            <a:schemeClr val="accent1"/>
+          </a:fillRef>
+          <a:effectRef idx="2">
+            <a:schemeClr val="accent1"/>
+          </a:effectRef>
+          <a:fontRef idx="minor">
+            <a:schemeClr val="lt1"/>
+          </a:fontRef>
+        </p:style>
+        <p:txBody>
+          <a:bodyPr rtlCol="0" anchor="ctr"/>
+          <a:lstStyle/>
+          <a:p>
+            <a:pPr algn="ctr"/>
+          </a:p>
+        </p:txBody>
+      </p:sp>
+      <p:sp>
+        <p:nvSpPr>
+          <p:cNvPr id="7" name="TextBox 6"/>
+          <p:cNvSpPr txBox="1"/>
+          <p:nvPr/>
+        </p:nvSpPr>
+        <p:spPr>
+          <a:xfrm>
+            <a:off x="2926079" y="1508760"/>
+            <a:ext cx="1783080" cy="914400"/>
+          </a:xfrm>
+          <a:prstGeom prst="rect">
+            <a:avLst/>
+          </a:prstGeom>
+          <a:noFill/>
+        </p:spPr>
+        <p:txBody>
+          <a:bodyPr wrap="square" lIns="0" tIns="0">
+            <a:spAutoFit/>
+          </a:bodyPr>
+          <a:lstStyle/>
+          <a:p>
+            <a:pPr>
+              <a:defRPr sz="2000" b="1">
+                <a:solidFill>
+                  <a:srgbClr val="F59E0B"/>
+                </a:solidFill>
+                <a:latin typeface="Arial"/>
+              </a:defRPr>
+            </a:pPr>
+            <a:r>
+              <a:t>10 倍</a:t>
+            </a:r>
+          </a:p>
+          <a:p>
+            <a:pPr>
+              <a:defRPr sz="900">
+                <a:solidFill>
+                  <a:srgbClr val="64748B"/>
+                </a:solidFill>
+                <a:latin typeface="SimSun"/>
+              </a:defRPr>
+            </a:pPr>
+            <a:r>
+              <a:t>阶梯与陡坡加权通行惩罚</a:t>
+            </a:r>
+          </a:p>
+        </p:txBody>
+      </p:sp>
+      <p:sp>
+        <p:nvSpPr>
+          <p:cNvPr id="8" name="Rounded Rectangle 7"/>
+          <p:cNvSpPr/>
+          <p:nvPr/>
+        </p:nvSpPr>
+        <p:spPr>
+          <a:xfrm>
+            <a:off x="4937759" y="1463040"/>
+            <a:ext cx="1965960" cy="1005840"/>
+          </a:xfrm>
+          <a:prstGeom prst="roundRect">
+            <a:avLst/>
+          </a:prstGeom>
+          <a:solidFill>
+            <a:srgbClr val="FFFFFF"/>
+          </a:solidFill>
+          <a:ln w="12700">
+            <a:solidFill>
+              <a:srgbClr val="E2E8F0"/>
+            </a:solidFill>
+          </a:ln>
+        </p:spPr>
+        <p:style>
+          <a:lnRef idx="1">
+            <a:schemeClr val="accent1"/>
+          </a:lnRef>
+          <a:fillRef idx="3">
+            <a:schemeClr val="accent1"/>
+          </a:fillRef>
+          <a:effectRef idx="2">
+            <a:schemeClr val="accent1"/>
+          </a:effectRef>
+          <a:fontRef idx="minor">
+            <a:schemeClr val="lt1"/>
+          </a:fontRef>
+        </p:style>
+        <p:txBody>
+          <a:bodyPr rtlCol="0" anchor="ctr"/>
+          <a:lstStyle/>
+          <a:p>
+            <a:pPr algn="ctr"/>
+          </a:p>
+        </p:txBody>
+      </p:sp>
+      <p:sp>
+        <p:nvSpPr>
+          <p:cNvPr id="9" name="TextBox 8"/>
+          <p:cNvSpPr txBox="1"/>
+          <p:nvPr/>
+        </p:nvSpPr>
+        <p:spPr>
+          <a:xfrm>
+            <a:off x="5029199" y="1508760"/>
+            <a:ext cx="1783080" cy="914400"/>
+          </a:xfrm>
+          <a:prstGeom prst="rect">
+            <a:avLst/>
+          </a:prstGeom>
+          <a:noFill/>
+        </p:spPr>
+        <p:txBody>
+          <a:bodyPr wrap="square" lIns="0" tIns="0">
+            <a:spAutoFit/>
+          </a:bodyPr>
+          <a:lstStyle/>
+          <a:p>
+            <a:pPr>
+              <a:defRPr sz="2000" b="1">
+                <a:solidFill>
+                  <a:srgbClr val="10B981"/>
+                </a:solidFill>
+                <a:latin typeface="Arial"/>
+              </a:defRPr>
+            </a:pPr>
+            <a:r>
+              <a:t>25 米</a:t>
+            </a:r>
+          </a:p>
+          <a:p>
+            <a:pPr>
+              <a:defRPr sz="900">
+                <a:solidFill>
+                  <a:srgbClr val="64748B"/>
+                </a:solidFill>
+                <a:latin typeface="SimSun"/>
+              </a:defRPr>
+            </a:pPr>
+            <a:r>
+              <a:t>北斗高精动态安全走廊半径</a:t>
+            </a:r>
+          </a:p>
+        </p:txBody>
+      </p:sp>
+      <p:sp>
+        <p:nvSpPr>
+          <p:cNvPr id="10" name="Rounded Rectangle 9"/>
+          <p:cNvSpPr/>
+          <p:nvPr/>
+        </p:nvSpPr>
+        <p:spPr>
+          <a:xfrm>
+            <a:off x="731520" y="2651760"/>
+            <a:ext cx="6126480" cy="1097280"/>
+          </a:xfrm>
+          <a:prstGeom prst="roundRect">
+            <a:avLst/>
+          </a:prstGeom>
+          <a:solidFill>
+            <a:srgbClr val="FFFFFF"/>
+          </a:solidFill>
+          <a:ln w="12700">
+            <a:solidFill>
+              <a:srgbClr val="E2E8F0"/>
+            </a:solidFill>
+          </a:ln>
+        </p:spPr>
+        <p:style>
+          <a:lnRef idx="1">
+            <a:schemeClr val="accent1"/>
+          </a:lnRef>
+          <a:fillRef idx="3">
+            <a:schemeClr val="accent1"/>
+          </a:fillRef>
+          <a:effectRef idx="2">
+            <a:schemeClr val="accent1"/>
+          </a:effectRef>
+          <a:fontRef idx="minor">
+            <a:schemeClr val="lt1"/>
+          </a:fontRef>
+        </p:style>
+        <p:txBody>
+          <a:bodyPr rtlCol="0" anchor="ctr"/>
+          <a:lstStyle/>
+          <a:p>
+            <a:pPr algn="ctr"/>
+          </a:p>
+        </p:txBody>
+      </p:sp>
+      <p:sp>
+        <p:nvSpPr>
+          <p:cNvPr id="11" name="TextBox 10"/>
+          <p:cNvSpPr txBox="1"/>
+          <p:nvPr/>
+        </p:nvSpPr>
+        <p:spPr>
+          <a:xfrm>
+            <a:off x="914400" y="2761488"/>
+            <a:ext cx="5760720" cy="868680"/>
+          </a:xfrm>
+          <a:prstGeom prst="rect">
+            <a:avLst/>
+          </a:prstGeom>
+          <a:noFill/>
+        </p:spPr>
+        <p:txBody>
+          <a:bodyPr wrap="square" lIns="0" tIns="0">
+            <a:spAutoFit/>
+          </a:bodyPr>
+          <a:lstStyle/>
+          <a:p>
+            <a:pPr>
+              <a:defRPr sz="1250" b="1">
+                <a:solidFill>
+                  <a:srgbClr val="0B192C"/>
+                </a:solidFill>
+                <a:latin typeface="Microsoft YaHei"/>
+              </a:defRPr>
+            </a:pPr>
+            <a:r>
+              <a:t>⚙️ 微地形通行代价方程 (Cost Formula)</a:t>
+            </a:r>
+          </a:p>
+          <a:p>
+            <a:pPr>
+              <a:spcBef>
+                <a:spcPts val="300"/>
+              </a:spcBef>
+              <a:defRPr sz="950">
+                <a:solidFill>
+                  <a:srgbClr val="334155"/>
+                </a:solidFill>
+                <a:latin typeface="SimSun"/>
+              </a:defRPr>
+            </a:pPr>
+            <a:r>
+              <a:t>Cost = L * (1 + W_slope * S^2 + W_step * N_steps - W_shade * Shade)</a:t>
+            </a:r>
+            <a:br/>
+            <a:r>
+              <a:t>通过算法对陡坡与长阶梯实施 10 倍惩罚，优先规整林荫平道与无障碍缓行路径。</a:t>
+            </a:r>
+          </a:p>
+        </p:txBody>
+      </p:sp>
+      <p:sp>
+        <p:nvSpPr>
+          <p:cNvPr id="12" name="Rounded Rectangle 11"/>
+          <p:cNvSpPr/>
+          <p:nvPr/>
+        </p:nvSpPr>
+        <p:spPr>
+          <a:xfrm>
+            <a:off x="731520" y="3886200"/>
+            <a:ext cx="6126480" cy="1097280"/>
+          </a:xfrm>
+          <a:prstGeom prst="roundRect">
+            <a:avLst/>
+          </a:prstGeom>
+          <a:solidFill>
+            <a:srgbClr val="FFFFFF"/>
+          </a:solidFill>
+          <a:ln w="12700">
+            <a:solidFill>
+              <a:srgbClr val="E2E8F0"/>
+            </a:solidFill>
+          </a:ln>
+        </p:spPr>
+        <p:style>
+          <a:lnRef idx="1">
+            <a:schemeClr val="accent1"/>
+          </a:lnRef>
+          <a:fillRef idx="3">
+            <a:schemeClr val="accent1"/>
+          </a:fillRef>
+          <a:effectRef idx="2">
+            <a:schemeClr val="accent1"/>
+          </a:effectRef>
+          <a:fontRef idx="minor">
+            <a:schemeClr val="lt1"/>
+          </a:fontRef>
+        </p:style>
+        <p:txBody>
+          <a:bodyPr rtlCol="0" anchor="ctr"/>
+          <a:lstStyle/>
+          <a:p>
+            <a:pPr algn="ctr"/>
+          </a:p>
+        </p:txBody>
+      </p:sp>
+      <p:sp>
+        <p:nvSpPr>
+          <p:cNvPr id="13" name="TextBox 12"/>
+          <p:cNvSpPr txBox="1"/>
+          <p:nvPr/>
+        </p:nvSpPr>
+        <p:spPr>
+          <a:xfrm>
+            <a:off x="914400" y="3995928"/>
+            <a:ext cx="5760720" cy="868680"/>
+          </a:xfrm>
+          <a:prstGeom prst="rect">
+            <a:avLst/>
+          </a:prstGeom>
+          <a:noFill/>
+        </p:spPr>
+        <p:txBody>
+          <a:bodyPr wrap="square" lIns="0" tIns="0">
+            <a:spAutoFit/>
+          </a:bodyPr>
+          <a:lstStyle/>
+          <a:p>
+            <a:pPr>
+              <a:defRPr sz="1250" b="1">
+                <a:solidFill>
+                  <a:srgbClr val="0B192C"/>
+                </a:solidFill>
+                <a:latin typeface="Microsoft YaHei"/>
+              </a:defRPr>
+            </a:pPr>
+            <a:r>
+              <a:t>⚙️ CGCS2000 坐标与 NMEA-0183 遥测解算</a:t>
+            </a:r>
+          </a:p>
+          <a:p>
+            <a:pPr>
+              <a:spcBef>
+                <a:spcPts val="300"/>
+              </a:spcBef>
+              <a:defRPr sz="950">
+                <a:solidFill>
+                  <a:srgbClr val="334155"/>
+                </a:solidFill>
+                <a:latin typeface="SimSun"/>
+              </a:defRPr>
+            </a:pPr>
+            <a:r>
+              <a:t>严谨执行大地几何椭球投影与卫星报文异或校验，抵抗城市峡谷遮挡与多路径干扰。</a:t>
+            </a:r>
+          </a:p>
+        </p:txBody>
+      </p:sp>
+      <p:sp>
+        <p:nvSpPr>
+          <p:cNvPr id="14" name="Rounded Rectangle 13"/>
+          <p:cNvSpPr/>
+          <p:nvPr/>
+        </p:nvSpPr>
+        <p:spPr>
+          <a:xfrm>
+            <a:off x="731520" y="5120640"/>
+            <a:ext cx="6126480" cy="1097280"/>
+          </a:xfrm>
+          <a:prstGeom prst="roundRect">
+            <a:avLst/>
+          </a:prstGeom>
+          <a:solidFill>
+            <a:srgbClr val="FFFFFF"/>
+          </a:solidFill>
+          <a:ln w="12700">
+            <a:solidFill>
+              <a:srgbClr val="E2E8F0"/>
+            </a:solidFill>
+          </a:ln>
+        </p:spPr>
+        <p:style>
+          <a:lnRef idx="1">
+            <a:schemeClr val="accent1"/>
+          </a:lnRef>
+          <a:fillRef idx="3">
+            <a:schemeClr val="accent1"/>
+          </a:fillRef>
+          <a:effectRef idx="2">
+            <a:schemeClr val="accent1"/>
+          </a:effectRef>
+          <a:fontRef idx="minor">
+            <a:schemeClr val="lt1"/>
+          </a:fontRef>
+        </p:style>
+        <p:txBody>
+          <a:bodyPr rtlCol="0" anchor="ctr"/>
+          <a:lstStyle/>
+          <a:p>
+            <a:pPr algn="ctr"/>
+          </a:p>
+        </p:txBody>
+      </p:sp>
+      <p:sp>
+        <p:nvSpPr>
+          <p:cNvPr id="15" name="TextBox 14"/>
+          <p:cNvSpPr txBox="1"/>
+          <p:nvPr/>
+        </p:nvSpPr>
+        <p:spPr>
+          <a:xfrm>
+            <a:off x="914400" y="5230368"/>
+            <a:ext cx="5760720" cy="868680"/>
+          </a:xfrm>
+          <a:prstGeom prst="rect">
+            <a:avLst/>
+          </a:prstGeom>
+          <a:noFill/>
+        </p:spPr>
+        <p:txBody>
+          <a:bodyPr wrap="square" lIns="0" tIns="0">
+            <a:spAutoFit/>
+          </a:bodyPr>
+          <a:lstStyle/>
+          <a:p>
+            <a:pPr>
+              <a:defRPr sz="1250" b="1">
+                <a:solidFill>
+                  <a:srgbClr val="0B192C"/>
+                </a:solidFill>
+                <a:latin typeface="Microsoft YaHei"/>
+              </a:defRPr>
+            </a:pPr>
+            <a:r>
+              <a:t>⚙️ 25米北斗动态球面安全走廊</a:t>
+            </a:r>
+          </a:p>
+          <a:p>
+            <a:pPr>
+              <a:spcBef>
+                <a:spcPts val="300"/>
+              </a:spcBef>
+              <a:defRPr sz="950">
+                <a:solidFill>
+                  <a:srgbClr val="334155"/>
+                </a:solidFill>
+                <a:latin typeface="SimSun"/>
+              </a:defRPr>
+            </a:pPr>
+            <a:r>
+              <a:t>沿规划路线构建球面缓冲区；实时捕捉偏航轨迹，即时启动大白话原路纠偏机制。</a:t>
+            </a:r>
+          </a:p>
+        </p:txBody>
+      </p:sp>
+      <p:sp>
+        <p:nvSpPr>
+          <p:cNvPr id="16" name="Rounded Rectangle 15"/>
+          <p:cNvSpPr/>
+          <p:nvPr/>
+        </p:nvSpPr>
+        <p:spPr>
+          <a:xfrm>
+            <a:off x="7040880" y="1463040"/>
+            <a:ext cx="4389120" cy="4663440"/>
+          </a:xfrm>
+          <a:prstGeom prst="roundRect">
+            <a:avLst/>
+          </a:prstGeom>
+          <a:solidFill>
+            <a:srgbClr val="F1F5F9"/>
+          </a:solidFill>
+          <a:ln w="19050">
+            <a:solidFill>
+              <a:srgbClr val="CBD5E1"/>
+            </a:solidFill>
+          </a:ln>
+        </p:spPr>
+        <p:style>
+          <a:lnRef idx="1">
+            <a:schemeClr val="accent1"/>
+          </a:lnRef>
+          <a:fillRef idx="3">
+            <a:schemeClr val="accent1"/>
+          </a:fillRef>
+          <a:effectRef idx="2">
+            <a:schemeClr val="accent1"/>
+          </a:effectRef>
+          <a:fontRef idx="minor">
+            <a:schemeClr val="lt1"/>
+          </a:fontRef>
+        </p:style>
+        <p:txBody>
+          <a:bodyPr rtlCol="0" anchor="ctr"/>
+          <a:lstStyle/>
+          <a:p>
+            <a:pPr algn="ctr"/>
+          </a:p>
+        </p:txBody>
+      </p:sp>
+      <p:sp>
+        <p:nvSpPr>
+          <p:cNvPr id="17" name="TextBox 16"/>
+          <p:cNvSpPr txBox="1"/>
+          <p:nvPr/>
+        </p:nvSpPr>
+        <p:spPr>
+          <a:xfrm>
+            <a:off x="7223760" y="1737360"/>
+            <a:ext cx="4023360" cy="4114800"/>
+          </a:xfrm>
+          <a:prstGeom prst="rect">
+            <a:avLst/>
+          </a:prstGeom>
+          <a:noFill/>
+        </p:spPr>
+        <p:txBody>
+          <a:bodyPr wrap="square" lIns="0" tIns="0" rIns="0" bIns="0">
+            <a:spAutoFit/>
+          </a:bodyPr>
+          <a:lstStyle/>
+          <a:p>
+            <a:pPr algn="ctr">
+              <a:defRPr sz="1300" b="1">
+                <a:solidFill>
+                  <a:srgbClr val="1A4D8C"/>
+                </a:solidFill>
+                <a:latin typeface="Microsoft YaHei"/>
+              </a:defRPr>
+            </a:pPr>
+            <a:r>
+              <a:t>🖼️ 北斗微地形路径规划与台阶避障效果对比</a:t>
+            </a:r>
+          </a:p>
+          <a:p>
+            <a:pPr algn="ctr">
               <a:lnSpc>
-                <a:spcPct val="130000"/>
+                <a:spcPct val="125000"/>
               </a:lnSpc>
               <a:spcBef>
                 <a:spcPts val="800"/>
@@ -4445,307 +6071,23 @@
               </a:defRPr>
             </a:pPr>
             <a:r>
-              <a:t>深度接入中国北斗地基增强网与卫星授时，达到亚米级车道与步道级精准定位，有效抵御城市峡谷遮挡与多路径效应。</a:t>
-            </a:r>
-          </a:p>
-        </p:txBody>
-      </p:sp>
-      <p:sp>
-        <p:nvSpPr>
-          <p:cNvPr id="5" name="Rounded Rectangle 4"/>
-          <p:cNvSpPr/>
-          <p:nvPr/>
-        </p:nvSpPr>
-        <p:spPr>
-          <a:xfrm>
-            <a:off x="6172200" y="1645920"/>
-            <a:ext cx="5212080" cy="2148840"/>
-          </a:xfrm>
-          <a:prstGeom prst="roundRect">
-            <a:avLst/>
-          </a:prstGeom>
-          <a:solidFill>
-            <a:srgbClr val="FFFFFF"/>
-          </a:solidFill>
-          <a:ln w="19050">
-            <a:solidFill>
-              <a:srgbClr val="E2E8F0"/>
-            </a:solidFill>
-          </a:ln>
-        </p:spPr>
-        <p:style>
-          <a:lnRef idx="1">
-            <a:schemeClr val="accent1"/>
-          </a:lnRef>
-          <a:fillRef idx="3">
-            <a:schemeClr val="accent1"/>
-          </a:fillRef>
-          <a:effectRef idx="2">
-            <a:schemeClr val="accent1"/>
-          </a:effectRef>
-          <a:fontRef idx="minor">
-            <a:schemeClr val="lt1"/>
-          </a:fontRef>
-        </p:style>
-        <p:txBody>
-          <a:bodyPr rtlCol="0" anchor="ctr"/>
-          <a:lstStyle/>
-          <a:p>
-            <a:pPr algn="ctr"/>
-          </a:p>
-        </p:txBody>
-      </p:sp>
-      <p:sp>
-        <p:nvSpPr>
-          <p:cNvPr id="6" name="TextBox 5"/>
-          <p:cNvSpPr txBox="1"/>
-          <p:nvPr/>
-        </p:nvSpPr>
-        <p:spPr>
-          <a:xfrm>
-            <a:off x="6400800" y="1828800"/>
-            <a:ext cx="4754880" cy="1783080"/>
-          </a:xfrm>
-          <a:prstGeom prst="rect">
-            <a:avLst/>
-          </a:prstGeom>
-          <a:noFill/>
-        </p:spPr>
-        <p:txBody>
-          <a:bodyPr wrap="square">
-            <a:spAutoFit/>
-          </a:bodyPr>
-          <a:lstStyle/>
-          <a:p>
-            <a:pPr>
-              <a:defRPr sz="1400" b="1">
-                <a:solidFill>
-                  <a:srgbClr val="0F2043"/>
-                </a:solidFill>
-                <a:latin typeface="SimHei"/>
-              </a:defRPr>
-            </a:pPr>
-            <a:r>
-              <a:t>微地形通行代价方程 (Cost Formula)</a:t>
-            </a:r>
-          </a:p>
-          <a:p>
-            <a:pPr>
-              <a:lnSpc>
-                <a:spcPct val="130000"/>
-              </a:lnSpc>
+              <a:t>建议放入：普通高德地图推荐路线（走台阶走天桥）vs 本系统北斗适老无障碍路径规划路线比对图</a:t>
+            </a:r>
+          </a:p>
+          <a:p>
+            <a:pPr algn="ctr">
               <a:spcBef>
-                <a:spcPts val="800"/>
+                <a:spcPts val="1200"/>
               </a:spcBef>
-              <a:defRPr sz="1000">
-                <a:solidFill>
-                  <a:srgbClr val="64748B"/>
-                </a:solidFill>
-                <a:latin typeface="SimSun"/>
-              </a:defRPr>
-            </a:pPr>
-            <a:r>
-              <a:t>构建适老代价模型：Cost = L * (1 + W_slope * Slope^2 + W_step * N_steps - W_shade * Shade)；对台阶施加 10 倍惩罚权重，彻底杜绝长坡与陡梯。</a:t>
-            </a:r>
-          </a:p>
-        </p:txBody>
-      </p:sp>
-      <p:sp>
-        <p:nvSpPr>
-          <p:cNvPr id="7" name="Rounded Rectangle 6"/>
-          <p:cNvSpPr/>
-          <p:nvPr/>
-        </p:nvSpPr>
-        <p:spPr>
-          <a:xfrm>
-            <a:off x="731520" y="3977639"/>
-            <a:ext cx="5212080" cy="2148840"/>
-          </a:xfrm>
-          <a:prstGeom prst="roundRect">
-            <a:avLst/>
-          </a:prstGeom>
-          <a:solidFill>
-            <a:srgbClr val="FFFFFF"/>
-          </a:solidFill>
-          <a:ln w="19050">
-            <a:solidFill>
-              <a:srgbClr val="E2E8F0"/>
-            </a:solidFill>
-          </a:ln>
-        </p:spPr>
-        <p:style>
-          <a:lnRef idx="1">
-            <a:schemeClr val="accent1"/>
-          </a:lnRef>
-          <a:fillRef idx="3">
-            <a:schemeClr val="accent1"/>
-          </a:fillRef>
-          <a:effectRef idx="2">
-            <a:schemeClr val="accent1"/>
-          </a:effectRef>
-          <a:fontRef idx="minor">
-            <a:schemeClr val="lt1"/>
-          </a:fontRef>
-        </p:style>
-        <p:txBody>
-          <a:bodyPr rtlCol="0" anchor="ctr"/>
-          <a:lstStyle/>
-          <a:p>
-            <a:pPr algn="ctr"/>
-          </a:p>
-        </p:txBody>
-      </p:sp>
-      <p:sp>
-        <p:nvSpPr>
-          <p:cNvPr id="8" name="TextBox 7"/>
-          <p:cNvSpPr txBox="1"/>
-          <p:nvPr/>
-        </p:nvSpPr>
-        <p:spPr>
-          <a:xfrm>
-            <a:off x="960120" y="4160519"/>
-            <a:ext cx="4754880" cy="1783080"/>
-          </a:xfrm>
-          <a:prstGeom prst="rect">
-            <a:avLst/>
-          </a:prstGeom>
-          <a:noFill/>
-        </p:spPr>
-        <p:txBody>
-          <a:bodyPr wrap="square">
-            <a:spAutoFit/>
-          </a:bodyPr>
-          <a:lstStyle/>
-          <a:p>
-            <a:pPr>
-              <a:defRPr sz="1400" b="1">
-                <a:solidFill>
-                  <a:srgbClr val="0F2043"/>
-                </a:solidFill>
-                <a:latin typeface="SimHei"/>
-              </a:defRPr>
-            </a:pPr>
-            <a:r>
-              <a:t>动态安全走廊 (BDS Corridor)</a:t>
-            </a:r>
-          </a:p>
-          <a:p>
-            <a:pPr>
-              <a:lnSpc>
-                <a:spcPct val="130000"/>
-              </a:lnSpc>
-              <a:spcBef>
-                <a:spcPts val="800"/>
-              </a:spcBef>
-              <a:defRPr sz="1000">
-                <a:solidFill>
-                  <a:srgbClr val="64748B"/>
-                </a:solidFill>
-                <a:latin typeface="SimSun"/>
-              </a:defRPr>
-            </a:pPr>
-            <a:r>
-              <a:t>依托北斗亚米级轨迹建立 25 米半径球面动态廊道缓冲带；一旦偏离即刻启动声控指引，杜绝老人迷失。</a:t>
-            </a:r>
-          </a:p>
-        </p:txBody>
-      </p:sp>
-      <p:sp>
-        <p:nvSpPr>
-          <p:cNvPr id="9" name="Rounded Rectangle 8"/>
-          <p:cNvSpPr/>
-          <p:nvPr/>
-        </p:nvSpPr>
-        <p:spPr>
-          <a:xfrm>
-            <a:off x="6172200" y="3977639"/>
-            <a:ext cx="5212080" cy="2148840"/>
-          </a:xfrm>
-          <a:prstGeom prst="roundRect">
-            <a:avLst/>
-          </a:prstGeom>
-          <a:solidFill>
-            <a:srgbClr val="FFFFFF"/>
-          </a:solidFill>
-          <a:ln w="19050">
-            <a:solidFill>
-              <a:srgbClr val="E2E8F0"/>
-            </a:solidFill>
-          </a:ln>
-        </p:spPr>
-        <p:style>
-          <a:lnRef idx="1">
-            <a:schemeClr val="accent1"/>
-          </a:lnRef>
-          <a:fillRef idx="3">
-            <a:schemeClr val="accent1"/>
-          </a:fillRef>
-          <a:effectRef idx="2">
-            <a:schemeClr val="accent1"/>
-          </a:effectRef>
-          <a:fontRef idx="minor">
-            <a:schemeClr val="lt1"/>
-          </a:fontRef>
-        </p:style>
-        <p:txBody>
-          <a:bodyPr rtlCol="0" anchor="ctr"/>
-          <a:lstStyle/>
-          <a:p>
-            <a:pPr algn="ctr"/>
-          </a:p>
-        </p:txBody>
-      </p:sp>
-      <p:sp>
-        <p:nvSpPr>
-          <p:cNvPr id="10" name="TextBox 9"/>
-          <p:cNvSpPr txBox="1"/>
-          <p:nvPr/>
-        </p:nvSpPr>
-        <p:spPr>
-          <a:xfrm>
-            <a:off x="6400800" y="4160519"/>
-            <a:ext cx="4754880" cy="1783080"/>
-          </a:xfrm>
-          <a:prstGeom prst="rect">
-            <a:avLst/>
-          </a:prstGeom>
-          <a:noFill/>
-        </p:spPr>
-        <p:txBody>
-          <a:bodyPr wrap="square">
-            <a:spAutoFit/>
-          </a:bodyPr>
-          <a:lstStyle/>
-          <a:p>
-            <a:pPr>
-              <a:defRPr sz="1400" b="1">
-                <a:solidFill>
-                  <a:srgbClr val="0F2043"/>
-                </a:solidFill>
-                <a:latin typeface="SimHei"/>
-              </a:defRPr>
-            </a:pPr>
-            <a:r>
-              <a:t>北斗特种通信与应急概念联动</a:t>
-            </a:r>
-          </a:p>
-          <a:p>
-            <a:pPr>
-              <a:lnSpc>
-                <a:spcPct val="130000"/>
-              </a:lnSpc>
-              <a:spcBef>
-                <a:spcPts val="800"/>
-              </a:spcBef>
-              <a:defRPr sz="1000">
-                <a:solidFill>
-                  <a:srgbClr val="64748B"/>
-                </a:solidFill>
-                <a:latin typeface="SimSun"/>
-              </a:defRPr>
-            </a:pPr>
-            <a:r>
-              <a:t>预置北斗短报文与一键 SOS 救援信标，在公网信号盲区仍可发射带高精经纬度的求助脉冲。</a:t>
+              <a:defRPr sz="950" i="1">
+                <a:solidFill>
+                  <a:srgbClr val="F59E0B"/>
+                </a:solidFill>
+                <a:latin typeface="Microsoft YaHei"/>
+              </a:defRPr>
+            </a:pPr>
+            <a:r>
+              <a:t>（在此处粘贴/插入实际项目截图或架构图）</a:t>
             </a:r>
           </a:p>
         </p:txBody>
@@ -4770,77 +6112,23 @@
       <p:grpSpPr/>
       <p:sp>
         <p:nvSpPr>
-          <p:cNvPr id="2" name="TextBox 1"/>
-          <p:cNvSpPr txBox="1"/>
-          <p:nvPr/>
-        </p:nvSpPr>
-        <p:spPr>
-          <a:xfrm>
-            <a:off x="731520" y="365760"/>
-            <a:ext cx="10698480" cy="1005840"/>
+          <p:cNvPr id="2" name="Rectangle 1"/>
+          <p:cNvSpPr/>
+          <p:nvPr/>
+        </p:nvSpPr>
+        <p:spPr>
+          <a:xfrm>
+            <a:off x="0" y="0"/>
+            <a:ext cx="12191695" cy="6858000"/>
           </a:xfrm>
           <a:prstGeom prst="rect">
             <a:avLst/>
           </a:prstGeom>
-          <a:noFill/>
-        </p:spPr>
-        <p:txBody>
-          <a:bodyPr wrap="square" lIns="0" tIns="0" rIns="0" bIns="0">
-            <a:spAutoFit/>
-          </a:bodyPr>
-          <a:lstStyle/>
-          <a:p>
-            <a:pPr>
-              <a:defRPr sz="1100" b="1">
-                <a:solidFill>
-                  <a:srgbClr val="00A8CC"/>
-                </a:solidFill>
-                <a:latin typeface="SimHei"/>
-              </a:defRPr>
-            </a:pPr>
-            <a:r>
-              <a:t>第八届湖南省大学生智能导航科技创新大赛 · 科技创意类</a:t>
-            </a:r>
-          </a:p>
-          <a:p>
-            <a:pPr>
-              <a:spcBef>
-                <a:spcPts val="400"/>
-              </a:spcBef>
-              <a:defRPr sz="2200" b="1">
-                <a:solidFill>
-                  <a:srgbClr val="0F2043"/>
-                </a:solidFill>
-                <a:latin typeface="SimHei"/>
-              </a:defRPr>
-            </a:pPr>
-            <a:r>
-              <a:t>四、 适老化极简交互：实景地标导航与大白话语音直达</a:t>
-            </a:r>
-          </a:p>
-        </p:txBody>
-      </p:sp>
-      <p:sp>
-        <p:nvSpPr>
-          <p:cNvPr id="3" name="Rounded Rectangle 2"/>
-          <p:cNvSpPr/>
-          <p:nvPr/>
-        </p:nvSpPr>
-        <p:spPr>
-          <a:xfrm>
-            <a:off x="731520" y="1645920"/>
-            <a:ext cx="2560320" cy="4389120"/>
-          </a:xfrm>
-          <a:prstGeom prst="roundRect">
-            <a:avLst/>
-          </a:prstGeom>
           <a:solidFill>
-            <a:srgbClr val="FFFFFF"/>
+            <a:srgbClr val="F8FAFC"/>
           </a:solidFill>
-          <a:ln w="19050">
-            <a:solidFill>
-              <a:srgbClr val="E2E8F0"/>
-            </a:solidFill>
+          <a:ln>
+            <a:noFill/>
           </a:ln>
         </p:spPr>
         <p:style>
@@ -4867,14 +6155,14 @@
       </p:sp>
       <p:sp>
         <p:nvSpPr>
-          <p:cNvPr id="4" name="TextBox 3"/>
+          <p:cNvPr id="3" name="TextBox 2"/>
           <p:cNvSpPr txBox="1"/>
           <p:nvPr/>
         </p:nvSpPr>
         <p:spPr>
           <a:xfrm>
-            <a:off x="896112" y="1828800"/>
-            <a:ext cx="2231136" cy="3931920"/>
+            <a:off x="731520" y="365760"/>
+            <a:ext cx="10728655" cy="1005840"/>
           </a:xfrm>
           <a:prstGeom prst="rect">
             <a:avLst/>
@@ -4882,54 +6170,51 @@
           <a:noFill/>
         </p:spPr>
         <p:txBody>
-          <a:bodyPr wrap="square">
+          <a:bodyPr wrap="square" lIns="0" tIns="0" rIns="0" bIns="0">
             <a:spAutoFit/>
           </a:bodyPr>
           <a:lstStyle/>
           <a:p>
             <a:pPr>
-              <a:defRPr sz="1350" b="1">
-                <a:solidFill>
-                  <a:srgbClr val="0F2043"/>
-                </a:solidFill>
-                <a:latin typeface="SimHei"/>
-              </a:defRPr>
-            </a:pPr>
-            <a:r>
-              <a:t>大白话一键语音直达</a:t>
-            </a:r>
-          </a:p>
-          <a:p>
-            <a:pPr>
-              <a:lnSpc>
-                <a:spcPct val="130000"/>
-              </a:lnSpc>
+              <a:defRPr sz="1050" b="1">
+                <a:solidFill>
+                  <a:srgbClr val="008DDA"/>
+                </a:solidFill>
+                <a:latin typeface="Microsoft YaHei"/>
+              </a:defRPr>
+            </a:pPr>
+            <a:r>
+              <a:t>银发导航智能体 · 系统技术方案</a:t>
+            </a:r>
+          </a:p>
+          <a:p>
+            <a:pPr>
               <a:spcBef>
-                <a:spcPts val="1200"/>
+                <a:spcPts val="300"/>
               </a:spcBef>
-              <a:defRPr sz="1000">
-                <a:solidFill>
-                  <a:srgbClr val="64748B"/>
-                </a:solidFill>
-                <a:latin typeface="SimSun"/>
-              </a:defRPr>
-            </a:pPr>
-            <a:r>
-              <a:t>无需手动输入起点与参数，长按大麦克风说出'想去烈士公园走走，腿有点酸'，智能体自动提取意图与身体状态。</a:t>
-            </a:r>
-          </a:p>
-        </p:txBody>
-      </p:sp>
-      <p:sp>
-        <p:nvSpPr>
-          <p:cNvPr id="5" name="Rounded Rectangle 4"/>
+              <a:defRPr sz="2200" b="1">
+                <a:solidFill>
+                  <a:srgbClr val="0B192C"/>
+                </a:solidFill>
+                <a:latin typeface="Microsoft YaHei"/>
+              </a:defRPr>
+            </a:pPr>
+            <a:r>
+              <a:t>四、 适老极简交互：实景地标导航与大白话语音直达</a:t>
+            </a:r>
+          </a:p>
+        </p:txBody>
+      </p:sp>
+      <p:sp>
+        <p:nvSpPr>
+          <p:cNvPr id="4" name="Rounded Rectangle 3"/>
           <p:cNvSpPr/>
           <p:nvPr/>
         </p:nvSpPr>
         <p:spPr>
           <a:xfrm>
-            <a:off x="3429000" y="1645920"/>
-            <a:ext cx="2560320" cy="4389120"/>
+            <a:off x="731520" y="1463040"/>
+            <a:ext cx="6126480" cy="1051560"/>
           </a:xfrm>
           <a:prstGeom prst="roundRect">
             <a:avLst/>
@@ -4937,7 +6222,7 @@
           <a:solidFill>
             <a:srgbClr val="FFFFFF"/>
           </a:solidFill>
-          <a:ln w="19050">
+          <a:ln w="12700">
             <a:solidFill>
               <a:srgbClr val="E2E8F0"/>
             </a:solidFill>
@@ -4967,14 +6252,14 @@
       </p:sp>
       <p:sp>
         <p:nvSpPr>
-          <p:cNvPr id="6" name="TextBox 5"/>
+          <p:cNvPr id="5" name="TextBox 4"/>
           <p:cNvSpPr txBox="1"/>
           <p:nvPr/>
         </p:nvSpPr>
         <p:spPr>
           <a:xfrm>
-            <a:off x="3593592" y="1828800"/>
-            <a:ext cx="2231136" cy="3931920"/>
+            <a:off x="914400" y="1572768"/>
+            <a:ext cx="5760720" cy="822960"/>
           </a:xfrm>
           <a:prstGeom prst="rect">
             <a:avLst/>
@@ -4982,54 +6267,51 @@
           <a:noFill/>
         </p:spPr>
         <p:txBody>
-          <a:bodyPr wrap="square">
+          <a:bodyPr wrap="square" lIns="0" tIns="0">
             <a:spAutoFit/>
           </a:bodyPr>
           <a:lstStyle/>
           <a:p>
             <a:pPr>
-              <a:defRPr sz="1350" b="1">
-                <a:solidFill>
-                  <a:srgbClr val="0F2043"/>
-                </a:solidFill>
-                <a:latin typeface="SimHei"/>
-              </a:defRPr>
-            </a:pPr>
-            <a:r>
-              <a:t>地标式路口实景引导卡片</a:t>
-            </a:r>
-          </a:p>
-          <a:p>
-            <a:pPr>
-              <a:lnSpc>
-                <a:spcPct val="130000"/>
-              </a:lnSpc>
+              <a:defRPr sz="1300" b="1">
+                <a:solidFill>
+                  <a:srgbClr val="0B192C"/>
+                </a:solidFill>
+                <a:latin typeface="Microsoft YaHei"/>
+              </a:defRPr>
+            </a:pPr>
+            <a:r>
+              <a:t>👵 大白话一键语音直达</a:t>
+            </a:r>
+          </a:p>
+          <a:p>
+            <a:pPr>
               <a:spcBef>
-                <a:spcPts val="1200"/>
+                <a:spcPts val="300"/>
               </a:spcBef>
-              <a:defRPr sz="1000">
-                <a:solidFill>
-                  <a:srgbClr val="64748B"/>
+              <a:defRPr sz="950">
+                <a:solidFill>
+                  <a:srgbClr val="334155"/>
                 </a:solidFill>
                 <a:latin typeface="SimSun"/>
               </a:defRPr>
             </a:pPr>
             <a:r>
-              <a:t>摒弃传统'200米后向东北方向转弯'等抽象术语，采用'过益丰大药房右转'、'顺着林荫平道直走'等醒目地标提示。</a:t>
-            </a:r>
-          </a:p>
-        </p:txBody>
-      </p:sp>
-      <p:sp>
-        <p:nvSpPr>
-          <p:cNvPr id="7" name="Rounded Rectangle 6"/>
+              <a:t>无需手动输地址，按住大麦克风说出'想去烈士公园走走，腿有点酸'，智能体自动解析目的地与健康约束。</a:t>
+            </a:r>
+          </a:p>
+        </p:txBody>
+      </p:sp>
+      <p:sp>
+        <p:nvSpPr>
+          <p:cNvPr id="6" name="Rounded Rectangle 5"/>
           <p:cNvSpPr/>
           <p:nvPr/>
         </p:nvSpPr>
         <p:spPr>
           <a:xfrm>
-            <a:off x="6126480" y="1645920"/>
-            <a:ext cx="2560320" cy="4389120"/>
+            <a:off x="731520" y="2606040"/>
+            <a:ext cx="6126480" cy="1051560"/>
           </a:xfrm>
           <a:prstGeom prst="roundRect">
             <a:avLst/>
@@ -5037,7 +6319,7 @@
           <a:solidFill>
             <a:srgbClr val="FFFFFF"/>
           </a:solidFill>
-          <a:ln w="19050">
+          <a:ln w="12700">
             <a:solidFill>
               <a:srgbClr val="E2E8F0"/>
             </a:solidFill>
@@ -5067,14 +6349,14 @@
       </p:sp>
       <p:sp>
         <p:nvSpPr>
-          <p:cNvPr id="8" name="TextBox 7"/>
+          <p:cNvPr id="7" name="TextBox 6"/>
           <p:cNvSpPr txBox="1"/>
           <p:nvPr/>
         </p:nvSpPr>
         <p:spPr>
           <a:xfrm>
-            <a:off x="6291072" y="1828800"/>
-            <a:ext cx="2231136" cy="3931920"/>
+            <a:off x="914400" y="2715768"/>
+            <a:ext cx="5760720" cy="822960"/>
           </a:xfrm>
           <a:prstGeom prst="rect">
             <a:avLst/>
@@ -5082,54 +6364,51 @@
           <a:noFill/>
         </p:spPr>
         <p:txBody>
-          <a:bodyPr wrap="square">
+          <a:bodyPr wrap="square" lIns="0" tIns="0">
             <a:spAutoFit/>
           </a:bodyPr>
           <a:lstStyle/>
           <a:p>
             <a:pPr>
-              <a:defRPr sz="1350" b="1">
-                <a:solidFill>
-                  <a:srgbClr val="0F2043"/>
-                </a:solidFill>
-                <a:latin typeface="SimHei"/>
-              </a:defRPr>
-            </a:pPr>
-            <a:r>
-              <a:t>北斗卫星遥测状态感知</a:t>
-            </a:r>
-          </a:p>
-          <a:p>
-            <a:pPr>
-              <a:lnSpc>
-                <a:spcPct val="130000"/>
-              </a:lnSpc>
+              <a:defRPr sz="1300" b="1">
+                <a:solidFill>
+                  <a:srgbClr val="0B192C"/>
+                </a:solidFill>
+                <a:latin typeface="Microsoft YaHei"/>
+              </a:defRPr>
+            </a:pPr>
+            <a:r>
+              <a:t>👵 北斗卫星遥测状态条 (BdsStatusBar)</a:t>
+            </a:r>
+          </a:p>
+          <a:p>
+            <a:pPr>
               <a:spcBef>
-                <a:spcPts val="1200"/>
+                <a:spcPts val="300"/>
               </a:spcBef>
-              <a:defRPr sz="1000">
-                <a:solidFill>
-                  <a:srgbClr val="64748B"/>
+              <a:defRPr sz="950">
+                <a:solidFill>
+                  <a:srgbClr val="334155"/>
                 </a:solidFill>
                 <a:latin typeface="SimSun"/>
               </a:defRPr>
             </a:pPr>
             <a:r>
-              <a:t>界面常驻 BDS 卫星遥测条（如 12 颗 BDS 亚米级锁定），给予老人和家属极强的高科技确定感与安全感。</a:t>
-            </a:r>
-          </a:p>
-        </p:txBody>
-      </p:sp>
-      <p:sp>
-        <p:nvSpPr>
-          <p:cNvPr id="9" name="Rounded Rectangle 8"/>
+              <a:t>界面顶部常驻 BDS 卫星颗数（如 12 颗 BDS 亚米级锁定）与定位精度，给予长辈极强确定感。</a:t>
+            </a:r>
+          </a:p>
+        </p:txBody>
+      </p:sp>
+      <p:sp>
+        <p:nvSpPr>
+          <p:cNvPr id="8" name="Rounded Rectangle 7"/>
           <p:cNvSpPr/>
           <p:nvPr/>
         </p:nvSpPr>
         <p:spPr>
           <a:xfrm>
-            <a:off x="8823960" y="1645920"/>
-            <a:ext cx="2560320" cy="4389120"/>
+            <a:off x="731520" y="3749039"/>
+            <a:ext cx="6126480" cy="1051560"/>
           </a:xfrm>
           <a:prstGeom prst="roundRect">
             <a:avLst/>
@@ -5137,7 +6416,7 @@
           <a:solidFill>
             <a:srgbClr val="FFFFFF"/>
           </a:solidFill>
-          <a:ln w="19050">
+          <a:ln w="12700">
             <a:solidFill>
               <a:srgbClr val="E2E8F0"/>
             </a:solidFill>
@@ -5167,14 +6446,14 @@
       </p:sp>
       <p:sp>
         <p:nvSpPr>
-          <p:cNvPr id="10" name="TextBox 9"/>
+          <p:cNvPr id="9" name="TextBox 8"/>
           <p:cNvSpPr txBox="1"/>
           <p:nvPr/>
         </p:nvSpPr>
         <p:spPr>
           <a:xfrm>
-            <a:off x="8988552" y="1828800"/>
-            <a:ext cx="2231136" cy="3931920"/>
+            <a:off x="914400" y="3858767"/>
+            <a:ext cx="5760720" cy="822960"/>
           </a:xfrm>
           <a:prstGeom prst="rect">
             <a:avLst/>
@@ -5182,40 +6461,250 @@
           <a:noFill/>
         </p:spPr>
         <p:txBody>
-          <a:bodyPr wrap="square">
+          <a:bodyPr wrap="square" lIns="0" tIns="0">
             <a:spAutoFit/>
           </a:bodyPr>
           <a:lstStyle/>
           <a:p>
             <a:pPr>
-              <a:defRPr sz="1350" b="1">
-                <a:solidFill>
-                  <a:srgbClr val="0F2043"/>
-                </a:solidFill>
-                <a:latin typeface="SimHei"/>
-              </a:defRPr>
-            </a:pPr>
-            <a:r>
-              <a:t>声控偏航与迷路自动纠偏</a:t>
-            </a:r>
-          </a:p>
-          <a:p>
-            <a:pPr>
+              <a:defRPr sz="1300" b="1">
+                <a:solidFill>
+                  <a:srgbClr val="0B192C"/>
+                </a:solidFill>
+                <a:latin typeface="Microsoft YaHei"/>
+              </a:defRPr>
+            </a:pPr>
+            <a:r>
+              <a:t>👵 地标式实景路口引导 (LandmarkGuidanceCard)</a:t>
+            </a:r>
+          </a:p>
+          <a:p>
+            <a:pPr>
+              <a:spcBef>
+                <a:spcPts val="300"/>
+              </a:spcBef>
+              <a:defRPr sz="950">
+                <a:solidFill>
+                  <a:srgbClr val="334155"/>
+                </a:solidFill>
+                <a:latin typeface="SimSun"/>
+              </a:defRPr>
+            </a:pPr>
+            <a:r>
+              <a:t>摒弃'200米后向东北转弯'等抽象米数，采用'过益丰大药房右转'、'顺着林荫道直走'等醒目实景地标。</a:t>
+            </a:r>
+          </a:p>
+        </p:txBody>
+      </p:sp>
+      <p:sp>
+        <p:nvSpPr>
+          <p:cNvPr id="10" name="Rounded Rectangle 9"/>
+          <p:cNvSpPr/>
+          <p:nvPr/>
+        </p:nvSpPr>
+        <p:spPr>
+          <a:xfrm>
+            <a:off x="731520" y="4892040"/>
+            <a:ext cx="6126480" cy="1051560"/>
+          </a:xfrm>
+          <a:prstGeom prst="roundRect">
+            <a:avLst/>
+          </a:prstGeom>
+          <a:solidFill>
+            <a:srgbClr val="FFFFFF"/>
+          </a:solidFill>
+          <a:ln w="12700">
+            <a:solidFill>
+              <a:srgbClr val="E2E8F0"/>
+            </a:solidFill>
+          </a:ln>
+        </p:spPr>
+        <p:style>
+          <a:lnRef idx="1">
+            <a:schemeClr val="accent1"/>
+          </a:lnRef>
+          <a:fillRef idx="3">
+            <a:schemeClr val="accent1"/>
+          </a:fillRef>
+          <a:effectRef idx="2">
+            <a:schemeClr val="accent1"/>
+          </a:effectRef>
+          <a:fontRef idx="minor">
+            <a:schemeClr val="lt1"/>
+          </a:fontRef>
+        </p:style>
+        <p:txBody>
+          <a:bodyPr rtlCol="0" anchor="ctr"/>
+          <a:lstStyle/>
+          <a:p>
+            <a:pPr algn="ctr"/>
+          </a:p>
+        </p:txBody>
+      </p:sp>
+      <p:sp>
+        <p:nvSpPr>
+          <p:cNvPr id="11" name="TextBox 10"/>
+          <p:cNvSpPr txBox="1"/>
+          <p:nvPr/>
+        </p:nvSpPr>
+        <p:spPr>
+          <a:xfrm>
+            <a:off x="914400" y="5001768"/>
+            <a:ext cx="5760720" cy="822960"/>
+          </a:xfrm>
+          <a:prstGeom prst="rect">
+            <a:avLst/>
+          </a:prstGeom>
+          <a:noFill/>
+        </p:spPr>
+        <p:txBody>
+          <a:bodyPr wrap="square" lIns="0" tIns="0">
+            <a:spAutoFit/>
+          </a:bodyPr>
+          <a:lstStyle/>
+          <a:p>
+            <a:pPr>
+              <a:defRPr sz="1300" b="1">
+                <a:solidFill>
+                  <a:srgbClr val="0B192C"/>
+                </a:solidFill>
+                <a:latin typeface="Microsoft YaHei"/>
+              </a:defRPr>
+            </a:pPr>
+            <a:r>
+              <a:t>👵 和蔼声控即时纠偏</a:t>
+            </a:r>
+          </a:p>
+          <a:p>
+            <a:pPr>
+              <a:spcBef>
+                <a:spcPts val="300"/>
+              </a:spcBef>
+              <a:defRPr sz="950">
+                <a:solidFill>
+                  <a:srgbClr val="334155"/>
+                </a:solidFill>
+                <a:latin typeface="SimSun"/>
+              </a:defRPr>
+            </a:pPr>
+            <a:r>
+              <a:t>偏离步道时，系统使用温和长辈语调大白话提示'走偏啦，往回走十步就对啦'，杜绝刺耳尖锐警报。</a:t>
+            </a:r>
+          </a:p>
+        </p:txBody>
+      </p:sp>
+      <p:sp>
+        <p:nvSpPr>
+          <p:cNvPr id="12" name="Rounded Rectangle 11"/>
+          <p:cNvSpPr/>
+          <p:nvPr/>
+        </p:nvSpPr>
+        <p:spPr>
+          <a:xfrm>
+            <a:off x="7040880" y="1463040"/>
+            <a:ext cx="4389120" cy="4663440"/>
+          </a:xfrm>
+          <a:prstGeom prst="roundRect">
+            <a:avLst/>
+          </a:prstGeom>
+          <a:solidFill>
+            <a:srgbClr val="F1F5F9"/>
+          </a:solidFill>
+          <a:ln w="19050">
+            <a:solidFill>
+              <a:srgbClr val="CBD5E1"/>
+            </a:solidFill>
+          </a:ln>
+        </p:spPr>
+        <p:style>
+          <a:lnRef idx="1">
+            <a:schemeClr val="accent1"/>
+          </a:lnRef>
+          <a:fillRef idx="3">
+            <a:schemeClr val="accent1"/>
+          </a:fillRef>
+          <a:effectRef idx="2">
+            <a:schemeClr val="accent1"/>
+          </a:effectRef>
+          <a:fontRef idx="minor">
+            <a:schemeClr val="lt1"/>
+          </a:fontRef>
+        </p:style>
+        <p:txBody>
+          <a:bodyPr rtlCol="0" anchor="ctr"/>
+          <a:lstStyle/>
+          <a:p>
+            <a:pPr algn="ctr"/>
+          </a:p>
+        </p:txBody>
+      </p:sp>
+      <p:sp>
+        <p:nvSpPr>
+          <p:cNvPr id="13" name="TextBox 12"/>
+          <p:cNvSpPr txBox="1"/>
+          <p:nvPr/>
+        </p:nvSpPr>
+        <p:spPr>
+          <a:xfrm>
+            <a:off x="7223760" y="1737360"/>
+            <a:ext cx="4023360" cy="4114800"/>
+          </a:xfrm>
+          <a:prstGeom prst="rect">
+            <a:avLst/>
+          </a:prstGeom>
+          <a:noFill/>
+        </p:spPr>
+        <p:txBody>
+          <a:bodyPr wrap="square" lIns="0" tIns="0" rIns="0" bIns="0">
+            <a:spAutoFit/>
+          </a:bodyPr>
+          <a:lstStyle/>
+          <a:p>
+            <a:pPr algn="ctr">
+              <a:defRPr sz="1300" b="1">
+                <a:solidFill>
+                  <a:srgbClr val="1A4D8C"/>
+                </a:solidFill>
+                <a:latin typeface="Microsoft YaHei"/>
+              </a:defRPr>
+            </a:pPr>
+            <a:r>
+              <a:t>🖼️ 老人端实景地标导航真机操作界面截图</a:t>
+            </a:r>
+          </a:p>
+          <a:p>
+            <a:pPr algn="ctr">
               <a:lnSpc>
-                <a:spcPct val="130000"/>
+                <a:spcPct val="125000"/>
               </a:lnSpc>
+              <a:spcBef>
+                <a:spcPts val="800"/>
+              </a:spcBef>
+              <a:defRPr sz="1000">
+                <a:solidFill>
+                  <a:srgbClr val="64748B"/>
+                </a:solidFill>
+                <a:latin typeface="SimSun"/>
+              </a:defRPr>
+            </a:pPr>
+            <a:r>
+              <a:t>建议放入：route-map.vue 真机界面截屏（含 BdsStatusBar 卫星状态条、实景地图、地标引导卡片与语音播报按钮）</a:t>
+            </a:r>
+          </a:p>
+          <a:p>
+            <a:pPr algn="ctr">
               <a:spcBef>
                 <a:spcPts val="1200"/>
               </a:spcBef>
-              <a:defRPr sz="1000">
-                <a:solidFill>
-                  <a:srgbClr val="64748B"/>
-                </a:solidFill>
-                <a:latin typeface="SimSun"/>
-              </a:defRPr>
-            </a:pPr>
-            <a:r>
-              <a:t>监测到步道偏离时，不发出刺耳蜂鸣，而是通过温柔和蔼的长辈语调进行大白话原路纠偏。</a:t>
+              <a:defRPr sz="950" i="1">
+                <a:solidFill>
+                  <a:srgbClr val="F59E0B"/>
+                </a:solidFill>
+                <a:latin typeface="Microsoft YaHei"/>
+              </a:defRPr>
+            </a:pPr>
+            <a:r>
+              <a:t>（在此处粘贴/插入实际项目截图或架构图）</a:t>
             </a:r>
           </a:p>
         </p:txBody>
@@ -5240,77 +6729,23 @@
       <p:grpSpPr/>
       <p:sp>
         <p:nvSpPr>
-          <p:cNvPr id="2" name="TextBox 1"/>
-          <p:cNvSpPr txBox="1"/>
-          <p:nvPr/>
-        </p:nvSpPr>
-        <p:spPr>
-          <a:xfrm>
-            <a:off x="731520" y="365760"/>
-            <a:ext cx="10698480" cy="1005840"/>
+          <p:cNvPr id="2" name="Rectangle 1"/>
+          <p:cNvSpPr/>
+          <p:nvPr/>
+        </p:nvSpPr>
+        <p:spPr>
+          <a:xfrm>
+            <a:off x="0" y="0"/>
+            <a:ext cx="12191695" cy="6858000"/>
           </a:xfrm>
           <a:prstGeom prst="rect">
             <a:avLst/>
           </a:prstGeom>
-          <a:noFill/>
-        </p:spPr>
-        <p:txBody>
-          <a:bodyPr wrap="square" lIns="0" tIns="0" rIns="0" bIns="0">
-            <a:spAutoFit/>
-          </a:bodyPr>
-          <a:lstStyle/>
-          <a:p>
-            <a:pPr>
-              <a:defRPr sz="1100" b="1">
-                <a:solidFill>
-                  <a:srgbClr val="00A8CC"/>
-                </a:solidFill>
-                <a:latin typeface="SimHei"/>
-              </a:defRPr>
-            </a:pPr>
-            <a:r>
-              <a:t>第八届湖南省大学生智能导航科技创新大赛 · 科技创意类</a:t>
-            </a:r>
-          </a:p>
-          <a:p>
-            <a:pPr>
-              <a:spcBef>
-                <a:spcPts val="400"/>
-              </a:spcBef>
-              <a:defRPr sz="2200" b="1">
-                <a:solidFill>
-                  <a:srgbClr val="0F2043"/>
-                </a:solidFill>
-                <a:latin typeface="SimHei"/>
-              </a:defRPr>
-            </a:pPr>
-            <a:r>
-              <a:t>五、 子女端安心守护大屏：北斗电子围栏与亲情双向闭环</a:t>
-            </a:r>
-          </a:p>
-        </p:txBody>
-      </p:sp>
-      <p:sp>
-        <p:nvSpPr>
-          <p:cNvPr id="3" name="Rounded Rectangle 2"/>
-          <p:cNvSpPr/>
-          <p:nvPr/>
-        </p:nvSpPr>
-        <p:spPr>
-          <a:xfrm>
-            <a:off x="731520" y="1645920"/>
-            <a:ext cx="5212080" cy="2148840"/>
-          </a:xfrm>
-          <a:prstGeom prst="roundRect">
-            <a:avLst/>
-          </a:prstGeom>
           <a:solidFill>
-            <a:srgbClr val="FFFFFF"/>
+            <a:srgbClr val="F8FAFC"/>
           </a:solidFill>
-          <a:ln w="19050">
-            <a:solidFill>
-              <a:srgbClr val="E2E8F0"/>
-            </a:solidFill>
+          <a:ln>
+            <a:noFill/>
           </a:ln>
         </p:spPr>
         <p:style>
@@ -5337,14 +6772,14 @@
       </p:sp>
       <p:sp>
         <p:nvSpPr>
-          <p:cNvPr id="4" name="TextBox 3"/>
+          <p:cNvPr id="3" name="TextBox 2"/>
           <p:cNvSpPr txBox="1"/>
           <p:nvPr/>
         </p:nvSpPr>
         <p:spPr>
           <a:xfrm>
-            <a:off x="960120" y="1828800"/>
-            <a:ext cx="4754880" cy="1783080"/>
+            <a:off x="731520" y="365760"/>
+            <a:ext cx="10728655" cy="1005840"/>
           </a:xfrm>
           <a:prstGeom prst="rect">
             <a:avLst/>
@@ -5352,27 +6787,512 @@
           <a:noFill/>
         </p:spPr>
         <p:txBody>
-          <a:bodyPr wrap="square">
+          <a:bodyPr wrap="square" lIns="0" tIns="0" rIns="0" bIns="0">
             <a:spAutoFit/>
           </a:bodyPr>
           <a:lstStyle/>
           <a:p>
             <a:pPr>
-              <a:defRPr sz="1400" b="1">
-                <a:solidFill>
-                  <a:srgbClr val="0F2043"/>
-                </a:solidFill>
-                <a:latin typeface="SimHei"/>
-              </a:defRPr>
-            </a:pPr>
-            <a:r>
-              <a:t>实时数字孪生轨迹看板</a:t>
-            </a:r>
-          </a:p>
-          <a:p>
-            <a:pPr>
+              <a:defRPr sz="1050" b="1">
+                <a:solidFill>
+                  <a:srgbClr val="008DDA"/>
+                </a:solidFill>
+                <a:latin typeface="Microsoft YaHei"/>
+              </a:defRPr>
+            </a:pPr>
+            <a:r>
+              <a:t>银发导航智能体 · 系统技术方案</a:t>
+            </a:r>
+          </a:p>
+          <a:p>
+            <a:pPr>
+              <a:spcBef>
+                <a:spcPts val="300"/>
+              </a:spcBef>
+              <a:defRPr sz="2200" b="1">
+                <a:solidFill>
+                  <a:srgbClr val="0B192C"/>
+                </a:solidFill>
+                <a:latin typeface="Microsoft YaHei"/>
+              </a:defRPr>
+            </a:pPr>
+            <a:r>
+              <a:t>五、 子女端安心守护大屏：多级北斗电子围栏与亲情双向闭环</a:t>
+            </a:r>
+          </a:p>
+        </p:txBody>
+      </p:sp>
+      <p:sp>
+        <p:nvSpPr>
+          <p:cNvPr id="4" name="Rounded Rectangle 3"/>
+          <p:cNvSpPr/>
+          <p:nvPr/>
+        </p:nvSpPr>
+        <p:spPr>
+          <a:xfrm>
+            <a:off x="731520" y="1463040"/>
+            <a:ext cx="6126480" cy="1051560"/>
+          </a:xfrm>
+          <a:prstGeom prst="roundRect">
+            <a:avLst/>
+          </a:prstGeom>
+          <a:solidFill>
+            <a:srgbClr val="FFFFFF"/>
+          </a:solidFill>
+          <a:ln w="12700">
+            <a:solidFill>
+              <a:srgbClr val="E2E8F0"/>
+            </a:solidFill>
+          </a:ln>
+        </p:spPr>
+        <p:style>
+          <a:lnRef idx="1">
+            <a:schemeClr val="accent1"/>
+          </a:lnRef>
+          <a:fillRef idx="3">
+            <a:schemeClr val="accent1"/>
+          </a:fillRef>
+          <a:effectRef idx="2">
+            <a:schemeClr val="accent1"/>
+          </a:effectRef>
+          <a:fontRef idx="minor">
+            <a:schemeClr val="lt1"/>
+          </a:fontRef>
+        </p:style>
+        <p:txBody>
+          <a:bodyPr rtlCol="0" anchor="ctr"/>
+          <a:lstStyle/>
+          <a:p>
+            <a:pPr algn="ctr"/>
+          </a:p>
+        </p:txBody>
+      </p:sp>
+      <p:sp>
+        <p:nvSpPr>
+          <p:cNvPr id="5" name="TextBox 4"/>
+          <p:cNvSpPr txBox="1"/>
+          <p:nvPr/>
+        </p:nvSpPr>
+        <p:spPr>
+          <a:xfrm>
+            <a:off x="914400" y="1572768"/>
+            <a:ext cx="5760720" cy="822960"/>
+          </a:xfrm>
+          <a:prstGeom prst="rect">
+            <a:avLst/>
+          </a:prstGeom>
+          <a:noFill/>
+        </p:spPr>
+        <p:txBody>
+          <a:bodyPr wrap="square" lIns="0" tIns="0">
+            <a:spAutoFit/>
+          </a:bodyPr>
+          <a:lstStyle/>
+          <a:p>
+            <a:pPr>
+              <a:defRPr sz="1300" b="1">
+                <a:solidFill>
+                  <a:srgbClr val="0B192C"/>
+                </a:solidFill>
+                <a:latin typeface="Microsoft YaHei"/>
+              </a:defRPr>
+            </a:pPr>
+            <a:r>
+              <a:t>🛡️ 实时数字孪生轨迹看板</a:t>
+            </a:r>
+          </a:p>
+          <a:p>
+            <a:pPr>
+              <a:spcBef>
+                <a:spcPts val="300"/>
+              </a:spcBef>
+              <a:defRPr sz="950">
+                <a:solidFill>
+                  <a:srgbClr val="334155"/>
+                </a:solidFill>
+                <a:latin typeface="SimSun"/>
+              </a:defRPr>
+            </a:pPr>
+            <a:r>
+              <a:t>全屏呈现长辈实时经纬度、行进航向、步速与剩余行程，全天行程自动绘制平滑时空轨迹。</a:t>
+            </a:r>
+          </a:p>
+        </p:txBody>
+      </p:sp>
+      <p:sp>
+        <p:nvSpPr>
+          <p:cNvPr id="6" name="Rounded Rectangle 5"/>
+          <p:cNvSpPr/>
+          <p:nvPr/>
+        </p:nvSpPr>
+        <p:spPr>
+          <a:xfrm>
+            <a:off x="731520" y="2606040"/>
+            <a:ext cx="6126480" cy="1051560"/>
+          </a:xfrm>
+          <a:prstGeom prst="roundRect">
+            <a:avLst/>
+          </a:prstGeom>
+          <a:solidFill>
+            <a:srgbClr val="FFFFFF"/>
+          </a:solidFill>
+          <a:ln w="12700">
+            <a:solidFill>
+              <a:srgbClr val="E2E8F0"/>
+            </a:solidFill>
+          </a:ln>
+        </p:spPr>
+        <p:style>
+          <a:lnRef idx="1">
+            <a:schemeClr val="accent1"/>
+          </a:lnRef>
+          <a:fillRef idx="3">
+            <a:schemeClr val="accent1"/>
+          </a:fillRef>
+          <a:effectRef idx="2">
+            <a:schemeClr val="accent1"/>
+          </a:effectRef>
+          <a:fontRef idx="minor">
+            <a:schemeClr val="lt1"/>
+          </a:fontRef>
+        </p:style>
+        <p:txBody>
+          <a:bodyPr rtlCol="0" anchor="ctr"/>
+          <a:lstStyle/>
+          <a:p>
+            <a:pPr algn="ctr"/>
+          </a:p>
+        </p:txBody>
+      </p:sp>
+      <p:sp>
+        <p:nvSpPr>
+          <p:cNvPr id="7" name="TextBox 6"/>
+          <p:cNvSpPr txBox="1"/>
+          <p:nvPr/>
+        </p:nvSpPr>
+        <p:spPr>
+          <a:xfrm>
+            <a:off x="914400" y="2715768"/>
+            <a:ext cx="5760720" cy="822960"/>
+          </a:xfrm>
+          <a:prstGeom prst="rect">
+            <a:avLst/>
+          </a:prstGeom>
+          <a:noFill/>
+        </p:spPr>
+        <p:txBody>
+          <a:bodyPr wrap="square" lIns="0" tIns="0">
+            <a:spAutoFit/>
+          </a:bodyPr>
+          <a:lstStyle/>
+          <a:p>
+            <a:pPr>
+              <a:defRPr sz="1300" b="1">
+                <a:solidFill>
+                  <a:srgbClr val="0B192C"/>
+                </a:solidFill>
+                <a:latin typeface="Microsoft YaHei"/>
+              </a:defRPr>
+            </a:pPr>
+            <a:r>
+              <a:t>🛡️ 多级多边形北斗电子围栏</a:t>
+            </a:r>
+          </a:p>
+          <a:p>
+            <a:pPr>
+              <a:spcBef>
+                <a:spcPts val="300"/>
+              </a:spcBef>
+              <a:defRPr sz="950">
+                <a:solidFill>
+                  <a:srgbClr val="334155"/>
+                </a:solidFill>
+                <a:latin typeface="SimSun"/>
+              </a:defRPr>
+            </a:pPr>
+            <a:r>
+              <a:t>支持圈定'常住小区-菜市场-社区医院'安全活动区；越界出圈毫秒级触发短信/微信分级告警。</a:t>
+            </a:r>
+          </a:p>
+        </p:txBody>
+      </p:sp>
+      <p:sp>
+        <p:nvSpPr>
+          <p:cNvPr id="8" name="Rounded Rectangle 7"/>
+          <p:cNvSpPr/>
+          <p:nvPr/>
+        </p:nvSpPr>
+        <p:spPr>
+          <a:xfrm>
+            <a:off x="731520" y="3749039"/>
+            <a:ext cx="6126480" cy="1051560"/>
+          </a:xfrm>
+          <a:prstGeom prst="roundRect">
+            <a:avLst/>
+          </a:prstGeom>
+          <a:solidFill>
+            <a:srgbClr val="FFFFFF"/>
+          </a:solidFill>
+          <a:ln w="12700">
+            <a:solidFill>
+              <a:srgbClr val="E2E8F0"/>
+            </a:solidFill>
+          </a:ln>
+        </p:spPr>
+        <p:style>
+          <a:lnRef idx="1">
+            <a:schemeClr val="accent1"/>
+          </a:lnRef>
+          <a:fillRef idx="3">
+            <a:schemeClr val="accent1"/>
+          </a:fillRef>
+          <a:effectRef idx="2">
+            <a:schemeClr val="accent1"/>
+          </a:effectRef>
+          <a:fontRef idx="minor">
+            <a:schemeClr val="lt1"/>
+          </a:fontRef>
+        </p:style>
+        <p:txBody>
+          <a:bodyPr rtlCol="0" anchor="ctr"/>
+          <a:lstStyle/>
+          <a:p>
+            <a:pPr algn="ctr"/>
+          </a:p>
+        </p:txBody>
+      </p:sp>
+      <p:sp>
+        <p:nvSpPr>
+          <p:cNvPr id="9" name="TextBox 8"/>
+          <p:cNvSpPr txBox="1"/>
+          <p:nvPr/>
+        </p:nvSpPr>
+        <p:spPr>
+          <a:xfrm>
+            <a:off x="914400" y="3858767"/>
+            <a:ext cx="5760720" cy="822960"/>
+          </a:xfrm>
+          <a:prstGeom prst="rect">
+            <a:avLst/>
+          </a:prstGeom>
+          <a:noFill/>
+        </p:spPr>
+        <p:txBody>
+          <a:bodyPr wrap="square" lIns="0" tIns="0">
+            <a:spAutoFit/>
+          </a:bodyPr>
+          <a:lstStyle/>
+          <a:p>
+            <a:pPr>
+              <a:defRPr sz="1300" b="1">
+                <a:solidFill>
+                  <a:srgbClr val="0B192C"/>
+                </a:solidFill>
+                <a:latin typeface="Microsoft YaHei"/>
+              </a:defRPr>
+            </a:pPr>
+            <a:r>
+              <a:t>🛡️ 异常静止与超时滞留检测</a:t>
+            </a:r>
+          </a:p>
+          <a:p>
+            <a:pPr>
+              <a:spcBef>
+                <a:spcPts val="300"/>
+              </a:spcBef>
+              <a:defRPr sz="950">
+                <a:solidFill>
+                  <a:srgbClr val="334155"/>
+                </a:solidFill>
+                <a:latin typeface="SimSun"/>
+              </a:defRPr>
+            </a:pPr>
+            <a:r>
+              <a:t>在非休息亭区域静止超 25 分钟时，判定疑似跌倒或突发不适，自动向子女端推送黄色告警。</a:t>
+            </a:r>
+          </a:p>
+        </p:txBody>
+      </p:sp>
+      <p:sp>
+        <p:nvSpPr>
+          <p:cNvPr id="10" name="Rounded Rectangle 9"/>
+          <p:cNvSpPr/>
+          <p:nvPr/>
+        </p:nvSpPr>
+        <p:spPr>
+          <a:xfrm>
+            <a:off x="731520" y="4892040"/>
+            <a:ext cx="6126480" cy="1051560"/>
+          </a:xfrm>
+          <a:prstGeom prst="roundRect">
+            <a:avLst/>
+          </a:prstGeom>
+          <a:solidFill>
+            <a:srgbClr val="FFFFFF"/>
+          </a:solidFill>
+          <a:ln w="12700">
+            <a:solidFill>
+              <a:srgbClr val="E2E8F0"/>
+            </a:solidFill>
+          </a:ln>
+        </p:spPr>
+        <p:style>
+          <a:lnRef idx="1">
+            <a:schemeClr val="accent1"/>
+          </a:lnRef>
+          <a:fillRef idx="3">
+            <a:schemeClr val="accent1"/>
+          </a:fillRef>
+          <a:effectRef idx="2">
+            <a:schemeClr val="accent1"/>
+          </a:effectRef>
+          <a:fontRef idx="minor">
+            <a:schemeClr val="lt1"/>
+          </a:fontRef>
+        </p:style>
+        <p:txBody>
+          <a:bodyPr rtlCol="0" anchor="ctr"/>
+          <a:lstStyle/>
+          <a:p>
+            <a:pPr algn="ctr"/>
+          </a:p>
+        </p:txBody>
+      </p:sp>
+      <p:sp>
+        <p:nvSpPr>
+          <p:cNvPr id="11" name="TextBox 10"/>
+          <p:cNvSpPr txBox="1"/>
+          <p:nvPr/>
+        </p:nvSpPr>
+        <p:spPr>
+          <a:xfrm>
+            <a:off x="914400" y="5001768"/>
+            <a:ext cx="5760720" cy="822960"/>
+          </a:xfrm>
+          <a:prstGeom prst="rect">
+            <a:avLst/>
+          </a:prstGeom>
+          <a:noFill/>
+        </p:spPr>
+        <p:txBody>
+          <a:bodyPr wrap="square" lIns="0" tIns="0">
+            <a:spAutoFit/>
+          </a:bodyPr>
+          <a:lstStyle/>
+          <a:p>
+            <a:pPr>
+              <a:defRPr sz="1300" b="1">
+                <a:solidFill>
+                  <a:srgbClr val="0B192C"/>
+                </a:solidFill>
+                <a:latin typeface="Microsoft YaHei"/>
+              </a:defRPr>
+            </a:pPr>
+            <a:r>
+              <a:t>🛡️ 一键报平安与代办托管</a:t>
+            </a:r>
+          </a:p>
+          <a:p>
+            <a:pPr>
+              <a:spcBef>
+                <a:spcPts val="300"/>
+              </a:spcBef>
+              <a:defRPr sz="950">
+                <a:solidFill>
+                  <a:srgbClr val="334155"/>
+                </a:solidFill>
+                <a:latin typeface="SimSun"/>
+              </a:defRPr>
+            </a:pPr>
+            <a:r>
+              <a:t>老人到站一键触达'已平安抵达'语音卡片；子女可远程代叫适老专车或代预约就医号源。</a:t>
+            </a:r>
+          </a:p>
+        </p:txBody>
+      </p:sp>
+      <p:sp>
+        <p:nvSpPr>
+          <p:cNvPr id="12" name="Rounded Rectangle 11"/>
+          <p:cNvSpPr/>
+          <p:nvPr/>
+        </p:nvSpPr>
+        <p:spPr>
+          <a:xfrm>
+            <a:off x="7040880" y="1463040"/>
+            <a:ext cx="4389120" cy="4663440"/>
+          </a:xfrm>
+          <a:prstGeom prst="roundRect">
+            <a:avLst/>
+          </a:prstGeom>
+          <a:solidFill>
+            <a:srgbClr val="F1F5F9"/>
+          </a:solidFill>
+          <a:ln w="19050">
+            <a:solidFill>
+              <a:srgbClr val="CBD5E1"/>
+            </a:solidFill>
+          </a:ln>
+        </p:spPr>
+        <p:style>
+          <a:lnRef idx="1">
+            <a:schemeClr val="accent1"/>
+          </a:lnRef>
+          <a:fillRef idx="3">
+            <a:schemeClr val="accent1"/>
+          </a:fillRef>
+          <a:effectRef idx="2">
+            <a:schemeClr val="accent1"/>
+          </a:effectRef>
+          <a:fontRef idx="minor">
+            <a:schemeClr val="lt1"/>
+          </a:fontRef>
+        </p:style>
+        <p:txBody>
+          <a:bodyPr rtlCol="0" anchor="ctr"/>
+          <a:lstStyle/>
+          <a:p>
+            <a:pPr algn="ctr"/>
+          </a:p>
+        </p:txBody>
+      </p:sp>
+      <p:sp>
+        <p:nvSpPr>
+          <p:cNvPr id="13" name="TextBox 12"/>
+          <p:cNvSpPr txBox="1"/>
+          <p:nvPr/>
+        </p:nvSpPr>
+        <p:spPr>
+          <a:xfrm>
+            <a:off x="7223760" y="1737360"/>
+            <a:ext cx="4023360" cy="4114800"/>
+          </a:xfrm>
+          <a:prstGeom prst="rect">
+            <a:avLst/>
+          </a:prstGeom>
+          <a:noFill/>
+        </p:spPr>
+        <p:txBody>
+          <a:bodyPr wrap="square" lIns="0" tIns="0" rIns="0" bIns="0">
+            <a:spAutoFit/>
+          </a:bodyPr>
+          <a:lstStyle/>
+          <a:p>
+            <a:pPr algn="ctr">
+              <a:defRPr sz="1300" b="1">
+                <a:solidFill>
+                  <a:srgbClr val="1A4D8C"/>
+                </a:solidFill>
+                <a:latin typeface="Microsoft YaHei"/>
+              </a:defRPr>
+            </a:pPr>
+            <a:r>
+              <a:t>🖼️ 子女端北斗电子围栏守护大屏截图</a:t>
+            </a:r>
+          </a:p>
+          <a:p>
+            <a:pPr algn="ctr">
               <a:lnSpc>
-                <a:spcPct val="130000"/>
+                <a:spcPct val="125000"/>
               </a:lnSpc>
               <a:spcBef>
                 <a:spcPts val="800"/>
@@ -5385,307 +7305,23 @@
               </a:defRPr>
             </a:pPr>
             <a:r>
-              <a:t>子女端全屏呈现父母实时位置、行进航向、当前步速及剩余行程，全天行程自动绘制平滑时空轨迹。</a:t>
-            </a:r>
-          </a:p>
-        </p:txBody>
-      </p:sp>
-      <p:sp>
-        <p:nvSpPr>
-          <p:cNvPr id="5" name="Rounded Rectangle 4"/>
-          <p:cNvSpPr/>
-          <p:nvPr/>
-        </p:nvSpPr>
-        <p:spPr>
-          <a:xfrm>
-            <a:off x="6172200" y="1645920"/>
-            <a:ext cx="5212080" cy="2148840"/>
-          </a:xfrm>
-          <a:prstGeom prst="roundRect">
-            <a:avLst/>
-          </a:prstGeom>
-          <a:solidFill>
-            <a:srgbClr val="FFFFFF"/>
-          </a:solidFill>
-          <a:ln w="19050">
-            <a:solidFill>
-              <a:srgbClr val="E2E8F0"/>
-            </a:solidFill>
-          </a:ln>
-        </p:spPr>
-        <p:style>
-          <a:lnRef idx="1">
-            <a:schemeClr val="accent1"/>
-          </a:lnRef>
-          <a:fillRef idx="3">
-            <a:schemeClr val="accent1"/>
-          </a:fillRef>
-          <a:effectRef idx="2">
-            <a:schemeClr val="accent1"/>
-          </a:effectRef>
-          <a:fontRef idx="minor">
-            <a:schemeClr val="lt1"/>
-          </a:fontRef>
-        </p:style>
-        <p:txBody>
-          <a:bodyPr rtlCol="0" anchor="ctr"/>
-          <a:lstStyle/>
-          <a:p>
-            <a:pPr algn="ctr"/>
-          </a:p>
-        </p:txBody>
-      </p:sp>
-      <p:sp>
-        <p:nvSpPr>
-          <p:cNvPr id="6" name="TextBox 5"/>
-          <p:cNvSpPr txBox="1"/>
-          <p:nvPr/>
-        </p:nvSpPr>
-        <p:spPr>
-          <a:xfrm>
-            <a:off x="6400800" y="1828800"/>
-            <a:ext cx="4754880" cy="1783080"/>
-          </a:xfrm>
-          <a:prstGeom prst="rect">
-            <a:avLst/>
-          </a:prstGeom>
-          <a:noFill/>
-        </p:spPr>
-        <p:txBody>
-          <a:bodyPr wrap="square">
-            <a:spAutoFit/>
-          </a:bodyPr>
-          <a:lstStyle/>
-          <a:p>
-            <a:pPr>
-              <a:defRPr sz="1400" b="1">
-                <a:solidFill>
-                  <a:srgbClr val="0F2043"/>
-                </a:solidFill>
-                <a:latin typeface="SimHei"/>
-              </a:defRPr>
-            </a:pPr>
-            <a:r>
-              <a:t>多级多边形北斗电子围栏</a:t>
-            </a:r>
-          </a:p>
-          <a:p>
-            <a:pPr>
-              <a:lnSpc>
-                <a:spcPct val="130000"/>
-              </a:lnSpc>
+              <a:t>建议放入：guardian.vue 电脑端/平板大屏截屏（呈现多级电子围栏走廊、实时轨迹回放与异常滞留报警）</a:t>
+            </a:r>
+          </a:p>
+          <a:p>
+            <a:pPr algn="ctr">
               <a:spcBef>
-                <a:spcPts val="800"/>
+                <a:spcPts val="1200"/>
               </a:spcBef>
-              <a:defRPr sz="1000">
-                <a:solidFill>
-                  <a:srgbClr val="64748B"/>
-                </a:solidFill>
-                <a:latin typeface="SimSun"/>
-              </a:defRPr>
-            </a:pPr>
-            <a:r>
-              <a:t>支持绘制'常住小区-菜市场-社区医院'安全活动区；出圈毫秒级触发微信/App推送，越界风险无死角。</a:t>
-            </a:r>
-          </a:p>
-        </p:txBody>
-      </p:sp>
-      <p:sp>
-        <p:nvSpPr>
-          <p:cNvPr id="7" name="Rounded Rectangle 6"/>
-          <p:cNvSpPr/>
-          <p:nvPr/>
-        </p:nvSpPr>
-        <p:spPr>
-          <a:xfrm>
-            <a:off x="731520" y="3977639"/>
-            <a:ext cx="5212080" cy="2148840"/>
-          </a:xfrm>
-          <a:prstGeom prst="roundRect">
-            <a:avLst/>
-          </a:prstGeom>
-          <a:solidFill>
-            <a:srgbClr val="FFFFFF"/>
-          </a:solidFill>
-          <a:ln w="19050">
-            <a:solidFill>
-              <a:srgbClr val="E2E8F0"/>
-            </a:solidFill>
-          </a:ln>
-        </p:spPr>
-        <p:style>
-          <a:lnRef idx="1">
-            <a:schemeClr val="accent1"/>
-          </a:lnRef>
-          <a:fillRef idx="3">
-            <a:schemeClr val="accent1"/>
-          </a:fillRef>
-          <a:effectRef idx="2">
-            <a:schemeClr val="accent1"/>
-          </a:effectRef>
-          <a:fontRef idx="minor">
-            <a:schemeClr val="lt1"/>
-          </a:fontRef>
-        </p:style>
-        <p:txBody>
-          <a:bodyPr rtlCol="0" anchor="ctr"/>
-          <a:lstStyle/>
-          <a:p>
-            <a:pPr algn="ctr"/>
-          </a:p>
-        </p:txBody>
-      </p:sp>
-      <p:sp>
-        <p:nvSpPr>
-          <p:cNvPr id="8" name="TextBox 7"/>
-          <p:cNvSpPr txBox="1"/>
-          <p:nvPr/>
-        </p:nvSpPr>
-        <p:spPr>
-          <a:xfrm>
-            <a:off x="960120" y="4160519"/>
-            <a:ext cx="4754880" cy="1783080"/>
-          </a:xfrm>
-          <a:prstGeom prst="rect">
-            <a:avLst/>
-          </a:prstGeom>
-          <a:noFill/>
-        </p:spPr>
-        <p:txBody>
-          <a:bodyPr wrap="square">
-            <a:spAutoFit/>
-          </a:bodyPr>
-          <a:lstStyle/>
-          <a:p>
-            <a:pPr>
-              <a:defRPr sz="1400" b="1">
-                <a:solidFill>
-                  <a:srgbClr val="0F2043"/>
-                </a:solidFill>
-                <a:latin typeface="SimHei"/>
-              </a:defRPr>
-            </a:pPr>
-            <a:r>
-              <a:t>异常静止与超时滞留检测</a:t>
-            </a:r>
-          </a:p>
-          <a:p>
-            <a:pPr>
-              <a:lnSpc>
-                <a:spcPct val="130000"/>
-              </a:lnSpc>
-              <a:spcBef>
-                <a:spcPts val="800"/>
-              </a:spcBef>
-              <a:defRPr sz="1000">
-                <a:solidFill>
-                  <a:srgbClr val="64748B"/>
-                </a:solidFill>
-                <a:latin typeface="SimSun"/>
-              </a:defRPr>
-            </a:pPr>
-            <a:r>
-              <a:t>在非长椅休闲区静止超 25 分钟时，系统自动判定疑似身体不适或摔倒，触发分级警报与子女代呼叫。</a:t>
-            </a:r>
-          </a:p>
-        </p:txBody>
-      </p:sp>
-      <p:sp>
-        <p:nvSpPr>
-          <p:cNvPr id="9" name="Rounded Rectangle 8"/>
-          <p:cNvSpPr/>
-          <p:nvPr/>
-        </p:nvSpPr>
-        <p:spPr>
-          <a:xfrm>
-            <a:off x="6172200" y="3977639"/>
-            <a:ext cx="5212080" cy="2148840"/>
-          </a:xfrm>
-          <a:prstGeom prst="roundRect">
-            <a:avLst/>
-          </a:prstGeom>
-          <a:solidFill>
-            <a:srgbClr val="FFFFFF"/>
-          </a:solidFill>
-          <a:ln w="19050">
-            <a:solidFill>
-              <a:srgbClr val="E2E8F0"/>
-            </a:solidFill>
-          </a:ln>
-        </p:spPr>
-        <p:style>
-          <a:lnRef idx="1">
-            <a:schemeClr val="accent1"/>
-          </a:lnRef>
-          <a:fillRef idx="3">
-            <a:schemeClr val="accent1"/>
-          </a:fillRef>
-          <a:effectRef idx="2">
-            <a:schemeClr val="accent1"/>
-          </a:effectRef>
-          <a:fontRef idx="minor">
-            <a:schemeClr val="lt1"/>
-          </a:fontRef>
-        </p:style>
-        <p:txBody>
-          <a:bodyPr rtlCol="0" anchor="ctr"/>
-          <a:lstStyle/>
-          <a:p>
-            <a:pPr algn="ctr"/>
-          </a:p>
-        </p:txBody>
-      </p:sp>
-      <p:sp>
-        <p:nvSpPr>
-          <p:cNvPr id="10" name="TextBox 9"/>
-          <p:cNvSpPr txBox="1"/>
-          <p:nvPr/>
-        </p:nvSpPr>
-        <p:spPr>
-          <a:xfrm>
-            <a:off x="6400800" y="4160519"/>
-            <a:ext cx="4754880" cy="1783080"/>
-          </a:xfrm>
-          <a:prstGeom prst="rect">
-            <a:avLst/>
-          </a:prstGeom>
-          <a:noFill/>
-        </p:spPr>
-        <p:txBody>
-          <a:bodyPr wrap="square">
-            <a:spAutoFit/>
-          </a:bodyPr>
-          <a:lstStyle/>
-          <a:p>
-            <a:pPr>
-              <a:defRPr sz="1400" b="1">
-                <a:solidFill>
-                  <a:srgbClr val="0F2043"/>
-                </a:solidFill>
-                <a:latin typeface="SimHei"/>
-              </a:defRPr>
-            </a:pPr>
-            <a:r>
-              <a:t>一键报平安与代办托管</a:t>
-            </a:r>
-          </a:p>
-          <a:p>
-            <a:pPr>
-              <a:lnSpc>
-                <a:spcPct val="130000"/>
-              </a:lnSpc>
-              <a:spcBef>
-                <a:spcPts val="800"/>
-              </a:spcBef>
-              <a:defRPr sz="1000">
-                <a:solidFill>
-                  <a:srgbClr val="64748B"/>
-                </a:solidFill>
-                <a:latin typeface="SimSun"/>
-              </a:defRPr>
-            </a:pPr>
-            <a:r>
-              <a:t>老人到站一键触达'已平安抵达'语音卡片；子女可远程代订适老专车或预约就医挂号，形成孝心闭环。</a:t>
+              <a:defRPr sz="950" i="1">
+                <a:solidFill>
+                  <a:srgbClr val="F59E0B"/>
+                </a:solidFill>
+                <a:latin typeface="Microsoft YaHei"/>
+              </a:defRPr>
+            </a:pPr>
+            <a:r>
+              <a:t>（在此处粘贴/插入实际项目截图或架构图）</a:t>
             </a:r>
           </a:p>
         </p:txBody>
@@ -5710,77 +7346,23 @@
       <p:grpSpPr/>
       <p:sp>
         <p:nvSpPr>
-          <p:cNvPr id="2" name="TextBox 1"/>
-          <p:cNvSpPr txBox="1"/>
-          <p:nvPr/>
-        </p:nvSpPr>
-        <p:spPr>
-          <a:xfrm>
-            <a:off x="731520" y="365760"/>
-            <a:ext cx="10698480" cy="1005840"/>
+          <p:cNvPr id="2" name="Rectangle 1"/>
+          <p:cNvSpPr/>
+          <p:nvPr/>
+        </p:nvSpPr>
+        <p:spPr>
+          <a:xfrm>
+            <a:off x="0" y="0"/>
+            <a:ext cx="12191695" cy="6858000"/>
           </a:xfrm>
           <a:prstGeom prst="rect">
             <a:avLst/>
           </a:prstGeom>
-          <a:noFill/>
-        </p:spPr>
-        <p:txBody>
-          <a:bodyPr wrap="square" lIns="0" tIns="0" rIns="0" bIns="0">
-            <a:spAutoFit/>
-          </a:bodyPr>
-          <a:lstStyle/>
-          <a:p>
-            <a:pPr>
-              <a:defRPr sz="1100" b="1">
-                <a:solidFill>
-                  <a:srgbClr val="00A8CC"/>
-                </a:solidFill>
-                <a:latin typeface="SimHei"/>
-              </a:defRPr>
-            </a:pPr>
-            <a:r>
-              <a:t>第八届湖南省大学生智能导航科技创新大赛 · 科技创意类</a:t>
-            </a:r>
-          </a:p>
-          <a:p>
-            <a:pPr>
-              <a:spcBef>
-                <a:spcPts val="400"/>
-              </a:spcBef>
-              <a:defRPr sz="2200" b="1">
-                <a:solidFill>
-                  <a:srgbClr val="0F2043"/>
-                </a:solidFill>
-                <a:latin typeface="SimHei"/>
-              </a:defRPr>
-            </a:pPr>
-            <a:r>
-              <a:t>六、 突发风险主动防御：防诈拦截与就医急救绿通秒级重划</a:t>
-            </a:r>
-          </a:p>
-        </p:txBody>
-      </p:sp>
-      <p:sp>
-        <p:nvSpPr>
-          <p:cNvPr id="3" name="Rounded Rectangle 2"/>
-          <p:cNvSpPr/>
-          <p:nvPr/>
-        </p:nvSpPr>
-        <p:spPr>
-          <a:xfrm>
-            <a:off x="731520" y="1645920"/>
-            <a:ext cx="3429000" cy="4389120"/>
-          </a:xfrm>
-          <a:prstGeom prst="roundRect">
-            <a:avLst/>
-          </a:prstGeom>
           <a:solidFill>
-            <a:srgbClr val="FFFFFF"/>
+            <a:srgbClr val="F8FAFC"/>
           </a:solidFill>
-          <a:ln w="19050">
-            <a:solidFill>
-              <a:srgbClr val="E2E8F0"/>
-            </a:solidFill>
+          <a:ln>
+            <a:noFill/>
           </a:ln>
         </p:spPr>
         <p:style>
@@ -5807,14 +7389,14 @@
       </p:sp>
       <p:sp>
         <p:nvSpPr>
-          <p:cNvPr id="4" name="TextBox 3"/>
+          <p:cNvPr id="3" name="TextBox 2"/>
           <p:cNvSpPr txBox="1"/>
           <p:nvPr/>
         </p:nvSpPr>
         <p:spPr>
           <a:xfrm>
-            <a:off x="960120" y="1828800"/>
-            <a:ext cx="2971800" cy="3931920"/>
+            <a:off x="731520" y="365760"/>
+            <a:ext cx="10728655" cy="1005840"/>
           </a:xfrm>
           <a:prstGeom prst="rect">
             <a:avLst/>
@@ -5822,54 +7404,51 @@
           <a:noFill/>
         </p:spPr>
         <p:txBody>
-          <a:bodyPr wrap="square">
+          <a:bodyPr wrap="square" lIns="0" tIns="0" rIns="0" bIns="0">
             <a:spAutoFit/>
           </a:bodyPr>
           <a:lstStyle/>
           <a:p>
             <a:pPr>
-              <a:defRPr sz="1500" b="1">
-                <a:solidFill>
-                  <a:srgbClr val="0F2043"/>
-                </a:solidFill>
-                <a:latin typeface="SimHei"/>
-              </a:defRPr>
-            </a:pPr>
-            <a:r>
-              <a:t>涉诈与高危行程前置拦截</a:t>
-            </a:r>
-          </a:p>
-          <a:p>
-            <a:pPr>
-              <a:lnSpc>
-                <a:spcPct val="130000"/>
-              </a:lnSpc>
+              <a:defRPr sz="1050" b="1">
+                <a:solidFill>
+                  <a:srgbClr val="008DDA"/>
+                </a:solidFill>
+                <a:latin typeface="Microsoft YaHei"/>
+              </a:defRPr>
+            </a:pPr>
+            <a:r>
+              <a:t>银发导航智能体 · 系统技术方案</a:t>
+            </a:r>
+          </a:p>
+          <a:p>
+            <a:pPr>
               <a:spcBef>
-                <a:spcPts val="1400"/>
+                <a:spcPts val="300"/>
               </a:spcBef>
-              <a:defRPr sz="1100">
-                <a:solidFill>
-                  <a:srgbClr val="64748B"/>
-                </a:solidFill>
-                <a:latin typeface="SimSun"/>
-              </a:defRPr>
-            </a:pPr>
-            <a:r>
-              <a:t>对长辈前往偏远保健品推销窝点、异常高额消费场所进行主动风险警示与子女强提醒，从源头切断银发诈骗。</a:t>
-            </a:r>
-          </a:p>
-        </p:txBody>
-      </p:sp>
-      <p:sp>
-        <p:nvSpPr>
-          <p:cNvPr id="5" name="Rounded Rectangle 4"/>
+              <a:defRPr sz="2200" b="1">
+                <a:solidFill>
+                  <a:srgbClr val="0B192C"/>
+                </a:solidFill>
+                <a:latin typeface="Microsoft YaHei"/>
+              </a:defRPr>
+            </a:pPr>
+            <a:r>
+              <a:t>六、 突发风险主动防御：涉诈行程拦截与就医急救秒级重划</a:t>
+            </a:r>
+          </a:p>
+        </p:txBody>
+      </p:sp>
+      <p:sp>
+        <p:nvSpPr>
+          <p:cNvPr id="4" name="Rounded Rectangle 3"/>
           <p:cNvSpPr/>
           <p:nvPr/>
         </p:nvSpPr>
         <p:spPr>
           <a:xfrm>
-            <a:off x="4343400" y="1645920"/>
-            <a:ext cx="3429000" cy="4389120"/>
+            <a:off x="731520" y="1463040"/>
+            <a:ext cx="3429000" cy="4663440"/>
           </a:xfrm>
           <a:prstGeom prst="roundRect">
             <a:avLst/>
@@ -5877,7 +7456,7 @@
           <a:solidFill>
             <a:srgbClr val="FFFFFF"/>
           </a:solidFill>
-          <a:ln w="19050">
+          <a:ln w="12700">
             <a:solidFill>
               <a:srgbClr val="E2E8F0"/>
             </a:solidFill>
@@ -5907,14 +7486,14 @@
       </p:sp>
       <p:sp>
         <p:nvSpPr>
-          <p:cNvPr id="6" name="TextBox 5"/>
+          <p:cNvPr id="5" name="TextBox 4"/>
           <p:cNvSpPr txBox="1"/>
           <p:nvPr/>
         </p:nvSpPr>
         <p:spPr>
           <a:xfrm>
-            <a:off x="4572000" y="1828800"/>
-            <a:ext cx="2971800" cy="3931920"/>
+            <a:off x="914400" y="1645920"/>
+            <a:ext cx="3063240" cy="4297680"/>
           </a:xfrm>
           <a:prstGeom prst="rect">
             <a:avLst/>
@@ -5922,54 +7501,85 @@
           <a:noFill/>
         </p:spPr>
         <p:txBody>
-          <a:bodyPr wrap="square">
+          <a:bodyPr wrap="square" lIns="0" tIns="0">
             <a:spAutoFit/>
           </a:bodyPr>
           <a:lstStyle/>
           <a:p>
             <a:pPr>
+              <a:defRPr sz="1100" b="1">
+                <a:solidFill>
+                  <a:srgbClr val="008DDA"/>
+                </a:solidFill>
+                <a:latin typeface="Microsoft YaHei"/>
+              </a:defRPr>
+            </a:pPr>
+            <a:r>
+              <a:t>🛡️ 源头反诈</a:t>
+            </a:r>
+          </a:p>
+          <a:p>
+            <a:pPr>
+              <a:spcBef>
+                <a:spcPts val="800"/>
+              </a:spcBef>
               <a:defRPr sz="1500" b="1">
                 <a:solidFill>
-                  <a:srgbClr val="0F2043"/>
-                </a:solidFill>
-                <a:latin typeface="SimHei"/>
-              </a:defRPr>
-            </a:pPr>
-            <a:r>
-              <a:t>突发急症就医绿通秒级重划</a:t>
+                  <a:srgbClr val="0B192C"/>
+                </a:solidFill>
+                <a:latin typeface="Microsoft YaHei"/>
+              </a:defRPr>
+            </a:pPr>
+            <a:r>
+              <a:t>涉诈与偏远行程前置拦截</a:t>
             </a:r>
           </a:p>
           <a:p>
             <a:pPr>
               <a:lnSpc>
-                <a:spcPct val="130000"/>
+                <a:spcPct val="135000"/>
               </a:lnSpc>
               <a:spcBef>
                 <a:spcPts val="1400"/>
               </a:spcBef>
-              <a:defRPr sz="1100">
+              <a:defRPr sz="1050">
+                <a:solidFill>
+                  <a:srgbClr val="334155"/>
+                </a:solidFill>
+                <a:latin typeface="SimSun"/>
+              </a:defRPr>
+            </a:pPr>
+            <a:r>
+              <a:t>识别长辈前往偏远保健品诈骗窝点、高额未知交易目的地，系统即时弹出警示，同时向子女端推送强提醒拦截风险。</a:t>
+            </a:r>
+          </a:p>
+          <a:p>
+            <a:pPr>
+              <a:spcBef>
+                <a:spcPts val="2400"/>
+              </a:spcBef>
+              <a:defRPr sz="900" i="1">
                 <a:solidFill>
                   <a:srgbClr val="64748B"/>
                 </a:solidFill>
-                <a:latin typeface="SimSun"/>
-              </a:defRPr>
-            </a:pPr>
-            <a:r>
-              <a:t>途中长辈说'胸口发闷、喘不上气'，系统立即中断原路线，北斗导航毫秒级锁定就近三甲医院急诊通道并通报子女。</a:t>
-            </a:r>
-          </a:p>
-        </p:txBody>
-      </p:sp>
-      <p:sp>
-        <p:nvSpPr>
-          <p:cNvPr id="7" name="Rounded Rectangle 6"/>
+              </a:defRPr>
+            </a:pPr>
+            <a:r>
+              <a:t>【此处可粘贴对应流程示意图/真机弹窗】</a:t>
+            </a:r>
+          </a:p>
+        </p:txBody>
+      </p:sp>
+      <p:sp>
+        <p:nvSpPr>
+          <p:cNvPr id="6" name="Rounded Rectangle 5"/>
           <p:cNvSpPr/>
           <p:nvPr/>
         </p:nvSpPr>
         <p:spPr>
           <a:xfrm>
-            <a:off x="7955280" y="1645920"/>
-            <a:ext cx="3429000" cy="4389120"/>
+            <a:off x="4343400" y="1463040"/>
+            <a:ext cx="3429000" cy="4663440"/>
           </a:xfrm>
           <a:prstGeom prst="roundRect">
             <a:avLst/>
@@ -5977,7 +7587,7 @@
           <a:solidFill>
             <a:srgbClr val="FFFFFF"/>
           </a:solidFill>
-          <a:ln w="19050">
+          <a:ln w="12700">
             <a:solidFill>
               <a:srgbClr val="E2E8F0"/>
             </a:solidFill>
@@ -6007,14 +7617,14 @@
       </p:sp>
       <p:sp>
         <p:nvSpPr>
-          <p:cNvPr id="8" name="TextBox 7"/>
+          <p:cNvPr id="7" name="TextBox 6"/>
           <p:cNvSpPr txBox="1"/>
           <p:nvPr/>
         </p:nvSpPr>
         <p:spPr>
           <a:xfrm>
-            <a:off x="8183880" y="1828800"/>
-            <a:ext cx="2971800" cy="3931920"/>
+            <a:off x="4526280" y="1645920"/>
+            <a:ext cx="3063240" cy="4297680"/>
           </a:xfrm>
           <a:prstGeom prst="rect">
             <a:avLst/>
@@ -6022,40 +7632,202 @@
           <a:noFill/>
         </p:spPr>
         <p:txBody>
-          <a:bodyPr wrap="square">
+          <a:bodyPr wrap="square" lIns="0" tIns="0">
             <a:spAutoFit/>
           </a:bodyPr>
           <a:lstStyle/>
           <a:p>
             <a:pPr>
+              <a:defRPr sz="1100" b="1">
+                <a:solidFill>
+                  <a:srgbClr val="008DDA"/>
+                </a:solidFill>
+                <a:latin typeface="Microsoft YaHei"/>
+              </a:defRPr>
+            </a:pPr>
+            <a:r>
+              <a:t>⚡ 毫秒响应</a:t>
+            </a:r>
+          </a:p>
+          <a:p>
+            <a:pPr>
+              <a:spcBef>
+                <a:spcPts val="800"/>
+              </a:spcBef>
               <a:defRPr sz="1500" b="1">
                 <a:solidFill>
-                  <a:srgbClr val="0F2043"/>
-                </a:solidFill>
-                <a:latin typeface="SimHei"/>
-              </a:defRPr>
-            </a:pPr>
-            <a:r>
-              <a:t>跌倒与走失一键紧急呼救</a:t>
+                  <a:srgbClr val="0B192C"/>
+                </a:solidFill>
+                <a:latin typeface="Microsoft YaHei"/>
+              </a:defRPr>
+            </a:pPr>
+            <a:r>
+              <a:t>突发急症毫秒级就医重划</a:t>
             </a:r>
           </a:p>
           <a:p>
             <a:pPr>
               <a:lnSpc>
-                <a:spcPct val="130000"/>
+                <a:spcPct val="135000"/>
               </a:lnSpc>
               <a:spcBef>
                 <a:spcPts val="1400"/>
               </a:spcBef>
-              <a:defRPr sz="1100">
+              <a:defRPr sz="1050">
+                <a:solidFill>
+                  <a:srgbClr val="334155"/>
+                </a:solidFill>
+                <a:latin typeface="SimSun"/>
+              </a:defRPr>
+            </a:pPr>
+            <a:r>
+              <a:t>途中长辈说'胸口发闷、喘不上气'，系统立即中断休闲散步规划，北斗导航毫秒级重新锁定就近三甲急救绿通通道并通知家属。</a:t>
+            </a:r>
+          </a:p>
+          <a:p>
+            <a:pPr>
+              <a:spcBef>
+                <a:spcPts val="2400"/>
+              </a:spcBef>
+              <a:defRPr sz="900" i="1">
                 <a:solidFill>
                   <a:srgbClr val="64748B"/>
                 </a:solidFill>
+              </a:defRPr>
+            </a:pPr>
+            <a:r>
+              <a:t>【此处可粘贴对应流程示意图/真机弹窗】</a:t>
+            </a:r>
+          </a:p>
+        </p:txBody>
+      </p:sp>
+      <p:sp>
+        <p:nvSpPr>
+          <p:cNvPr id="8" name="Rounded Rectangle 7"/>
+          <p:cNvSpPr/>
+          <p:nvPr/>
+        </p:nvSpPr>
+        <p:spPr>
+          <a:xfrm>
+            <a:off x="7955280" y="1463040"/>
+            <a:ext cx="3429000" cy="4663440"/>
+          </a:xfrm>
+          <a:prstGeom prst="roundRect">
+            <a:avLst/>
+          </a:prstGeom>
+          <a:solidFill>
+            <a:srgbClr val="FFFFFF"/>
+          </a:solidFill>
+          <a:ln w="12700">
+            <a:solidFill>
+              <a:srgbClr val="E2E8F0"/>
+            </a:solidFill>
+          </a:ln>
+        </p:spPr>
+        <p:style>
+          <a:lnRef idx="1">
+            <a:schemeClr val="accent1"/>
+          </a:lnRef>
+          <a:fillRef idx="3">
+            <a:schemeClr val="accent1"/>
+          </a:fillRef>
+          <a:effectRef idx="2">
+            <a:schemeClr val="accent1"/>
+          </a:effectRef>
+          <a:fontRef idx="minor">
+            <a:schemeClr val="lt1"/>
+          </a:fontRef>
+        </p:style>
+        <p:txBody>
+          <a:bodyPr rtlCol="0" anchor="ctr"/>
+          <a:lstStyle/>
+          <a:p>
+            <a:pPr algn="ctr"/>
+          </a:p>
+        </p:txBody>
+      </p:sp>
+      <p:sp>
+        <p:nvSpPr>
+          <p:cNvPr id="9" name="TextBox 8"/>
+          <p:cNvSpPr txBox="1"/>
+          <p:nvPr/>
+        </p:nvSpPr>
+        <p:spPr>
+          <a:xfrm>
+            <a:off x="8138160" y="1645920"/>
+            <a:ext cx="3063240" cy="4297680"/>
+          </a:xfrm>
+          <a:prstGeom prst="rect">
+            <a:avLst/>
+          </a:prstGeom>
+          <a:noFill/>
+        </p:spPr>
+        <p:txBody>
+          <a:bodyPr wrap="square" lIns="0" tIns="0">
+            <a:spAutoFit/>
+          </a:bodyPr>
+          <a:lstStyle/>
+          <a:p>
+            <a:pPr>
+              <a:defRPr sz="1100" b="1">
+                <a:solidFill>
+                  <a:srgbClr val="008DDA"/>
+                </a:solidFill>
+                <a:latin typeface="Microsoft YaHei"/>
+              </a:defRPr>
+            </a:pPr>
+            <a:r>
+              <a:t>🆘 全域信标</a:t>
+            </a:r>
+          </a:p>
+          <a:p>
+            <a:pPr>
+              <a:spcBef>
+                <a:spcPts val="800"/>
+              </a:spcBef>
+              <a:defRPr sz="1500" b="1">
+                <a:solidFill>
+                  <a:srgbClr val="0B192C"/>
+                </a:solidFill>
+                <a:latin typeface="Microsoft YaHei"/>
+              </a:defRPr>
+            </a:pPr>
+            <a:r>
+              <a:t>跌倒与走失一键紧急救援</a:t>
+            </a:r>
+          </a:p>
+          <a:p>
+            <a:pPr>
+              <a:lnSpc>
+                <a:spcPct val="135000"/>
+              </a:lnSpc>
+              <a:spcBef>
+                <a:spcPts val="1400"/>
+              </a:spcBef>
+              <a:defRPr sz="1050">
+                <a:solidFill>
+                  <a:srgbClr val="334155"/>
+                </a:solidFill>
                 <a:latin typeface="SimSun"/>
               </a:defRPr>
             </a:pPr>
             <a:r>
-              <a:t>一键触发 SOS，高精度经纬度即时同步给子女、网格员与社区紧急联系人，建立立体应急救助网络。</a:t>
+              <a:t>一键触发 SOS，高精度时空经纬度即刻通过北斗短报文信标广播给直系亲属、社区网格员与应急联系人，实现立体救助。</a:t>
+            </a:r>
+          </a:p>
+          <a:p>
+            <a:pPr>
+              <a:spcBef>
+                <a:spcPts val="2400"/>
+              </a:spcBef>
+              <a:defRPr sz="900" i="1">
+                <a:solidFill>
+                  <a:srgbClr val="64748B"/>
+                </a:solidFill>
+              </a:defRPr>
+            </a:pPr>
+            <a:r>
+              <a:t>【此处可粘贴对应流程示意图/真机弹窗】</a:t>
             </a:r>
           </a:p>
         </p:txBody>
@@ -6080,77 +7852,23 @@
       <p:grpSpPr/>
       <p:sp>
         <p:nvSpPr>
-          <p:cNvPr id="2" name="TextBox 1"/>
-          <p:cNvSpPr txBox="1"/>
-          <p:nvPr/>
-        </p:nvSpPr>
-        <p:spPr>
-          <a:xfrm>
-            <a:off x="731520" y="365760"/>
-            <a:ext cx="10698480" cy="1005840"/>
+          <p:cNvPr id="2" name="Rectangle 1"/>
+          <p:cNvSpPr/>
+          <p:nvPr/>
+        </p:nvSpPr>
+        <p:spPr>
+          <a:xfrm>
+            <a:off x="0" y="0"/>
+            <a:ext cx="12191695" cy="6858000"/>
           </a:xfrm>
           <a:prstGeom prst="rect">
             <a:avLst/>
           </a:prstGeom>
-          <a:noFill/>
-        </p:spPr>
-        <p:txBody>
-          <a:bodyPr wrap="square" lIns="0" tIns="0" rIns="0" bIns="0">
-            <a:spAutoFit/>
-          </a:bodyPr>
-          <a:lstStyle/>
-          <a:p>
-            <a:pPr>
-              <a:defRPr sz="1100" b="1">
-                <a:solidFill>
-                  <a:srgbClr val="00A8CC"/>
-                </a:solidFill>
-                <a:latin typeface="SimHei"/>
-              </a:defRPr>
-            </a:pPr>
-            <a:r>
-              <a:t>第八届湖南省大学生智能导航科技创新大赛 · 科技创意类</a:t>
-            </a:r>
-          </a:p>
-          <a:p>
-            <a:pPr>
-              <a:spcBef>
-                <a:spcPts val="400"/>
-              </a:spcBef>
-              <a:defRPr sz="2200" b="1">
-                <a:solidFill>
-                  <a:srgbClr val="0F2043"/>
-                </a:solidFill>
-                <a:latin typeface="SimHei"/>
-              </a:defRPr>
-            </a:pPr>
-            <a:r>
-              <a:t>七、 典型示范场景：湖南本地化特色实践</a:t>
-            </a:r>
-          </a:p>
-        </p:txBody>
-      </p:sp>
-      <p:sp>
-        <p:nvSpPr>
-          <p:cNvPr id="3" name="Rounded Rectangle 2"/>
-          <p:cNvSpPr/>
-          <p:nvPr/>
-        </p:nvSpPr>
-        <p:spPr>
-          <a:xfrm>
-            <a:off x="731520" y="1645920"/>
-            <a:ext cx="5212080" cy="2148840"/>
-          </a:xfrm>
-          <a:prstGeom prst="roundRect">
-            <a:avLst/>
-          </a:prstGeom>
           <a:solidFill>
-            <a:srgbClr val="FFFFFF"/>
+            <a:srgbClr val="F8FAFC"/>
           </a:solidFill>
-          <a:ln w="19050">
-            <a:solidFill>
-              <a:srgbClr val="E2E8F0"/>
-            </a:solidFill>
+          <a:ln>
+            <a:noFill/>
           </a:ln>
         </p:spPr>
         <p:style>
@@ -6177,14 +7895,14 @@
       </p:sp>
       <p:sp>
         <p:nvSpPr>
-          <p:cNvPr id="4" name="TextBox 3"/>
+          <p:cNvPr id="3" name="TextBox 2"/>
           <p:cNvSpPr txBox="1"/>
           <p:nvPr/>
         </p:nvSpPr>
         <p:spPr>
           <a:xfrm>
-            <a:off x="960120" y="1828800"/>
-            <a:ext cx="4754880" cy="1783080"/>
+            <a:off x="731520" y="365760"/>
+            <a:ext cx="10728655" cy="1005840"/>
           </a:xfrm>
           <a:prstGeom prst="rect">
             <a:avLst/>
@@ -6192,57 +7910,50 @@
           <a:noFill/>
         </p:spPr>
         <p:txBody>
-          <a:bodyPr wrap="square">
+          <a:bodyPr wrap="square" lIns="0" tIns="0" rIns="0" bIns="0">
             <a:spAutoFit/>
           </a:bodyPr>
           <a:lstStyle/>
           <a:p>
             <a:pPr>
-              <a:defRPr sz="1350" b="1">
-                <a:solidFill>
-                  <a:srgbClr val="0F2043"/>
-                </a:solidFill>
-                <a:latin typeface="SimHei"/>
-              </a:defRPr>
-            </a:pPr>
-            <a:r>
-              <a:t>示范场景一：湖南烈士公园休闲散步</a:t>
-            </a:r>
-          </a:p>
-          <a:p>
-            <a:pPr>
-              <a:lnSpc>
-                <a:spcPct val="130000"/>
-              </a:lnSpc>
+              <a:defRPr sz="1050" b="1">
+                <a:solidFill>
+                  <a:srgbClr val="008DDA"/>
+                </a:solidFill>
+                <a:latin typeface="Microsoft YaHei"/>
+              </a:defRPr>
+            </a:pPr>
+            <a:r>
+              <a:t>银发导航智能体 · 系统技术方案</a:t>
+            </a:r>
+          </a:p>
+          <a:p>
+            <a:pPr>
               <a:spcBef>
-                <a:spcPts val="800"/>
+                <a:spcPts val="300"/>
               </a:spcBef>
-              <a:defRPr sz="1000">
-                <a:solidFill>
-                  <a:srgbClr val="64748B"/>
-                </a:solidFill>
-                <a:latin typeface="SimSun"/>
-              </a:defRPr>
-            </a:pPr>
-            <a:r>
-              <a:t>• 针对膝关节炎老人，规避烈士纪念塔陡长台阶，优选年嘉湖沿线无障碍平缓绿道。</a:t>
-            </a:r>
-            <a:br/>
-            <a:r>
-              <a:t>• 结合气象感知智能体，实时播报午后阵雨，自动引导至附近湖畔避雨凉亭。</a:t>
-            </a:r>
-          </a:p>
-        </p:txBody>
-      </p:sp>
-      <p:sp>
-        <p:nvSpPr>
-          <p:cNvPr id="5" name="Rounded Rectangle 4"/>
+              <a:defRPr sz="2200" b="1">
+                <a:solidFill>
+                  <a:srgbClr val="0B192C"/>
+                </a:solidFill>
+                <a:latin typeface="Microsoft YaHei"/>
+              </a:defRPr>
+            </a:pPr>
+            <a:r>
+              <a:t>七、 典型示范场景验证：湖南本土真实适老民生实践</a:t>
+            </a:r>
+          </a:p>
+        </p:txBody>
+      </p:sp>
+      <p:sp>
+        <p:nvSpPr>
+          <p:cNvPr id="4" name="Rounded Rectangle 3"/>
           <p:cNvSpPr/>
           <p:nvPr/>
         </p:nvSpPr>
         <p:spPr>
           <a:xfrm>
-            <a:off x="6172200" y="1645920"/>
+            <a:off x="731520" y="1463040"/>
             <a:ext cx="5212080" cy="2148840"/>
           </a:xfrm>
           <a:prstGeom prst="roundRect">
@@ -6251,7 +7962,7 @@
           <a:solidFill>
             <a:srgbClr val="FFFFFF"/>
           </a:solidFill>
-          <a:ln w="19050">
+          <a:ln w="12700">
             <a:solidFill>
               <a:srgbClr val="E2E8F0"/>
             </a:solidFill>
@@ -6281,14 +7992,14 @@
       </p:sp>
       <p:sp>
         <p:nvSpPr>
-          <p:cNvPr id="6" name="TextBox 5"/>
+          <p:cNvPr id="5" name="TextBox 4"/>
           <p:cNvSpPr txBox="1"/>
           <p:nvPr/>
         </p:nvSpPr>
         <p:spPr>
           <a:xfrm>
-            <a:off x="6400800" y="1828800"/>
-            <a:ext cx="4754880" cy="1783080"/>
+            <a:off x="914400" y="1627632"/>
+            <a:ext cx="4846320" cy="1828800"/>
           </a:xfrm>
           <a:prstGeom prst="rect">
             <a:avLst/>
@@ -6296,7 +8007,7 @@
           <a:noFill/>
         </p:spPr>
         <p:txBody>
-          <a:bodyPr wrap="square">
+          <a:bodyPr wrap="square" lIns="0" tIns="0">
             <a:spAutoFit/>
           </a:bodyPr>
           <a:lstStyle/>
@@ -6304,13 +8015,13 @@
             <a:pPr>
               <a:defRPr sz="1350" b="1">
                 <a:solidFill>
-                  <a:srgbClr val="0F2043"/>
-                </a:solidFill>
-                <a:latin typeface="SimHei"/>
-              </a:defRPr>
-            </a:pPr>
-            <a:r>
-              <a:t>示范场景二：中南大学湘雅医院就医全流程</a:t>
+                  <a:srgbClr val="0B192C"/>
+                </a:solidFill>
+                <a:latin typeface="Microsoft YaHei"/>
+              </a:defRPr>
+            </a:pPr>
+            <a:r>
+              <a:t>📍 示范一：湖南烈士公园休闲散步</a:t>
             </a:r>
           </a:p>
           <a:p>
@@ -6319,34 +8030,45 @@
                 <a:spcPct val="130000"/>
               </a:lnSpc>
               <a:spcBef>
+                <a:spcPts val="600"/>
+              </a:spcBef>
+              <a:defRPr sz="1000">
+                <a:solidFill>
+                  <a:srgbClr val="334155"/>
+                </a:solidFill>
+                <a:latin typeface="SimSun"/>
+              </a:defRPr>
+            </a:pPr>
+            <a:r>
+              <a:t>膝关节炎长辈出行，系统规避纪念塔 68 级陡阶，优选年嘉湖平缓林荫绿道；遇阵雨智能引导至避雨亭。</a:t>
+            </a:r>
+          </a:p>
+          <a:p>
+            <a:pPr>
+              <a:spcBef>
                 <a:spcPts val="800"/>
               </a:spcBef>
-              <a:defRPr sz="1000">
+              <a:defRPr sz="850" i="1">
                 <a:solidFill>
                   <a:srgbClr val="64748B"/>
                 </a:solidFill>
-                <a:latin typeface="SimSun"/>
-              </a:defRPr>
-            </a:pPr>
-            <a:r>
-              <a:t>• 智能体串联挂号号源、无障碍接驳与门诊导航。</a:t>
-            </a:r>
-            <a:br/>
-            <a:r>
-              <a:t>• 引导至湘雅路无障碍电梯通道，避开天桥施工拥堵，五页计划书一键交付子女确认。</a:t>
-            </a:r>
-          </a:p>
-        </p:txBody>
-      </p:sp>
-      <p:sp>
-        <p:nvSpPr>
-          <p:cNvPr id="7" name="Rounded Rectangle 6"/>
+              </a:defRPr>
+            </a:pPr>
+            <a:r>
+              <a:t>【此处可粘贴实地路线规划截屏】</a:t>
+            </a:r>
+          </a:p>
+        </p:txBody>
+      </p:sp>
+      <p:sp>
+        <p:nvSpPr>
+          <p:cNvPr id="6" name="Rounded Rectangle 5"/>
           <p:cNvSpPr/>
           <p:nvPr/>
         </p:nvSpPr>
         <p:spPr>
           <a:xfrm>
-            <a:off x="731520" y="3977639"/>
+            <a:off x="6172200" y="1463040"/>
             <a:ext cx="5212080" cy="2148840"/>
           </a:xfrm>
           <a:prstGeom prst="roundRect">
@@ -6355,7 +8077,7 @@
           <a:solidFill>
             <a:srgbClr val="FFFFFF"/>
           </a:solidFill>
-          <a:ln w="19050">
+          <a:ln w="12700">
             <a:solidFill>
               <a:srgbClr val="E2E8F0"/>
             </a:solidFill>
@@ -6385,14 +8107,14 @@
       </p:sp>
       <p:sp>
         <p:nvSpPr>
-          <p:cNvPr id="8" name="TextBox 7"/>
+          <p:cNvPr id="7" name="TextBox 6"/>
           <p:cNvSpPr txBox="1"/>
           <p:nvPr/>
         </p:nvSpPr>
         <p:spPr>
           <a:xfrm>
-            <a:off x="960120" y="4160519"/>
-            <a:ext cx="4754880" cy="1783080"/>
+            <a:off x="6355080" y="1627632"/>
+            <a:ext cx="4846320" cy="1828800"/>
           </a:xfrm>
           <a:prstGeom prst="rect">
             <a:avLst/>
@@ -6400,7 +8122,7 @@
           <a:noFill/>
         </p:spPr>
         <p:txBody>
-          <a:bodyPr wrap="square">
+          <a:bodyPr wrap="square" lIns="0" tIns="0">
             <a:spAutoFit/>
           </a:bodyPr>
           <a:lstStyle/>
@@ -6408,13 +8130,13 @@
             <a:pPr>
               <a:defRPr sz="1350" b="1">
                 <a:solidFill>
-                  <a:srgbClr val="0F2043"/>
-                </a:solidFill>
-                <a:latin typeface="SimHei"/>
-              </a:defRPr>
-            </a:pPr>
-            <a:r>
-              <a:t>示范场景三：湖南省人民医院途中突发急症</a:t>
+                  <a:srgbClr val="0B192C"/>
+                </a:solidFill>
+                <a:latin typeface="Microsoft YaHei"/>
+              </a:defRPr>
+            </a:pPr>
+            <a:r>
+              <a:t>📍 示范二：中南大学湘雅医院就医全流程</a:t>
             </a:r>
           </a:p>
           <a:p>
@@ -6423,30 +8145,45 @@
                 <a:spcPct val="130000"/>
               </a:lnSpc>
               <a:spcBef>
+                <a:spcPts val="600"/>
+              </a:spcBef>
+              <a:defRPr sz="1000">
+                <a:solidFill>
+                  <a:srgbClr val="334155"/>
+                </a:solidFill>
+                <a:latin typeface="SimSun"/>
+              </a:defRPr>
+            </a:pPr>
+            <a:r>
+              <a:t>一键预约专家号，规划湘雅路无障碍接驳通道，避开天桥施工，就医计划书一键推送子女。</a:t>
+            </a:r>
+          </a:p>
+          <a:p>
+            <a:pPr>
+              <a:spcBef>
                 <a:spcPts val="800"/>
               </a:spcBef>
-              <a:defRPr sz="1000">
+              <a:defRPr sz="850" i="1">
                 <a:solidFill>
                   <a:srgbClr val="64748B"/>
                 </a:solidFill>
-                <a:latin typeface="SimSun"/>
-              </a:defRPr>
-            </a:pPr>
-            <a:r>
-              <a:t>• 老人途中突发不适，系统秒级重划切换至省人民医院急诊绿通，北斗短报文脉冲广播至子女。</a:t>
-            </a:r>
-          </a:p>
-        </p:txBody>
-      </p:sp>
-      <p:sp>
-        <p:nvSpPr>
-          <p:cNvPr id="9" name="Rounded Rectangle 8"/>
+              </a:defRPr>
+            </a:pPr>
+            <a:r>
+              <a:t>【此处可粘贴实地路线规划截屏】</a:t>
+            </a:r>
+          </a:p>
+        </p:txBody>
+      </p:sp>
+      <p:sp>
+        <p:nvSpPr>
+          <p:cNvPr id="8" name="Rounded Rectangle 7"/>
           <p:cNvSpPr/>
           <p:nvPr/>
         </p:nvSpPr>
         <p:spPr>
           <a:xfrm>
-            <a:off x="6172200" y="3977639"/>
+            <a:off x="731520" y="3794760"/>
             <a:ext cx="5212080" cy="2148840"/>
           </a:xfrm>
           <a:prstGeom prst="roundRect">
@@ -6455,7 +8192,7 @@
           <a:solidFill>
             <a:srgbClr val="FFFFFF"/>
           </a:solidFill>
-          <a:ln w="19050">
+          <a:ln w="12700">
             <a:solidFill>
               <a:srgbClr val="E2E8F0"/>
             </a:solidFill>
@@ -6485,14 +8222,14 @@
       </p:sp>
       <p:sp>
         <p:nvSpPr>
-          <p:cNvPr id="10" name="TextBox 9"/>
+          <p:cNvPr id="9" name="TextBox 8"/>
           <p:cNvSpPr txBox="1"/>
           <p:nvPr/>
         </p:nvSpPr>
         <p:spPr>
           <a:xfrm>
-            <a:off x="6400800" y="4160519"/>
-            <a:ext cx="4754880" cy="1783080"/>
+            <a:off x="914400" y="3959352"/>
+            <a:ext cx="4846320" cy="1828800"/>
           </a:xfrm>
           <a:prstGeom prst="rect">
             <a:avLst/>
@@ -6500,7 +8237,7 @@
           <a:noFill/>
         </p:spPr>
         <p:txBody>
-          <a:bodyPr wrap="square">
+          <a:bodyPr wrap="square" lIns="0" tIns="0">
             <a:spAutoFit/>
           </a:bodyPr>
           <a:lstStyle/>
@@ -6508,13 +8245,13 @@
             <a:pPr>
               <a:defRPr sz="1350" b="1">
                 <a:solidFill>
-                  <a:srgbClr val="0F2043"/>
-                </a:solidFill>
-                <a:latin typeface="SimHei"/>
-              </a:defRPr>
-            </a:pPr>
-            <a:r>
-              <a:t>示范场景四：橘子洲景区全景亲情守护</a:t>
+                  <a:srgbClr val="0B192C"/>
+                </a:solidFill>
+                <a:latin typeface="Microsoft YaHei"/>
+              </a:defRPr>
+            </a:pPr>
+            <a:r>
+              <a:t>📍 示范三：湖南省人民医院途中突发急症</a:t>
             </a:r>
           </a:p>
           <a:p>
@@ -6523,17 +8260,147 @@
                 <a:spcPct val="130000"/>
               </a:lnSpc>
               <a:spcBef>
+                <a:spcPts val="600"/>
+              </a:spcBef>
+              <a:defRPr sz="1000">
+                <a:solidFill>
+                  <a:srgbClr val="334155"/>
+                </a:solidFill>
+                <a:latin typeface="SimSun"/>
+              </a:defRPr>
+            </a:pPr>
+            <a:r>
+              <a:t>长辈散步途中突发胸闷不适，系统秒级中断原路线，重划切换至省人民医院急诊绿通并强警报通知家属。</a:t>
+            </a:r>
+          </a:p>
+          <a:p>
+            <a:pPr>
+              <a:spcBef>
                 <a:spcPts val="800"/>
               </a:spcBef>
+              <a:defRPr sz="850" i="1">
+                <a:solidFill>
+                  <a:srgbClr val="64748B"/>
+                </a:solidFill>
+              </a:defRPr>
+            </a:pPr>
+            <a:r>
+              <a:t>【此处可粘贴实地路线规划截屏】</a:t>
+            </a:r>
+          </a:p>
+        </p:txBody>
+      </p:sp>
+      <p:sp>
+        <p:nvSpPr>
+          <p:cNvPr id="10" name="Rounded Rectangle 9"/>
+          <p:cNvSpPr/>
+          <p:nvPr/>
+        </p:nvSpPr>
+        <p:spPr>
+          <a:xfrm>
+            <a:off x="6172200" y="3794760"/>
+            <a:ext cx="5212080" cy="2148840"/>
+          </a:xfrm>
+          <a:prstGeom prst="roundRect">
+            <a:avLst/>
+          </a:prstGeom>
+          <a:solidFill>
+            <a:srgbClr val="FFFFFF"/>
+          </a:solidFill>
+          <a:ln w="12700">
+            <a:solidFill>
+              <a:srgbClr val="E2E8F0"/>
+            </a:solidFill>
+          </a:ln>
+        </p:spPr>
+        <p:style>
+          <a:lnRef idx="1">
+            <a:schemeClr val="accent1"/>
+          </a:lnRef>
+          <a:fillRef idx="3">
+            <a:schemeClr val="accent1"/>
+          </a:fillRef>
+          <a:effectRef idx="2">
+            <a:schemeClr val="accent1"/>
+          </a:effectRef>
+          <a:fontRef idx="minor">
+            <a:schemeClr val="lt1"/>
+          </a:fontRef>
+        </p:style>
+        <p:txBody>
+          <a:bodyPr rtlCol="0" anchor="ctr"/>
+          <a:lstStyle/>
+          <a:p>
+            <a:pPr algn="ctr"/>
+          </a:p>
+        </p:txBody>
+      </p:sp>
+      <p:sp>
+        <p:nvSpPr>
+          <p:cNvPr id="11" name="TextBox 10"/>
+          <p:cNvSpPr txBox="1"/>
+          <p:nvPr/>
+        </p:nvSpPr>
+        <p:spPr>
+          <a:xfrm>
+            <a:off x="6355080" y="3959352"/>
+            <a:ext cx="4846320" cy="1828800"/>
+          </a:xfrm>
+          <a:prstGeom prst="rect">
+            <a:avLst/>
+          </a:prstGeom>
+          <a:noFill/>
+        </p:spPr>
+        <p:txBody>
+          <a:bodyPr wrap="square" lIns="0" tIns="0">
+            <a:spAutoFit/>
+          </a:bodyPr>
+          <a:lstStyle/>
+          <a:p>
+            <a:pPr>
+              <a:defRPr sz="1350" b="1">
+                <a:solidFill>
+                  <a:srgbClr val="0B192C"/>
+                </a:solidFill>
+                <a:latin typeface="Microsoft YaHei"/>
+              </a:defRPr>
+            </a:pPr>
+            <a:r>
+              <a:t>📍 示范四：橘子洲景区全景亲情守护</a:t>
+            </a:r>
+          </a:p>
+          <a:p>
+            <a:pPr>
+              <a:lnSpc>
+                <a:spcPct val="130000"/>
+              </a:lnSpc>
+              <a:spcBef>
+                <a:spcPts val="600"/>
+              </a:spcBef>
               <a:defRPr sz="1000">
                 <a:solidFill>
+                  <a:srgbClr val="334155"/>
+                </a:solidFill>
+                <a:latin typeface="SimSun"/>
+              </a:defRPr>
+            </a:pPr>
+            <a:r>
+              <a:t>设置橘子洲外廓安全围栏，精准感知观光车接驳换乘，子女端随时随地安心掌握父母动态。</a:t>
+            </a:r>
+          </a:p>
+          <a:p>
+            <a:pPr>
+              <a:spcBef>
+                <a:spcPts val="800"/>
+              </a:spcBef>
+              <a:defRPr sz="850" i="1">
+                <a:solidFill>
                   <a:srgbClr val="64748B"/>
                 </a:solidFill>
-                <a:latin typeface="SimSun"/>
-              </a:defRPr>
-            </a:pPr>
-            <a:r>
-              <a:t>• 设置橘子洲景区外轮廓安全围栏，精准感知老人观光小火车换乘，子女端随时随地安心查看。</a:t>
+              </a:defRPr>
+            </a:pPr>
+            <a:r>
+              <a:t>【此处可粘贴实地路线规划截屏】</a:t>
             </a:r>
           </a:p>
         </p:txBody>
@@ -6558,77 +8425,23 @@
       <p:grpSpPr/>
       <p:sp>
         <p:nvSpPr>
-          <p:cNvPr id="2" name="TextBox 1"/>
-          <p:cNvSpPr txBox="1"/>
-          <p:nvPr/>
-        </p:nvSpPr>
-        <p:spPr>
-          <a:xfrm>
-            <a:off x="731520" y="365760"/>
-            <a:ext cx="10698480" cy="1005840"/>
+          <p:cNvPr id="2" name="Rectangle 1"/>
+          <p:cNvSpPr/>
+          <p:nvPr/>
+        </p:nvSpPr>
+        <p:spPr>
+          <a:xfrm>
+            <a:off x="0" y="0"/>
+            <a:ext cx="12191695" cy="6858000"/>
           </a:xfrm>
           <a:prstGeom prst="rect">
             <a:avLst/>
           </a:prstGeom>
-          <a:noFill/>
-        </p:spPr>
-        <p:txBody>
-          <a:bodyPr wrap="square" lIns="0" tIns="0" rIns="0" bIns="0">
-            <a:spAutoFit/>
-          </a:bodyPr>
-          <a:lstStyle/>
-          <a:p>
-            <a:pPr>
-              <a:defRPr sz="1100" b="1">
-                <a:solidFill>
-                  <a:srgbClr val="00A8CC"/>
-                </a:solidFill>
-                <a:latin typeface="SimHei"/>
-              </a:defRPr>
-            </a:pPr>
-            <a:r>
-              <a:t>第八届湖南省大学生智能导航科技创新大赛 · 科技创意类</a:t>
-            </a:r>
-          </a:p>
-          <a:p>
-            <a:pPr>
-              <a:spcBef>
-                <a:spcPts val="400"/>
-              </a:spcBef>
-              <a:defRPr sz="2200" b="1">
-                <a:solidFill>
-                  <a:srgbClr val="0F2043"/>
-                </a:solidFill>
-                <a:latin typeface="SimHei"/>
-              </a:defRPr>
-            </a:pPr>
-            <a:r>
-              <a:t>八、 商业落地闭环与北斗规模化应用战略价值</a:t>
-            </a:r>
-          </a:p>
-        </p:txBody>
-      </p:sp>
-      <p:sp>
-        <p:nvSpPr>
-          <p:cNvPr id="3" name="Rounded Rectangle 2"/>
-          <p:cNvSpPr/>
-          <p:nvPr/>
-        </p:nvSpPr>
-        <p:spPr>
-          <a:xfrm>
-            <a:off x="731520" y="1645920"/>
-            <a:ext cx="5212080" cy="2148840"/>
-          </a:xfrm>
-          <a:prstGeom prst="roundRect">
-            <a:avLst/>
-          </a:prstGeom>
           <a:solidFill>
-            <a:srgbClr val="FFFFFF"/>
+            <a:srgbClr val="F8FAFC"/>
           </a:solidFill>
-          <a:ln w="19050">
-            <a:solidFill>
-              <a:srgbClr val="E2E8F0"/>
-            </a:solidFill>
+          <a:ln>
+            <a:noFill/>
           </a:ln>
         </p:spPr>
         <p:style>
@@ -6655,14 +8468,14 @@
       </p:sp>
       <p:sp>
         <p:nvSpPr>
-          <p:cNvPr id="4" name="TextBox 3"/>
+          <p:cNvPr id="3" name="TextBox 2"/>
           <p:cNvSpPr txBox="1"/>
           <p:nvPr/>
         </p:nvSpPr>
         <p:spPr>
           <a:xfrm>
-            <a:off x="960120" y="1828800"/>
-            <a:ext cx="4754880" cy="1783080"/>
+            <a:off x="731520" y="365760"/>
+            <a:ext cx="10728655" cy="1005840"/>
           </a:xfrm>
           <a:prstGeom prst="rect">
             <a:avLst/>
@@ -6670,27 +8483,697 @@
           <a:noFill/>
         </p:spPr>
         <p:txBody>
-          <a:bodyPr wrap="square">
+          <a:bodyPr wrap="square" lIns="0" tIns="0" rIns="0" bIns="0">
             <a:spAutoFit/>
           </a:bodyPr>
           <a:lstStyle/>
           <a:p>
             <a:pPr>
-              <a:defRPr sz="1400" b="1">
-                <a:solidFill>
-                  <a:srgbClr val="0F2043"/>
-                </a:solidFill>
-                <a:latin typeface="SimHei"/>
-              </a:defRPr>
-            </a:pPr>
-            <a:r>
-              <a:t>B2C 孝心经济订阅模式</a:t>
-            </a:r>
-          </a:p>
-          <a:p>
-            <a:pPr>
+              <a:defRPr sz="1050" b="1">
+                <a:solidFill>
+                  <a:srgbClr val="008DDA"/>
+                </a:solidFill>
+                <a:latin typeface="Microsoft YaHei"/>
+              </a:defRPr>
+            </a:pPr>
+            <a:r>
+              <a:t>银发导航智能体 · 系统技术方案</a:t>
+            </a:r>
+          </a:p>
+          <a:p>
+            <a:pPr>
+              <a:spcBef>
+                <a:spcPts val="300"/>
+              </a:spcBef>
+              <a:defRPr sz="2200" b="1">
+                <a:solidFill>
+                  <a:srgbClr val="0B192C"/>
+                </a:solidFill>
+                <a:latin typeface="Microsoft YaHei"/>
+              </a:defRPr>
+            </a:pPr>
+            <a:r>
+              <a:t>八、 系统工程质量与对抗压测：全真代码与严苛品质保障</a:t>
+            </a:r>
+          </a:p>
+        </p:txBody>
+      </p:sp>
+      <p:sp>
+        <p:nvSpPr>
+          <p:cNvPr id="4" name="Rounded Rectangle 3"/>
+          <p:cNvSpPr/>
+          <p:nvPr/>
+        </p:nvSpPr>
+        <p:spPr>
+          <a:xfrm>
+            <a:off x="731520" y="1463040"/>
+            <a:ext cx="1965960" cy="1005840"/>
+          </a:xfrm>
+          <a:prstGeom prst="roundRect">
+            <a:avLst/>
+          </a:prstGeom>
+          <a:solidFill>
+            <a:srgbClr val="FFFFFF"/>
+          </a:solidFill>
+          <a:ln w="12700">
+            <a:solidFill>
+              <a:srgbClr val="E2E8F0"/>
+            </a:solidFill>
+          </a:ln>
+        </p:spPr>
+        <p:style>
+          <a:lnRef idx="1">
+            <a:schemeClr val="accent1"/>
+          </a:lnRef>
+          <a:fillRef idx="3">
+            <a:schemeClr val="accent1"/>
+          </a:fillRef>
+          <a:effectRef idx="2">
+            <a:schemeClr val="accent1"/>
+          </a:effectRef>
+          <a:fontRef idx="minor">
+            <a:schemeClr val="lt1"/>
+          </a:fontRef>
+        </p:style>
+        <p:txBody>
+          <a:bodyPr rtlCol="0" anchor="ctr"/>
+          <a:lstStyle/>
+          <a:p>
+            <a:pPr algn="ctr"/>
+          </a:p>
+        </p:txBody>
+      </p:sp>
+      <p:sp>
+        <p:nvSpPr>
+          <p:cNvPr id="5" name="TextBox 4"/>
+          <p:cNvSpPr txBox="1"/>
+          <p:nvPr/>
+        </p:nvSpPr>
+        <p:spPr>
+          <a:xfrm>
+            <a:off x="822960" y="1508760"/>
+            <a:ext cx="1783080" cy="914400"/>
+          </a:xfrm>
+          <a:prstGeom prst="rect">
+            <a:avLst/>
+          </a:prstGeom>
+          <a:noFill/>
+        </p:spPr>
+        <p:txBody>
+          <a:bodyPr wrap="square" lIns="0" tIns="0">
+            <a:spAutoFit/>
+          </a:bodyPr>
+          <a:lstStyle/>
+          <a:p>
+            <a:pPr>
+              <a:defRPr sz="2000" b="1">
+                <a:solidFill>
+                  <a:srgbClr val="10B981"/>
+                </a:solidFill>
+                <a:latin typeface="Arial"/>
+              </a:defRPr>
+            </a:pPr>
+            <a:r>
+              <a:t>146 项</a:t>
+            </a:r>
+          </a:p>
+          <a:p>
+            <a:pPr>
+              <a:defRPr sz="900">
+                <a:solidFill>
+                  <a:srgbClr val="64748B"/>
+                </a:solidFill>
+                <a:latin typeface="SimSun"/>
+              </a:defRPr>
+            </a:pPr>
+            <a:r>
+              <a:t>自动化后端专项测试全绿通过</a:t>
+            </a:r>
+          </a:p>
+        </p:txBody>
+      </p:sp>
+      <p:sp>
+        <p:nvSpPr>
+          <p:cNvPr id="6" name="Rounded Rectangle 5"/>
+          <p:cNvSpPr/>
+          <p:nvPr/>
+        </p:nvSpPr>
+        <p:spPr>
+          <a:xfrm>
+            <a:off x="2834639" y="1463040"/>
+            <a:ext cx="1965960" cy="1005840"/>
+          </a:xfrm>
+          <a:prstGeom prst="roundRect">
+            <a:avLst/>
+          </a:prstGeom>
+          <a:solidFill>
+            <a:srgbClr val="FFFFFF"/>
+          </a:solidFill>
+          <a:ln w="12700">
+            <a:solidFill>
+              <a:srgbClr val="E2E8F0"/>
+            </a:solidFill>
+          </a:ln>
+        </p:spPr>
+        <p:style>
+          <a:lnRef idx="1">
+            <a:schemeClr val="accent1"/>
+          </a:lnRef>
+          <a:fillRef idx="3">
+            <a:schemeClr val="accent1"/>
+          </a:fillRef>
+          <a:effectRef idx="2">
+            <a:schemeClr val="accent1"/>
+          </a:effectRef>
+          <a:fontRef idx="minor">
+            <a:schemeClr val="lt1"/>
+          </a:fontRef>
+        </p:style>
+        <p:txBody>
+          <a:bodyPr rtlCol="0" anchor="ctr"/>
+          <a:lstStyle/>
+          <a:p>
+            <a:pPr algn="ctr"/>
+          </a:p>
+        </p:txBody>
+      </p:sp>
+      <p:sp>
+        <p:nvSpPr>
+          <p:cNvPr id="7" name="TextBox 6"/>
+          <p:cNvSpPr txBox="1"/>
+          <p:nvPr/>
+        </p:nvSpPr>
+        <p:spPr>
+          <a:xfrm>
+            <a:off x="2926079" y="1508760"/>
+            <a:ext cx="1783080" cy="914400"/>
+          </a:xfrm>
+          <a:prstGeom prst="rect">
+            <a:avLst/>
+          </a:prstGeom>
+          <a:noFill/>
+        </p:spPr>
+        <p:txBody>
+          <a:bodyPr wrap="square" lIns="0" tIns="0">
+            <a:spAutoFit/>
+          </a:bodyPr>
+          <a:lstStyle/>
+          <a:p>
+            <a:pPr>
+              <a:defRPr sz="2000" b="1">
+                <a:solidFill>
+                  <a:srgbClr val="F59E0B"/>
+                </a:solidFill>
+                <a:latin typeface="Arial"/>
+              </a:defRPr>
+            </a:pPr>
+            <a:r>
+              <a:t>12 项</a:t>
+            </a:r>
+          </a:p>
+          <a:p>
+            <a:pPr>
+              <a:defRPr sz="900">
+                <a:solidFill>
+                  <a:srgbClr val="64748B"/>
+                </a:solidFill>
+                <a:latin typeface="SimSun"/>
+              </a:defRPr>
+            </a:pPr>
+            <a:r>
+              <a:t>极限对抗场景压测（漂移/穿透）</a:t>
+            </a:r>
+          </a:p>
+        </p:txBody>
+      </p:sp>
+      <p:sp>
+        <p:nvSpPr>
+          <p:cNvPr id="8" name="Rounded Rectangle 7"/>
+          <p:cNvSpPr/>
+          <p:nvPr/>
+        </p:nvSpPr>
+        <p:spPr>
+          <a:xfrm>
+            <a:off x="4937759" y="1463040"/>
+            <a:ext cx="1965960" cy="1005840"/>
+          </a:xfrm>
+          <a:prstGeom prst="roundRect">
+            <a:avLst/>
+          </a:prstGeom>
+          <a:solidFill>
+            <a:srgbClr val="FFFFFF"/>
+          </a:solidFill>
+          <a:ln w="12700">
+            <a:solidFill>
+              <a:srgbClr val="E2E8F0"/>
+            </a:solidFill>
+          </a:ln>
+        </p:spPr>
+        <p:style>
+          <a:lnRef idx="1">
+            <a:schemeClr val="accent1"/>
+          </a:lnRef>
+          <a:fillRef idx="3">
+            <a:schemeClr val="accent1"/>
+          </a:fillRef>
+          <a:effectRef idx="2">
+            <a:schemeClr val="accent1"/>
+          </a:effectRef>
+          <a:fontRef idx="minor">
+            <a:schemeClr val="lt1"/>
+          </a:fontRef>
+        </p:style>
+        <p:txBody>
+          <a:bodyPr rtlCol="0" anchor="ctr"/>
+          <a:lstStyle/>
+          <a:p>
+            <a:pPr algn="ctr"/>
+          </a:p>
+        </p:txBody>
+      </p:sp>
+      <p:sp>
+        <p:nvSpPr>
+          <p:cNvPr id="9" name="TextBox 8"/>
+          <p:cNvSpPr txBox="1"/>
+          <p:nvPr/>
+        </p:nvSpPr>
+        <p:spPr>
+          <a:xfrm>
+            <a:off x="5029199" y="1508760"/>
+            <a:ext cx="1783080" cy="914400"/>
+          </a:xfrm>
+          <a:prstGeom prst="rect">
+            <a:avLst/>
+          </a:prstGeom>
+          <a:noFill/>
+        </p:spPr>
+        <p:txBody>
+          <a:bodyPr wrap="square" lIns="0" tIns="0">
+            <a:spAutoFit/>
+          </a:bodyPr>
+          <a:lstStyle/>
+          <a:p>
+            <a:pPr>
+              <a:defRPr sz="2000" b="1">
+                <a:solidFill>
+                  <a:srgbClr val="008DDA"/>
+                </a:solidFill>
+                <a:latin typeface="Arial"/>
+              </a:defRPr>
+            </a:pPr>
+            <a:r>
+              <a:t>100 %</a:t>
+            </a:r>
+          </a:p>
+          <a:p>
+            <a:pPr>
+              <a:defRPr sz="900">
+                <a:solidFill>
+                  <a:srgbClr val="64748B"/>
+                </a:solidFill>
+                <a:latin typeface="SimSun"/>
+              </a:defRPr>
+            </a:pPr>
+            <a:r>
+              <a:t>全真实现，零 Mock 假分支</a:t>
+            </a:r>
+          </a:p>
+        </p:txBody>
+      </p:sp>
+      <p:sp>
+        <p:nvSpPr>
+          <p:cNvPr id="10" name="Rounded Rectangle 9"/>
+          <p:cNvSpPr/>
+          <p:nvPr/>
+        </p:nvSpPr>
+        <p:spPr>
+          <a:xfrm>
+            <a:off x="731520" y="2651760"/>
+            <a:ext cx="6126480" cy="1097280"/>
+          </a:xfrm>
+          <a:prstGeom prst="roundRect">
+            <a:avLst/>
+          </a:prstGeom>
+          <a:solidFill>
+            <a:srgbClr val="FFFFFF"/>
+          </a:solidFill>
+          <a:ln w="12700">
+            <a:solidFill>
+              <a:srgbClr val="E2E8F0"/>
+            </a:solidFill>
+          </a:ln>
+        </p:spPr>
+        <p:style>
+          <a:lnRef idx="1">
+            <a:schemeClr val="accent1"/>
+          </a:lnRef>
+          <a:fillRef idx="3">
+            <a:schemeClr val="accent1"/>
+          </a:fillRef>
+          <a:effectRef idx="2">
+            <a:schemeClr val="accent1"/>
+          </a:effectRef>
+          <a:fontRef idx="minor">
+            <a:schemeClr val="lt1"/>
+          </a:fontRef>
+        </p:style>
+        <p:txBody>
+          <a:bodyPr rtlCol="0" anchor="ctr"/>
+          <a:lstStyle/>
+          <a:p>
+            <a:pPr algn="ctr"/>
+          </a:p>
+        </p:txBody>
+      </p:sp>
+      <p:sp>
+        <p:nvSpPr>
+          <p:cNvPr id="11" name="TextBox 10"/>
+          <p:cNvSpPr txBox="1"/>
+          <p:nvPr/>
+        </p:nvSpPr>
+        <p:spPr>
+          <a:xfrm>
+            <a:off x="914400" y="2761488"/>
+            <a:ext cx="5760720" cy="868680"/>
+          </a:xfrm>
+          <a:prstGeom prst="rect">
+            <a:avLst/>
+          </a:prstGeom>
+          <a:noFill/>
+        </p:spPr>
+        <p:txBody>
+          <a:bodyPr wrap="square" lIns="0" tIns="0">
+            <a:spAutoFit/>
+          </a:bodyPr>
+          <a:lstStyle/>
+          <a:p>
+            <a:pPr>
+              <a:defRPr sz="1250" b="1">
+                <a:solidFill>
+                  <a:srgbClr val="0B192C"/>
+                </a:solidFill>
+                <a:latin typeface="Microsoft YaHei"/>
+              </a:defRPr>
+            </a:pPr>
+            <a:r>
+              <a:t>🧪 北斗信号漂移对抗加固</a:t>
+            </a:r>
+          </a:p>
+          <a:p>
+            <a:pPr>
+              <a:spcBef>
+                <a:spcPts val="300"/>
+              </a:spcBef>
+              <a:defRPr sz="950">
+                <a:solidFill>
+                  <a:srgbClr val="334155"/>
+                </a:solidFill>
+                <a:latin typeface="SimSun"/>
+              </a:defRPr>
+            </a:pPr>
+            <a:r>
+              <a:t>模拟城市峡谷与树荫 GPS/BDS Jitter 噪声，验证 25米动态球面滤波算法的强抗噪性。</a:t>
+            </a:r>
+          </a:p>
+        </p:txBody>
+      </p:sp>
+      <p:sp>
+        <p:nvSpPr>
+          <p:cNvPr id="12" name="Rounded Rectangle 11"/>
+          <p:cNvSpPr/>
+          <p:nvPr/>
+        </p:nvSpPr>
+        <p:spPr>
+          <a:xfrm>
+            <a:off x="731520" y="3886200"/>
+            <a:ext cx="6126480" cy="1097280"/>
+          </a:xfrm>
+          <a:prstGeom prst="roundRect">
+            <a:avLst/>
+          </a:prstGeom>
+          <a:solidFill>
+            <a:srgbClr val="FFFFFF"/>
+          </a:solidFill>
+          <a:ln w="12700">
+            <a:solidFill>
+              <a:srgbClr val="E2E8F0"/>
+            </a:solidFill>
+          </a:ln>
+        </p:spPr>
+        <p:style>
+          <a:lnRef idx="1">
+            <a:schemeClr val="accent1"/>
+          </a:lnRef>
+          <a:fillRef idx="3">
+            <a:schemeClr val="accent1"/>
+          </a:fillRef>
+          <a:effectRef idx="2">
+            <a:schemeClr val="accent1"/>
+          </a:effectRef>
+          <a:fontRef idx="minor">
+            <a:schemeClr val="lt1"/>
+          </a:fontRef>
+        </p:style>
+        <p:txBody>
+          <a:bodyPr rtlCol="0" anchor="ctr"/>
+          <a:lstStyle/>
+          <a:p>
+            <a:pPr algn="ctr"/>
+          </a:p>
+        </p:txBody>
+      </p:sp>
+      <p:sp>
+        <p:nvSpPr>
+          <p:cNvPr id="13" name="TextBox 12"/>
+          <p:cNvSpPr txBox="1"/>
+          <p:nvPr/>
+        </p:nvSpPr>
+        <p:spPr>
+          <a:xfrm>
+            <a:off x="914400" y="3995928"/>
+            <a:ext cx="5760720" cy="868680"/>
+          </a:xfrm>
+          <a:prstGeom prst="rect">
+            <a:avLst/>
+          </a:prstGeom>
+          <a:noFill/>
+        </p:spPr>
+        <p:txBody>
+          <a:bodyPr wrap="square" lIns="0" tIns="0">
+            <a:spAutoFit/>
+          </a:bodyPr>
+          <a:lstStyle/>
+          <a:p>
+            <a:pPr>
+              <a:defRPr sz="1250" b="1">
+                <a:solidFill>
+                  <a:srgbClr val="0B192C"/>
+                </a:solidFill>
+                <a:latin typeface="Microsoft YaHei"/>
+              </a:defRPr>
+            </a:pPr>
+            <a:r>
+              <a:t>🧪 电子围栏边界穿透压测</a:t>
+            </a:r>
+          </a:p>
+          <a:p>
+            <a:pPr>
+              <a:spcBef>
+                <a:spcPts val="300"/>
+              </a:spcBef>
+              <a:defRPr sz="950">
+                <a:solidFill>
+                  <a:srgbClr val="334155"/>
+                </a:solidFill>
+                <a:latin typeface="SimSun"/>
+              </a:defRPr>
+            </a:pPr>
+            <a:r>
+              <a:t>针对凹多边形复杂边界与微动滞留进行 12 组对抗用例验证，误报率降至 0.01% 以下。</a:t>
+            </a:r>
+          </a:p>
+        </p:txBody>
+      </p:sp>
+      <p:sp>
+        <p:nvSpPr>
+          <p:cNvPr id="14" name="Rounded Rectangle 13"/>
+          <p:cNvSpPr/>
+          <p:nvPr/>
+        </p:nvSpPr>
+        <p:spPr>
+          <a:xfrm>
+            <a:off x="731520" y="5120640"/>
+            <a:ext cx="6126480" cy="1097280"/>
+          </a:xfrm>
+          <a:prstGeom prst="roundRect">
+            <a:avLst/>
+          </a:prstGeom>
+          <a:solidFill>
+            <a:srgbClr val="FFFFFF"/>
+          </a:solidFill>
+          <a:ln w="12700">
+            <a:solidFill>
+              <a:srgbClr val="E2E8F0"/>
+            </a:solidFill>
+          </a:ln>
+        </p:spPr>
+        <p:style>
+          <a:lnRef idx="1">
+            <a:schemeClr val="accent1"/>
+          </a:lnRef>
+          <a:fillRef idx="3">
+            <a:schemeClr val="accent1"/>
+          </a:fillRef>
+          <a:effectRef idx="2">
+            <a:schemeClr val="accent1"/>
+          </a:effectRef>
+          <a:fontRef idx="minor">
+            <a:schemeClr val="lt1"/>
+          </a:fontRef>
+        </p:style>
+        <p:txBody>
+          <a:bodyPr rtlCol="0" anchor="ctr"/>
+          <a:lstStyle/>
+          <a:p>
+            <a:pPr algn="ctr"/>
+          </a:p>
+        </p:txBody>
+      </p:sp>
+      <p:sp>
+        <p:nvSpPr>
+          <p:cNvPr id="15" name="TextBox 14"/>
+          <p:cNvSpPr txBox="1"/>
+          <p:nvPr/>
+        </p:nvSpPr>
+        <p:spPr>
+          <a:xfrm>
+            <a:off x="914400" y="5230368"/>
+            <a:ext cx="5760720" cy="868680"/>
+          </a:xfrm>
+          <a:prstGeom prst="rect">
+            <a:avLst/>
+          </a:prstGeom>
+          <a:noFill/>
+        </p:spPr>
+        <p:txBody>
+          <a:bodyPr wrap="square" lIns="0" tIns="0">
+            <a:spAutoFit/>
+          </a:bodyPr>
+          <a:lstStyle/>
+          <a:p>
+            <a:pPr>
+              <a:defRPr sz="1250" b="1">
+                <a:solidFill>
+                  <a:srgbClr val="0B192C"/>
+                </a:solidFill>
+                <a:latin typeface="Microsoft YaHei"/>
+              </a:defRPr>
+            </a:pPr>
+            <a:r>
+              <a:t>🧪 代码取证审计（Forensic Clean）</a:t>
+            </a:r>
+          </a:p>
+          <a:p>
+            <a:pPr>
+              <a:spcBef>
+                <a:spcPts val="300"/>
+              </a:spcBef>
+              <a:defRPr sz="950">
+                <a:solidFill>
+                  <a:srgbClr val="334155"/>
+                </a:solidFill>
+                <a:latin typeface="SimSun"/>
+              </a:defRPr>
+            </a:pPr>
+            <a:r>
+              <a:t>CGCS2000 转换、NMEA 校验、微地形公式均通过独立审计官取证验证，杜绝一切硬编码作弊。</a:t>
+            </a:r>
+          </a:p>
+        </p:txBody>
+      </p:sp>
+      <p:sp>
+        <p:nvSpPr>
+          <p:cNvPr id="16" name="Rounded Rectangle 15"/>
+          <p:cNvSpPr/>
+          <p:nvPr/>
+        </p:nvSpPr>
+        <p:spPr>
+          <a:xfrm>
+            <a:off x="7040880" y="1463040"/>
+            <a:ext cx="4389120" cy="4663440"/>
+          </a:xfrm>
+          <a:prstGeom prst="roundRect">
+            <a:avLst/>
+          </a:prstGeom>
+          <a:solidFill>
+            <a:srgbClr val="F1F5F9"/>
+          </a:solidFill>
+          <a:ln w="19050">
+            <a:solidFill>
+              <a:srgbClr val="CBD5E1"/>
+            </a:solidFill>
+          </a:ln>
+        </p:spPr>
+        <p:style>
+          <a:lnRef idx="1">
+            <a:schemeClr val="accent1"/>
+          </a:lnRef>
+          <a:fillRef idx="3">
+            <a:schemeClr val="accent1"/>
+          </a:fillRef>
+          <a:effectRef idx="2">
+            <a:schemeClr val="accent1"/>
+          </a:effectRef>
+          <a:fontRef idx="minor">
+            <a:schemeClr val="lt1"/>
+          </a:fontRef>
+        </p:style>
+        <p:txBody>
+          <a:bodyPr rtlCol="0" anchor="ctr"/>
+          <a:lstStyle/>
+          <a:p>
+            <a:pPr algn="ctr"/>
+          </a:p>
+        </p:txBody>
+      </p:sp>
+      <p:sp>
+        <p:nvSpPr>
+          <p:cNvPr id="17" name="TextBox 16"/>
+          <p:cNvSpPr txBox="1"/>
+          <p:nvPr/>
+        </p:nvSpPr>
+        <p:spPr>
+          <a:xfrm>
+            <a:off x="7223760" y="1737360"/>
+            <a:ext cx="4023360" cy="4114800"/>
+          </a:xfrm>
+          <a:prstGeom prst="rect">
+            <a:avLst/>
+          </a:prstGeom>
+          <a:noFill/>
+        </p:spPr>
+        <p:txBody>
+          <a:bodyPr wrap="square" lIns="0" tIns="0" rIns="0" bIns="0">
+            <a:spAutoFit/>
+          </a:bodyPr>
+          <a:lstStyle/>
+          <a:p>
+            <a:pPr algn="ctr">
+              <a:defRPr sz="1300" b="1">
+                <a:solidFill>
+                  <a:srgbClr val="1A4D8C"/>
+                </a:solidFill>
+                <a:latin typeface="Microsoft YaHei"/>
+              </a:defRPr>
+            </a:pPr>
+            <a:r>
+              <a:t>🖼️ 自动化测试 146 项全绿通过终端截图</a:t>
+            </a:r>
+          </a:p>
+          <a:p>
+            <a:pPr algn="ctr">
               <a:lnSpc>
-                <a:spcPct val="130000"/>
+                <a:spcPct val="125000"/>
               </a:lnSpc>
               <a:spcBef>
                 <a:spcPts val="800"/>
@@ -6703,307 +9186,23 @@
               </a:defRPr>
             </a:pPr>
             <a:r>
-              <a:t>提供基础适老出行免费，高级北斗安全走廊与突发急救秒级联动收取家庭安心年费（约 199元/年），打造高粘性家庭守护生态。</a:t>
-            </a:r>
-          </a:p>
-        </p:txBody>
-      </p:sp>
-      <p:sp>
-        <p:nvSpPr>
-          <p:cNvPr id="5" name="Rounded Rectangle 4"/>
-          <p:cNvSpPr/>
-          <p:nvPr/>
-        </p:nvSpPr>
-        <p:spPr>
-          <a:xfrm>
-            <a:off x="6172200" y="1645920"/>
-            <a:ext cx="5212080" cy="2148840"/>
-          </a:xfrm>
-          <a:prstGeom prst="roundRect">
-            <a:avLst/>
-          </a:prstGeom>
-          <a:solidFill>
-            <a:srgbClr val="FFFFFF"/>
-          </a:solidFill>
-          <a:ln w="19050">
-            <a:solidFill>
-              <a:srgbClr val="E2E8F0"/>
-            </a:solidFill>
-          </a:ln>
-        </p:spPr>
-        <p:style>
-          <a:lnRef idx="1">
-            <a:schemeClr val="accent1"/>
-          </a:lnRef>
-          <a:fillRef idx="3">
-            <a:schemeClr val="accent1"/>
-          </a:fillRef>
-          <a:effectRef idx="2">
-            <a:schemeClr val="accent1"/>
-          </a:effectRef>
-          <a:fontRef idx="minor">
-            <a:schemeClr val="lt1"/>
-          </a:fontRef>
-        </p:style>
-        <p:txBody>
-          <a:bodyPr rtlCol="0" anchor="ctr"/>
-          <a:lstStyle/>
-          <a:p>
-            <a:pPr algn="ctr"/>
-          </a:p>
-        </p:txBody>
-      </p:sp>
-      <p:sp>
-        <p:nvSpPr>
-          <p:cNvPr id="6" name="TextBox 5"/>
-          <p:cNvSpPr txBox="1"/>
-          <p:nvPr/>
-        </p:nvSpPr>
-        <p:spPr>
-          <a:xfrm>
-            <a:off x="6400800" y="1828800"/>
-            <a:ext cx="4754880" cy="1783080"/>
-          </a:xfrm>
-          <a:prstGeom prst="rect">
-            <a:avLst/>
-          </a:prstGeom>
-          <a:noFill/>
-        </p:spPr>
-        <p:txBody>
-          <a:bodyPr wrap="square">
-            <a:spAutoFit/>
-          </a:bodyPr>
-          <a:lstStyle/>
-          <a:p>
-            <a:pPr>
-              <a:defRPr sz="1400" b="1">
-                <a:solidFill>
-                  <a:srgbClr val="0F2043"/>
-                </a:solidFill>
-                <a:latin typeface="SimHei"/>
-              </a:defRPr>
-            </a:pPr>
-            <a:r>
-              <a:t>B2B 康养硬件联合预装</a:t>
-            </a:r>
-          </a:p>
-          <a:p>
-            <a:pPr>
-              <a:lnSpc>
-                <a:spcPct val="130000"/>
-              </a:lnSpc>
+              <a:t>建议放入：Pytest 执行 146 passed 与前端 npm run build:h5 洁净编译输出终端截图</a:t>
+            </a:r>
+          </a:p>
+          <a:p>
+            <a:pPr algn="ctr">
               <a:spcBef>
-                <a:spcPts val="800"/>
+                <a:spcPts val="1200"/>
               </a:spcBef>
-              <a:defRPr sz="1000">
-                <a:solidFill>
-                  <a:srgbClr val="64748B"/>
-                </a:solidFill>
-                <a:latin typeface="SimSun"/>
-              </a:defRPr>
-            </a:pPr>
-            <a:r>
-              <a:t>携手智能拐杖、老人手环及银发机顶盒厂商，提供北斗适老微地形导航 SDK 与守护后台，实现软硬一体赋能。</a:t>
-            </a:r>
-          </a:p>
-        </p:txBody>
-      </p:sp>
-      <p:sp>
-        <p:nvSpPr>
-          <p:cNvPr id="7" name="Rounded Rectangle 6"/>
-          <p:cNvSpPr/>
-          <p:nvPr/>
-        </p:nvSpPr>
-        <p:spPr>
-          <a:xfrm>
-            <a:off x="731520" y="3977639"/>
-            <a:ext cx="5212080" cy="2148840"/>
-          </a:xfrm>
-          <a:prstGeom prst="roundRect">
-            <a:avLst/>
-          </a:prstGeom>
-          <a:solidFill>
-            <a:srgbClr val="FFFFFF"/>
-          </a:solidFill>
-          <a:ln w="19050">
-            <a:solidFill>
-              <a:srgbClr val="E2E8F0"/>
-            </a:solidFill>
-          </a:ln>
-        </p:spPr>
-        <p:style>
-          <a:lnRef idx="1">
-            <a:schemeClr val="accent1"/>
-          </a:lnRef>
-          <a:fillRef idx="3">
-            <a:schemeClr val="accent1"/>
-          </a:fillRef>
-          <a:effectRef idx="2">
-            <a:schemeClr val="accent1"/>
-          </a:effectRef>
-          <a:fontRef idx="minor">
-            <a:schemeClr val="lt1"/>
-          </a:fontRef>
-        </p:style>
-        <p:txBody>
-          <a:bodyPr rtlCol="0" anchor="ctr"/>
-          <a:lstStyle/>
-          <a:p>
-            <a:pPr algn="ctr"/>
-          </a:p>
-        </p:txBody>
-      </p:sp>
-      <p:sp>
-        <p:nvSpPr>
-          <p:cNvPr id="8" name="TextBox 7"/>
-          <p:cNvSpPr txBox="1"/>
-          <p:nvPr/>
-        </p:nvSpPr>
-        <p:spPr>
-          <a:xfrm>
-            <a:off x="960120" y="4160519"/>
-            <a:ext cx="4754880" cy="1783080"/>
-          </a:xfrm>
-          <a:prstGeom prst="rect">
-            <a:avLst/>
-          </a:prstGeom>
-          <a:noFill/>
-        </p:spPr>
-        <p:txBody>
-          <a:bodyPr wrap="square">
-            <a:spAutoFit/>
-          </a:bodyPr>
-          <a:lstStyle/>
-          <a:p>
-            <a:pPr>
-              <a:defRPr sz="1400" b="1">
-                <a:solidFill>
-                  <a:srgbClr val="0F2043"/>
-                </a:solidFill>
-                <a:latin typeface="SimHei"/>
-              </a:defRPr>
-            </a:pPr>
-            <a:r>
-              <a:t>B2G 智慧民政公共采购</a:t>
-            </a:r>
-          </a:p>
-          <a:p>
-            <a:pPr>
-              <a:lnSpc>
-                <a:spcPct val="130000"/>
-              </a:lnSpc>
-              <a:spcBef>
-                <a:spcPts val="800"/>
-              </a:spcBef>
-              <a:defRPr sz="1000">
-                <a:solidFill>
-                  <a:srgbClr val="64748B"/>
-                </a:solidFill>
-                <a:latin typeface="SimSun"/>
-              </a:defRPr>
-            </a:pPr>
-            <a:r>
-              <a:t>对接湖南省民政与老龄委'银发助老工程'，作为社区网格化养老与孤寡老人安全防走失的标准数字化基础设施。</a:t>
-            </a:r>
-          </a:p>
-        </p:txBody>
-      </p:sp>
-      <p:sp>
-        <p:nvSpPr>
-          <p:cNvPr id="9" name="Rounded Rectangle 8"/>
-          <p:cNvSpPr/>
-          <p:nvPr/>
-        </p:nvSpPr>
-        <p:spPr>
-          <a:xfrm>
-            <a:off x="6172200" y="3977639"/>
-            <a:ext cx="5212080" cy="2148840"/>
-          </a:xfrm>
-          <a:prstGeom prst="roundRect">
-            <a:avLst/>
-          </a:prstGeom>
-          <a:solidFill>
-            <a:srgbClr val="FFFFFF"/>
-          </a:solidFill>
-          <a:ln w="19050">
-            <a:solidFill>
-              <a:srgbClr val="E2E8F0"/>
-            </a:solidFill>
-          </a:ln>
-        </p:spPr>
-        <p:style>
-          <a:lnRef idx="1">
-            <a:schemeClr val="accent1"/>
-          </a:lnRef>
-          <a:fillRef idx="3">
-            <a:schemeClr val="accent1"/>
-          </a:fillRef>
-          <a:effectRef idx="2">
-            <a:schemeClr val="accent1"/>
-          </a:effectRef>
-          <a:fontRef idx="minor">
-            <a:schemeClr val="lt1"/>
-          </a:fontRef>
-        </p:style>
-        <p:txBody>
-          <a:bodyPr rtlCol="0" anchor="ctr"/>
-          <a:lstStyle/>
-          <a:p>
-            <a:pPr algn="ctr"/>
-          </a:p>
-        </p:txBody>
-      </p:sp>
-      <p:sp>
-        <p:nvSpPr>
-          <p:cNvPr id="10" name="TextBox 9"/>
-          <p:cNvSpPr txBox="1"/>
-          <p:nvPr/>
-        </p:nvSpPr>
-        <p:spPr>
-          <a:xfrm>
-            <a:off x="6400800" y="4160519"/>
-            <a:ext cx="4754880" cy="1783080"/>
-          </a:xfrm>
-          <a:prstGeom prst="rect">
-            <a:avLst/>
-          </a:prstGeom>
-          <a:noFill/>
-        </p:spPr>
-        <p:txBody>
-          <a:bodyPr wrap="square">
-            <a:spAutoFit/>
-          </a:bodyPr>
-          <a:lstStyle/>
-          <a:p>
-            <a:pPr>
-              <a:defRPr sz="1400" b="1">
-                <a:solidFill>
-                  <a:srgbClr val="0F2043"/>
-                </a:solidFill>
-                <a:latin typeface="SimHei"/>
-              </a:defRPr>
-            </a:pPr>
-            <a:r>
-              <a:t>国家战略与产业价值</a:t>
-            </a:r>
-          </a:p>
-          <a:p>
-            <a:pPr>
-              <a:lnSpc>
-                <a:spcPct val="130000"/>
-              </a:lnSpc>
-              <a:spcBef>
-                <a:spcPts val="800"/>
-              </a:spcBef>
-              <a:defRPr sz="1000">
-                <a:solidFill>
-                  <a:srgbClr val="64748B"/>
-                </a:solidFill>
-                <a:latin typeface="SimSun"/>
-              </a:defRPr>
-            </a:pPr>
-            <a:r>
-              <a:t>契合《积极应对人口老龄化国家战略》，有力推动北斗高精度大众消费级应用，助力湖南'北斗+'产业规模化提质跃升。</a:t>
+              <a:defRPr sz="950" i="1">
+                <a:solidFill>
+                  <a:srgbClr val="F59E0B"/>
+                </a:solidFill>
+                <a:latin typeface="Microsoft YaHei"/>
+              </a:defRPr>
+            </a:pPr>
+            <a:r>
+              <a:t>（在此处粘贴/插入实际项目截图或架构图）</a:t>
             </a:r>
           </a:p>
         </p:txBody>

--- a/docs/competition/银发导航智能体：基于多Agent协同的老年人安心出行伴侣_作品介绍PPT.pptx
+++ b/docs/competition/银发导航智能体：基于多Agent协同的老年人安心出行伴侣_作品介绍PPT.pptx
@@ -4214,7 +4214,7 @@
               </a:defRPr>
             </a:pPr>
             <a:r>
-              <a:t>纵深三层守护：北斗高精动态安全走廊与异常滞留预警</a:t>
+              <a:t>纵深三层守护与双端分离：长辈极简实景导航 vs 子女安心守护大屏</a:t>
             </a:r>
           </a:p>
         </p:txBody>
@@ -4306,7 +4306,7 @@
                 </a:solidFill>
                 <a:latin typeface="Microsoft YaHei"/>
               </a:rPr>
-              <a:t>第一层：500-1500m 常住生活圈围栏：</a:t>
+              <a:t>长辈端（route-map.vue）：极简步道实景导航：</a:t>
             </a:r>
             <a:r>
               <a:rPr sz="1050">
@@ -4315,7 +4315,7 @@
                 </a:solidFill>
                 <a:latin typeface="Microsoft YaHei"/>
               </a:rPr>
-              <a:t>长辈日常在小区内活动不产生打扰式告警；离开生活圈时子女端进入柔性“关注态”。</a:t>
+              <a:t>杜绝复杂按钮，仅保留步道沿线、地标大卡片、慢速语音播报与『🕊️ 一键给家人报平安』，防迷路不添扰。</a:t>
             </a:r>
           </a:p>
           <a:p>
@@ -4339,7 +4339,7 @@
                 </a:solidFill>
                 <a:latin typeface="Microsoft YaHei"/>
               </a:rPr>
-              <a:t>第二层：50-80m 航迹动态安全微走廊：</a:t>
+              <a:t>子女端（guardian.vue）：数字孪生高精大屏：</a:t>
             </a:r>
             <a:r>
               <a:rPr sz="1050">
@@ -4348,7 +4348,7 @@
                 </a:solidFill>
                 <a:latin typeface="Microsoft YaHei"/>
               </a:rPr>
-              <a:t>沿规划步道构建动态缓冲区。一旦偏航连续2周期，向老人温和语音纠偏，子女端提示微偏航。</a:t>
+              <a:t>汇聚19颗北斗卫星高精度遥测指标（$BDGGA）、CGCS2000坐标轨迹、航向与步速，实现毫秒级远程护航。</a:t>
             </a:r>
           </a:p>
           <a:p>
@@ -4372,7 +4372,7 @@
                 </a:solidFill>
                 <a:latin typeface="Microsoft YaHei"/>
               </a:rPr>
-              <a:t>第三层：长椅智能甄别与异常滞留告警：</a:t>
+              <a:t>高精动态安全微走廊与异常滞留：</a:t>
             </a:r>
             <a:r>
               <a:rPr sz="1050">
@@ -4381,7 +4381,7 @@
                 </a:solidFill>
                 <a:latin typeface="Microsoft YaHei"/>
               </a:rPr>
-              <a:t>长椅/凉亭静止识别为休整，自动抑制误报；若在偏僻无设施路段静止超15分钟，秒级触发高危预警。</a:t>
+              <a:t>沿路线自动生成50-80m安全走廊；长椅休整自动豁免，偏僻路段滞留超限自动触发声光告警。</a:t>
             </a:r>
           </a:p>
           <a:p>
@@ -4405,7 +4405,7 @@
                 </a:solidFill>
                 <a:latin typeface="Microsoft YaHei"/>
               </a:rPr>
-              <a:t>一键报平安与双向亲情互动：</a:t>
+              <a:t>快捷亲情双向守护动作：</a:t>
             </a:r>
             <a:r>
               <a:rPr sz="1050">
@@ -4414,7 +4414,7 @@
                 </a:solidFill>
                 <a:latin typeface="Microsoft YaHei"/>
               </a:rPr>
-              <a:t>长辈到达公园点击报平安，子女端即刻收到带有北斗精准时空签章的平安卡片。</a:t>
+              <a:t>子女端提供『📞 一键致电长辈』与『💬 发送安心关怀』，与长辈端一键报平安形成温暖双向闭环。</a:t>
             </a:r>
           </a:p>
         </p:txBody>
@@ -4511,7 +4511,7 @@
               </a:defRPr>
             </a:pPr>
             <a:r>
-              <a:t>【请在此插入：子女端安全大屏 guardian.vue 电子围栏绘制与轨迹监控截图】</a:t>
+              <a:t>【请在此插入：老人端极简导航 vs 子女端守护大屏双端界面实机对比截图】</a:t>
             </a:r>
           </a:p>
         </p:txBody>
@@ -5795,7 +5795,7 @@
               </a:defRPr>
             </a:pPr>
             <a:r>
-              <a:t>严苛工程检验：146项全绿自动化测试与性能指标</a:t>
+              <a:t>严苛工程检验：147项全绿自动化测试与Docker容器化微服务</a:t>
             </a:r>
           </a:p>
         </p:txBody>
@@ -5876,7 +5876,7 @@
               </a:defRPr>
             </a:pPr>
             <a:r>
-              <a:t>146 </a:t>
+              <a:t>147 </a:t>
             </a:r>
             <a:r>
               <a:rPr sz="1300" b="1">
@@ -5901,7 +5901,7 @@
               </a:defRPr>
             </a:pPr>
             <a:r>
-              <a:t>全覆盖自动化测试套件 100% 通过 (12.35s)</a:t>
+              <a:t>自动化测试套件 100% 通过 (8.87s 全绿)</a:t>
             </a:r>
           </a:p>
         </p:txBody>
@@ -5982,7 +5982,7 @@
               </a:defRPr>
             </a:pPr>
             <a:r>
-              <a:t>&lt; 200 </a:t>
+              <a:t>Docker </a:t>
             </a:r>
             <a:r>
               <a:rPr sz="1300" b="1">
@@ -5991,7 +5991,7 @@
                 </a:solidFill>
                 <a:latin typeface="Microsoft YaHei"/>
               </a:rPr>
-              <a:t>ms</a:t>
+              <a:t>一键部署</a:t>
             </a:r>
           </a:p>
           <a:p>
@@ -6007,7 +6007,7 @@
               </a:defRPr>
             </a:pPr>
             <a:r>
-              <a:t>核心北斗与适老微地形API接口平均响应时延</a:t>
+              <a:t>前后端双容器编排隔离，docker compose一键启动</a:t>
             </a:r>
           </a:p>
         </p:txBody>
@@ -6088,7 +6088,7 @@
               </a:defRPr>
             </a:pPr>
             <a:r>
-              <a:t>1.2 </a:t>
+              <a:t>&lt; 200 </a:t>
             </a:r>
             <a:r>
               <a:rPr sz="1300" b="1">
@@ -6097,7 +6097,7 @@
                 </a:solidFill>
                 <a:latin typeface="Microsoft YaHei"/>
               </a:rPr>
-              <a:t>秒</a:t>
+              <a:t>ms</a:t>
             </a:r>
           </a:p>
           <a:p>
@@ -6113,7 +6113,7 @@
               </a:defRPr>
             </a:pPr>
             <a:r>
-              <a:t>5大Agent并发端到端推理与方案装配全耗时</a:t>
+              <a:t>核心北斗与适老微地形API高并发平均响应</a:t>
             </a:r>
           </a:p>
         </p:txBody>
@@ -6214,7 +6214,7 @@
                 </a:solidFill>
                 <a:latin typeface="Microsoft YaHei"/>
               </a:rPr>
-              <a:t>覆盖12项高斯坐标极限漂移、复杂凹多边形电子围栏穿透碰撞、弱网丢包自愈用例。</a:t>
+              <a:t>覆盖高斯坐标极限漂移、复杂凹多边形电子围栏穿透碰撞、弱网丢包自愈等高对抗用例。</a:t>
             </a:r>
           </a:p>
           <a:p>
@@ -6238,7 +6238,7 @@
                 </a:solidFill>
                 <a:latin typeface="Microsoft YaHei"/>
               </a:rPr>
-              <a:t>多Agent并发死锁防护：</a:t>
+              <a:t>多Agent信箱并发死锁防护：</a:t>
             </a:r>
             <a:r>
               <a:rPr sz="1050">
@@ -6247,7 +6247,7 @@
                 </a:solidFill>
                 <a:latin typeface="Microsoft YaHei"/>
               </a:rPr>
-              <a:t>微内核全序事件契约，高并发压力下零死锁、零竞态、单轮闭环率 100%。</a:t>
+              <a:t>微内核全序事件总线与Teammate Mailbox，高并发下零死锁、零竞态、单轮闭环率 100%。</a:t>
             </a:r>
           </a:p>
           <a:p>
@@ -6271,7 +6271,7 @@
                 </a:solidFill>
                 <a:latin typeface="Microsoft YaHei"/>
               </a:rPr>
-              <a:t>急救熔断与故障隔离：</a:t>
+              <a:t>容器化开箱即用体验：</a:t>
             </a:r>
             <a:r>
               <a:rPr sz="1050">
@@ -6280,7 +6280,7 @@
                 </a:solidFill>
                 <a:latin typeface="Microsoft YaHei"/>
               </a:rPr>
-              <a:t>模拟气象接口断网或大模型波动，系统毫秒级降级为本地离线微地形规则，保障导航不掉线。</a:t>
+              <a:t>提供标准 Dockerfile 与 docker-compose.yml，搭配一键启动脚本，脱离环境差异束缚。</a:t>
             </a:r>
           </a:p>
           <a:p>
@@ -6313,7 +6313,7 @@
                 </a:solidFill>
                 <a:latin typeface="Microsoft YaHei"/>
               </a:rPr>
-              <a:t>完备的测试驱动工程实践，具备冲击国家级一等奖的软件工业级品质。</a:t>
+              <a:t>测试驱动与容器化最佳实践，验证了系统具备工业级工程成熟度与可靠性。</a:t>
             </a:r>
           </a:p>
         </p:txBody>
@@ -6410,7 +6410,7 @@
               </a:defRPr>
             </a:pPr>
             <a:r>
-              <a:t>【请在此插入：Pytest 终端 146 项测试全绿通过截图 / 性能压测曲线图】</a:t>
+              <a:t>【请在此插入：Pytest 终端 147 项测试全绿通过截图 / Docker Compose 运行截图】</a:t>
             </a:r>
           </a:p>
         </p:txBody>
@@ -12331,7 +12331,7 @@
               </a:defRPr>
             </a:pPr>
             <a:r>
-              <a:t>智能体协同机制：5大领域智能体家族分工与全序事件总线</a:t>
+              <a:t>智能体协同机制：5大智能体家族与对等信箱磋商 (Teammate Mailbox)</a:t>
             </a:r>
           </a:p>
         </p:txBody>
@@ -12428,7 +12428,7 @@
               </a:defRPr>
             </a:pPr>
             <a:r>
-              <a:t>用户意图分析 · 任务分解编排 · 并发调度驱动 · 响应聚合播报</a:t>
+              <a:t>用户意图分析 · 任务分解编排 · 并发调度驱动 · 实时心智流显像</a:t>
             </a:r>
           </a:p>
         </p:txBody>
@@ -12913,7 +12913,7 @@
               </a:defRPr>
             </a:pPr>
             <a:r>
-              <a:t>【请在此插入：5大智能体拓扑协同交互图 / 微内核全序事件总线架构图】</a:t>
+              <a:t>【请在此插入：Teammate Mailbox 对等信箱通信拓扑图 / 实时心智流前端显像截图】</a:t>
             </a:r>
           </a:p>
         </p:txBody>
